--- a/2026-Q4/11-GodsCreatedOrder/Week11-GodsCreatedOrder.pptx
+++ b/2026-Q4/11-GodsCreatedOrder/Week11-GodsCreatedOrder.pptx
@@ -4,6 +4,9 @@
   <p:sldMasterIdLst>
     <p:sldMasterId id="2147483648" r:id="rId1"/>
   </p:sldMasterIdLst>
+  <p:notesMasterIdLst>
+    <p:notesMasterId r:id="rId9"/>
+  </p:notesMasterIdLst>
   <p:sldIdLst>
     <p:sldId id="256" r:id="rId2"/>
     <p:sldId id="257" r:id="rId3"/>
@@ -13,10 +16,7 @@
     <p:sldId id="261" r:id="rId7"/>
     <p:sldId id="262" r:id="rId8"/>
   </p:sldIdLst>
-  <p:notesMasterIdLst>
-    <p:notesMasterId r:id="rId9"/>
-  </p:notesMasterIdLst>
-  <p:sldSz cx="9144000" cy="6858000"/>
+  <p:sldSz cx="9144000" cy="6858000" type="screen4x3"/>
   <p:notesSz cx="6858000" cy="9144000"/>
   <p:defaultTextStyle>
     <a:lvl1pPr marL="0" algn="l" defTabSz="914400" rtl="0" eaLnBrk="1" latinLnBrk="0" hangingPunct="1">
@@ -110,6 +110,11 @@
       </a:defRPr>
     </a:lvl9pPr>
   </p:defaultTextStyle>
+  <p:extLst>
+    <p:ext uri="{EFAFB233-063F-42B5-8137-9DF3F51BA10A}">
+      <p15:sldGuideLst xmlns:p15="http://schemas.microsoft.com/office/powerpoint/2012/main"/>
+    </p:ext>
+  </p:extLst>
 </p:presentation>
 </file>
 
@@ -135,234 +140,10 @@
           <a:chExt cx="0" cy="0"/>
         </a:xfrm>
       </p:grpSpPr>
-      <p:sp>
-        <p:nvSpPr>
-          <p:cNvPr id="2" name="Header Placeholder 1"/>
-          <p:cNvSpPr>
-            <a:spLocks noGrp="1"/>
-          </p:cNvSpPr>
-          <p:nvPr>
-            <p:ph type="hdr" sz="quarter"/>
-          </p:nvPr>
-        </p:nvSpPr>
-        <p:spPr>
-          <a:xfrm>
-            <a:off x="0" y="0"/>
-            <a:ext cx="2971800" cy="458788"/>
-          </a:xfrm>
-          <a:prstGeom prst="rect">
-            <a:avLst/>
-          </a:prstGeom>
-        </p:spPr>
-        <p:txBody>
-          <a:bodyPr vert="horz" lIns="91440" tIns="45720" rIns="91440" bIns="45720" rtlCol="0"/>
-          <a:lstStyle>
-            <a:lvl1pPr algn="l">
-              <a:defRPr sz="1200"/>
-            </a:lvl1pPr>
-          </a:lstStyle>
-          <a:p>
-            <a:endParaRPr lang="en-US"/>
-          </a:p>
-        </p:txBody>
-      </p:sp>
-      <p:sp>
-        <p:nvSpPr>
-          <p:cNvPr id="3" name="Date Placeholder 2"/>
-          <p:cNvSpPr>
-            <a:spLocks noGrp="1"/>
-          </p:cNvSpPr>
-          <p:nvPr>
-            <p:ph type="dt" idx="1"/>
-          </p:nvPr>
-        </p:nvSpPr>
-        <p:spPr>
-          <a:xfrm>
-            <a:off x="3884613" y="0"/>
-            <a:ext cx="2971800" cy="458788"/>
-          </a:xfrm>
-          <a:prstGeom prst="rect">
-            <a:avLst/>
-          </a:prstGeom>
-        </p:spPr>
-        <p:txBody>
-          <a:bodyPr vert="horz" lIns="91440" tIns="45720" rIns="91440" bIns="45720" rtlCol="0"/>
-          <a:lstStyle>
-            <a:lvl1pPr algn="r">
-              <a:defRPr sz="1200"/>
-            </a:lvl1pPr>
-          </a:lstStyle>
-          <a:p>
-            <a:fld id="{5282F153-3F37-0F45-9E97-73ACFA13230C}" type="datetimeFigureOut">
-              <a:rPr lang="en-US"/>
-              <a:t>7/23/19</a:t>
-            </a:fld>
-            <a:endParaRPr lang="en-US"/>
-          </a:p>
-        </p:txBody>
-      </p:sp>
-      <p:sp>
-        <p:nvSpPr>
-          <p:cNvPr id="4" name="Slide Image Placeholder 3"/>
-          <p:cNvSpPr>
-            <a:spLocks noGrp="1" noRot="1" noChangeAspect="1"/>
-          </p:cNvSpPr>
-          <p:nvPr>
-            <p:ph type="sldImg" idx="2"/>
-          </p:nvPr>
-        </p:nvSpPr>
-        <p:spPr>
-          <a:xfrm>
-            <a:off x="685800" y="1143000"/>
-            <a:ext cx="5486400" cy="3086100"/>
-          </a:xfrm>
-          <a:prstGeom prst="rect">
-            <a:avLst/>
-          </a:prstGeom>
-          <a:noFill/>
-          <a:ln w="12700">
-            <a:solidFill>
-              <a:prstClr val="black"/>
-            </a:solidFill>
-          </a:ln>
-        </p:spPr>
-        <p:txBody>
-          <a:bodyPr vert="horz" lIns="91440" tIns="45720" rIns="91440" bIns="45720" rtlCol="0" anchor="ctr"/>
-          <a:lstStyle/>
-          <a:p>
-            <a:endParaRPr lang="en-US"/>
-          </a:p>
-        </p:txBody>
-      </p:sp>
-      <p:sp>
-        <p:nvSpPr>
-          <p:cNvPr id="5" name="Notes Placeholder 4"/>
-          <p:cNvSpPr>
-            <a:spLocks noGrp="1"/>
-          </p:cNvSpPr>
-          <p:nvPr>
-            <p:ph type="body" sz="quarter" idx="3"/>
-          </p:nvPr>
-        </p:nvSpPr>
-        <p:spPr>
-          <a:xfrm>
-            <a:off x="685800" y="4400550"/>
-            <a:ext cx="5486400" cy="3600450"/>
-          </a:xfrm>
-          <a:prstGeom prst="rect">
-            <a:avLst/>
-          </a:prstGeom>
-        </p:spPr>
-        <p:txBody>
-          <a:bodyPr vert="horz" lIns="91440" tIns="45720" rIns="91440" bIns="45720" rtlCol="0"/>
-          <a:lstStyle/>
-          <a:p>
-            <a:pPr lvl="0"/>
-            <a:r>
-              <a:rPr lang="en-US"/>
-              <a:t>Click to edit Master text styles</a:t>
-            </a:r>
-          </a:p>
-          <a:p>
-            <a:pPr lvl="1"/>
-            <a:r>
-              <a:rPr lang="en-US"/>
-              <a:t>Second level</a:t>
-            </a:r>
-          </a:p>
-          <a:p>
-            <a:pPr lvl="2"/>
-            <a:r>
-              <a:rPr lang="en-US"/>
-              <a:t>Third level</a:t>
-            </a:r>
-          </a:p>
-          <a:p>
-            <a:pPr lvl="3"/>
-            <a:r>
-              <a:rPr lang="en-US"/>
-              <a:t>Fourth level</a:t>
-            </a:r>
-          </a:p>
-          <a:p>
-            <a:pPr lvl="4"/>
-            <a:r>
-              <a:rPr lang="en-US"/>
-              <a:t>Fifth level</a:t>
-            </a:r>
-          </a:p>
-        </p:txBody>
-      </p:sp>
-      <p:sp>
-        <p:nvSpPr>
-          <p:cNvPr id="6" name="Footer Placeholder 5"/>
-          <p:cNvSpPr>
-            <a:spLocks noGrp="1"/>
-          </p:cNvSpPr>
-          <p:nvPr>
-            <p:ph type="ftr" sz="quarter" idx="4"/>
-          </p:nvPr>
-        </p:nvSpPr>
-        <p:spPr>
-          <a:xfrm>
-            <a:off x="0" y="8685213"/>
-            <a:ext cx="2971800" cy="458787"/>
-          </a:xfrm>
-          <a:prstGeom prst="rect">
-            <a:avLst/>
-          </a:prstGeom>
-        </p:spPr>
-        <p:txBody>
-          <a:bodyPr vert="horz" lIns="91440" tIns="45720" rIns="91440" bIns="45720" rtlCol="0" anchor="b"/>
-          <a:lstStyle>
-            <a:lvl1pPr algn="l">
-              <a:defRPr sz="1200"/>
-            </a:lvl1pPr>
-          </a:lstStyle>
-          <a:p>
-            <a:endParaRPr lang="en-US"/>
-          </a:p>
-        </p:txBody>
-      </p:sp>
-      <p:sp>
-        <p:nvSpPr>
-          <p:cNvPr id="7" name="Slide Number Placeholder 6"/>
-          <p:cNvSpPr>
-            <a:spLocks noGrp="1"/>
-          </p:cNvSpPr>
-          <p:nvPr>
-            <p:ph type="sldNum" sz="quarter" idx="5"/>
-          </p:nvPr>
-        </p:nvSpPr>
-        <p:spPr>
-          <a:xfrm>
-            <a:off x="3884613" y="8685213"/>
-            <a:ext cx="2971800" cy="458787"/>
-          </a:xfrm>
-          <a:prstGeom prst="rect">
-            <a:avLst/>
-          </a:prstGeom>
-        </p:spPr>
-        <p:txBody>
-          <a:bodyPr vert="horz" lIns="91440" tIns="45720" rIns="91440" bIns="45720" rtlCol="0" anchor="b"/>
-          <a:lstStyle>
-            <a:lvl1pPr algn="r">
-              <a:defRPr sz="1200"/>
-            </a:lvl1pPr>
-          </a:lstStyle>
-          <a:p>
-            <a:fld id="{CE5E9CC1-C706-0F49-92D6-E571CC5EEA8F}" type="slidenum">
-              <a:rPr lang="en-US"/>
-              <a:t>‹#›</a:t>
-            </a:fld>
-            <a:endParaRPr lang="en-US"/>
-          </a:p>
-        </p:txBody>
-      </p:sp>
     </p:spTree>
     <p:extLst>
       <p:ext uri="{BB962C8B-B14F-4D97-AF65-F5344CB8AC3E}">
-        <p14:creationId xmlns:p14="http://schemas.microsoft.com/office/powerpoint/2010/main" val="1024086991"/>
+        <p14:creationId xmlns:p14="http://schemas.microsoft.com/office/powerpoint/2010/main" val="173449460"/>
       </p:ext>
     </p:extLst>
   </p:cSld>
@@ -508,9 +289,24 @@
           <a:p>
             <a:r>
               <a:rPr lang="en-US" dirty="0"/>
-              <a:t>[0:00] MAXIMUM CARE WEEK. Tone-set at once, warmly: “This is the most contested lesson in the course, and it touches people personally. I’m going to argue a narrow position — and I’m going to spend as much time on what Scripture does NOT restrict as on what it does, because both are in the text. Test me hard. If you disagree, you’re in good company with people who love this Bible. Let’s reason together.” Note the title verse is “let a woman LEARN” — chosen deliberately to open on the passage’s dignifying command, not a prohibition.</a:t>
-            </a:r>
-            <a:endParaRPr lang="en-US" dirty="0"/>
+              <a:t>[0:00] MAXIMUM CARE WEEK. Tone-set at once, warmly: “This is the most contested lesson in the course, and it touches people personally. I’m going to argue a narrow position </a:t>
+            </a:r>
+            <a:r>
+              <a:rPr lang="en-US"/>
+              <a:t>→ </a:t>
+            </a:r>
+            <a:r>
+              <a:rPr lang="en-US" dirty="0"/>
+              <a:t>and I’m going to spend as much time on what Scripture does NOT restrict as on what it does, because both are in the text. Test me hard. If you disagree, you’re in good company with people who love this Bible. Let’s reason together.” Note the title verse is “let a woman LEARN” </a:t>
+            </a:r>
+            <a:r>
+              <a:rPr lang="en-US"/>
+              <a:t>→</a:t>
+            </a:r>
+            <a:r>
+              <a:rPr lang="en-US" dirty="0"/>
+              <a:t> chosen deliberately to open on the passage’s dignifying command, not a prohibition.</a:t>
+            </a:r>
           </a:p>
         </p:txBody>
       </p:sp>
@@ -597,13 +393,68 @@
             <a:r>
               <a:rPr lang="en-US" dirty="0"/>
               <a:t>[0:00–10:00]
-LEAD WITH EQUALITY — this order is deliberate and pastoral. The class hears “equal image, shared mandate” BEFORE any restriction.
-[CLICK] Gen 1–2 — equal AND ordered, and the order is PRE-fall (design). “Helper” (ezer) is a strong word — used of God Himself helping Israel. Not subordinate-assistant.
-[CLICK] Gen 3 — disorder enters by deception. Paul will appeal to this, not to demean but to diagnose.
-[CLICK] 1 Tim 2:13–14 — read it plainly.
-[CLICK] THE CRUCIAL GUARD — spend real time here. v.14 describes the garden event, NOT a female defect. And Adam bears primary blame everywhere else (Rom 5). Kill the “women are gullible” misreading dead, out loud. This protects every woman in the room and shows you read carefully. Transition: “Now the disputed text itself — and notice how it OPENS.”</a:t>
-            </a:r>
-            <a:endParaRPr lang="en-US" dirty="0"/>
+LEAD WITH EQUALITY </a:t>
+            </a:r>
+            <a:r>
+              <a:rPr lang="en-US"/>
+              <a:t>→ </a:t>
+            </a:r>
+            <a:r>
+              <a:rPr lang="en-US" dirty="0"/>
+              <a:t>this order is deliberate and pastoral. The class hears “equal image, shared mandate” BEFORE any restriction.
+[CLICK] Gen 1–2 </a:t>
+            </a:r>
+            <a:r>
+              <a:rPr lang="en-US"/>
+              <a:t>→ </a:t>
+            </a:r>
+            <a:r>
+              <a:rPr lang="en-US" dirty="0"/>
+              <a:t>equal AND ordered, and the order is PRE-fall (design). “Helper” (ezer) is a strong word </a:t>
+            </a:r>
+            <a:r>
+              <a:rPr lang="en-US"/>
+              <a:t>→ </a:t>
+            </a:r>
+            <a:r>
+              <a:rPr lang="en-US" dirty="0"/>
+              <a:t>used of God Himself helping Israel. Not subordinate-assistant.
+[CLICK] Gen 3 </a:t>
+            </a:r>
+            <a:r>
+              <a:rPr lang="en-US"/>
+              <a:t>→ </a:t>
+            </a:r>
+            <a:r>
+              <a:rPr lang="en-US" dirty="0"/>
+              <a:t>disorder enters by deception. Paul will appeal to this, not to demean but to diagnose.
+[CLICK] 1 Tim 2:13–14 </a:t>
+            </a:r>
+            <a:r>
+              <a:rPr lang="en-US"/>
+              <a:t>→ </a:t>
+            </a:r>
+            <a:r>
+              <a:rPr lang="en-US" dirty="0"/>
+              <a:t>read it plainly.
+[CLICK] THE CRUCIAL GUARD </a:t>
+            </a:r>
+            <a:r>
+              <a:rPr lang="en-US"/>
+              <a:t>→ </a:t>
+            </a:r>
+            <a:r>
+              <a:rPr lang="en-US" dirty="0"/>
+              <a:t>spend real time here. v.14 describes the garden event, NOT a female defect. And Adam bears primary blame everywhere else (Rom 5). Kill the “women are gullible” misreading dead, out loud. This protects every woman in the room and shows you read carefully. Transition: “Now the disputed text itself </a:t>
+            </a:r>
+            <a:r>
+              <a:rPr lang="en-US"/>
+              <a:t>→</a:t>
+            </a:r>
+            <a:r>
+              <a:rPr lang="en-US" dirty="0"/>
+              <a:t> and notice how it OPENS.”</a:t>
+            </a:r>
           </a:p>
         </p:txBody>
       </p:sp>
@@ -690,12 +541,67 @@
             <a:r>
               <a:rPr lang="en-US" dirty="0"/>
               <a:t>[10:00–24:00]
-[CLICK] START ON “LET HER LEARN” — the passage’s first move is to DIGNIFY. In much of the ancient world women weren’t discipled as students; Paul commands it. Frame the whole text as pro-woman-as-disciple.
-[CLICK] 2:12 + hesychia — settled, not silenced (it’s the same word as “peaceful and quiet life” in 2:2, which nobody thinks means mute). Precision protects against overreach.
-[CLICK] Scope from within the letter — “teach” in 1 Timothy is doctrinal GOVERNANCE (1:3; 4:11; 6:2–3), and 3:2 immediately ties teaching to the overseer role. So the restriction is the governing office, not all speech. This is the NARROW position — name it as narrow.
-[CLICK] The Ephesus-vs-Genesis point (last week’s bridge, now cashed). Paul demonstrably CAN give a local reason (5:14) and doesn’t here — he grounds it in creation. Be fair: some read 2:13 itself as culturally shaped; note that honestly, then give your reason for taking it as trans-local. Transition: “Now — and this is half the lesson — what is NOT restricted.”</a:t>
-            </a:r>
-            <a:endParaRPr lang="en-US" dirty="0"/>
+[CLICK] START ON “LET HER LEARN” </a:t>
+            </a:r>
+            <a:r>
+              <a:rPr lang="en-US"/>
+              <a:t>→ </a:t>
+            </a:r>
+            <a:r>
+              <a:rPr lang="en-US" dirty="0"/>
+              <a:t>the passage’s first move is to DIGNIFY. In much of the ancient world women weren’t discipled as students; Paul commands it. Frame the whole text as pro-woman-as-disciple.
+[CLICK] 2:12 + hesychia </a:t>
+            </a:r>
+            <a:r>
+              <a:rPr lang="en-US"/>
+              <a:t>→ </a:t>
+            </a:r>
+            <a:r>
+              <a:rPr lang="en-US" dirty="0"/>
+              <a:t>settled, not silenced (it’s the same word as “peaceful and quiet life” in 2:2, which nobody thinks means mute). Precision protects against overreach.
+[CLICK] Scope from within the letter </a:t>
+            </a:r>
+            <a:r>
+              <a:rPr lang="en-US"/>
+              <a:t>→ </a:t>
+            </a:r>
+            <a:r>
+              <a:rPr lang="en-US" dirty="0"/>
+              <a:t>“teach” in 1 Timothy is doctrinal GOVERNANCE (1:3; 4:11; 6:2–3), and 3:2 immediately ties teaching to the overseer role. So the restriction is the governing office, not all speech. This is the NARROW position </a:t>
+            </a:r>
+            <a:r>
+              <a:rPr lang="en-US"/>
+              <a:t>→ </a:t>
+            </a:r>
+            <a:r>
+              <a:rPr lang="en-US" dirty="0"/>
+              <a:t>name it as narrow.
+[CLICK] The Ephesus-vs-Genesis point (last week’s bridge, now cashed). Paul demonstrably CAN give a local reason (5:14) and doesn’t here </a:t>
+            </a:r>
+            <a:r>
+              <a:rPr lang="en-US"/>
+              <a:t>→ </a:t>
+            </a:r>
+            <a:r>
+              <a:rPr lang="en-US" dirty="0"/>
+              <a:t>he grounds it in creation. Be fair: some read 2:13 itself as culturally shaped; note that honestly, then give your reason for taking it as trans-local. Transition: “Now </a:t>
+            </a:r>
+            <a:r>
+              <a:rPr lang="en-US"/>
+              <a:t>→ </a:t>
+            </a:r>
+            <a:r>
+              <a:rPr lang="en-US" dirty="0"/>
+              <a:t>and this is half the lesson </a:t>
+            </a:r>
+            <a:r>
+              <a:rPr lang="en-US"/>
+              <a:t>→</a:t>
+            </a:r>
+            <a:r>
+              <a:rPr lang="en-US" dirty="0"/>
+              <a:t> what is NOT restricted.”</a:t>
+            </a:r>
           </a:p>
         </p:txBody>
       </p:sp>
@@ -781,15 +687,78 @@
           <a:p>
             <a:r>
               <a:rPr lang="en-US" dirty="0"/>
-              <a:t>[24:00–34:00 — THIS IS HALF THE LESSON. Give it equal weight to the restriction.]
-The four green boxes appear one at a time. Deliver each as GOOD NEWS stated positively — not “women may do these lesser things” but “Scripture PLAINLY shows women doing these, and honors them for it.”
-[CLICK] Pray &amp; prophesy — 1 Cor 11:5 assumes it; Paul regulates manner, not permission. Huge: prophecy is public, Spirit-given speech.
-[CLICK] Gospel labor — Euodia &amp; Syntyche “struggled beside me”; Rom 16 names ~10 women. Paul’s ministry ran ON women coworkers.
-[CLICK] Deacon — Phoebe, diakonos, entrusted with the Roman letter itself by many reckonings.
-[CLICK] Teaching in fitting settings — Titus 2 COMMANDS older women to teach; Priscilla teaches Apollos (privately, with her husband). Teaching per se is not the issue — the governing office is.
-[CLICK] The 11:5 / 14:34 reconciliation — prophecy vs. authoritative weighing (14:29). Hold BOTH; explain neither away. This is the Week-8 “by this we know” care applied to a hard pair. Transition: “So let’s be precise about what rests on WHAT.”</a:t>
-            </a:r>
-            <a:endParaRPr lang="en-US" dirty="0"/>
+              <a:t>[24:00–34:00 </a:t>
+            </a:r>
+            <a:r>
+              <a:rPr lang="en-US"/>
+              <a:t>→ </a:t>
+            </a:r>
+            <a:r>
+              <a:rPr lang="en-US" dirty="0"/>
+              <a:t>THIS IS HALF THE LESSON. Give it equal weight to the restriction.]
+The four green boxes appear one at a time. Deliver each as GOOD NEWS stated positively </a:t>
+            </a:r>
+            <a:r>
+              <a:rPr lang="en-US"/>
+              <a:t>→ </a:t>
+            </a:r>
+            <a:r>
+              <a:rPr lang="en-US" dirty="0"/>
+              <a:t>not “women may do these lesser things” but “Scripture PLAINLY shows women doing these, and honors them for it.”
+[CLICK] Pray &amp; prophesy </a:t>
+            </a:r>
+            <a:r>
+              <a:rPr lang="en-US"/>
+              <a:t>→ </a:t>
+            </a:r>
+            <a:r>
+              <a:rPr lang="en-US" dirty="0"/>
+              <a:t>1 Cor 11:5 assumes it; Paul regulates manner, not permission. Huge: prophecy is public, Spirit-given speech.
+[CLICK] Gospel labor </a:t>
+            </a:r>
+            <a:r>
+              <a:rPr lang="en-US"/>
+              <a:t>→ </a:t>
+            </a:r>
+            <a:r>
+              <a:rPr lang="en-US" dirty="0"/>
+              <a:t>Euodia &amp; Syntyche “struggled beside me”; Rom 16 names ~10 women. Paul’s ministry ran ON women coworkers.
+[CLICK] Deacon </a:t>
+            </a:r>
+            <a:r>
+              <a:rPr lang="en-US"/>
+              <a:t>→ </a:t>
+            </a:r>
+            <a:r>
+              <a:rPr lang="en-US" dirty="0"/>
+              <a:t>Phoebe, diakonos, entrusted with the Roman letter itself by many reckonings.
+[CLICK] Teaching in fitting settings </a:t>
+            </a:r>
+            <a:r>
+              <a:rPr lang="en-US"/>
+              <a:t>→ </a:t>
+            </a:r>
+            <a:r>
+              <a:rPr lang="en-US" dirty="0"/>
+              <a:t>Titus 2 COMMANDS older women to teach; Priscilla teaches Apollos (privately, with her husband). Teaching per se is not the issue </a:t>
+            </a:r>
+            <a:r>
+              <a:rPr lang="en-US"/>
+              <a:t>→ </a:t>
+            </a:r>
+            <a:r>
+              <a:rPr lang="en-US" dirty="0"/>
+              <a:t>the governing office is.
+[CLICK] The 11:5 / 14:34 reconciliation </a:t>
+            </a:r>
+            <a:r>
+              <a:rPr lang="en-US"/>
+              <a:t>→</a:t>
+            </a:r>
+            <a:r>
+              <a:rPr lang="en-US" dirty="0"/>
+              <a:t> prophecy vs. authoritative weighing (14:29). Hold BOTH; explain neither away. This is the Week-8 “by this we know” care applied to a hard pair. Transition: “So let’s be precise about what rests on WHAT.”</a:t>
+            </a:r>
           </a:p>
         </p:txBody>
       </p:sp>
@@ -876,11 +845,34 @@
             <a:r>
               <a:rPr lang="en-US" dirty="0"/>
               <a:t>[34:00–42:00]
-[CLICK-less table appears whole] Walk the ranking top to bottom. The POINT is intellectual honesty: color-coded strength. Green = explicit texts (elder office, governing teaching). Gold = contextual (weighing prophecy). RED = rests on early PRACTICE, not command (baptizing/presiding). SAY THE RED ROW OUT LOUD as weak — “I won’t claim Scripture forbids a woman baptizing; it doesn’t. The early church did; that’s testimony, not command.” Conceding this buys enormous credibility for the strong rows.
-[CLICK] The honesty principle — overclaiming weak points discredits strong ones (this is the whole ethic of the week).
-[CLICK] Equality/function + Trinity anchor. 1 Cor 11:3: the Son is fully God AND ordered to the Father — order ≠ inferiority. Handle gently; don’t wade into eternal-subordination debates, just the plain point: functional order coexists with equal worth. Transition: “What is all this FOR?”</a:t>
-            </a:r>
-            <a:endParaRPr lang="en-US" dirty="0"/>
+[CLICK-less table appears whole] Walk the ranking top to bottom. The POINT is intellectual honesty: color-coded strength. Green = explicit texts (elder office, governing teaching). Gold = contextual (weighing prophecy). RED = rests on early PRACTICE, not command (baptizing/presiding). SAY THE RED ROW OUT LOUD as weak </a:t>
+            </a:r>
+            <a:r>
+              <a:rPr lang="en-US"/>
+              <a:t>→ </a:t>
+            </a:r>
+            <a:r>
+              <a:rPr lang="en-US" dirty="0"/>
+              <a:t>“I won’t claim Scripture forbids a woman baptizing; it doesn’t. The early church did; that’s testimony, not command.” Conceding this buys enormous credibility for the strong rows.
+[CLICK] The honesty principle </a:t>
+            </a:r>
+            <a:r>
+              <a:rPr lang="en-US"/>
+              <a:t>→ </a:t>
+            </a:r>
+            <a:r>
+              <a:rPr lang="en-US" dirty="0"/>
+              <a:t>overclaiming weak points discredits strong ones (this is the whole ethic of the week).
+[CLICK] Equality/function + Trinity anchor. 1 Cor 11:3: the Son is fully God AND ordered to the Father </a:t>
+            </a:r>
+            <a:r>
+              <a:rPr lang="en-US"/>
+              <a:t>→</a:t>
+            </a:r>
+            <a:r>
+              <a:rPr lang="en-US" dirty="0"/>
+              <a:t> order ≠ inferiority. Handle gently; don’t wade into eternal-subordination debates, just the plain point: functional order coexists with equal worth. Transition: “What is all this FOR?”</a:t>
+            </a:r>
           </a:p>
         </p:txBody>
       </p:sp>
@@ -967,12 +959,51 @@
             <a:r>
               <a:rPr lang="en-US" dirty="0"/>
               <a:t>[42:00 purpose → 45:00 discussion → 55:00]
-[CLICK] PURPOSE — land the heart before opening the floor. Not control; communion. Household/family imagery. This reframes the whole hour from restriction to ordered love. Do NOT skip this even if tight — it’s the pastoral resolution.
-[CLICK] Q1 — “let her learn” reframes the passage as pro-discipleship; and culture-vs-creation grounding (last week’s tool) decides whether a text is a waypoint or a pattern.
-[CLICK] Q2 — the humility question. Both overclaiming (making it about worth, or forbidding what Scripture permits) AND underclaiming (explaining away the plain restriction) are errors. Invite honest examples — gently, first-person, no naming absent people or churches.
+[CLICK] PURPOSE </a:t>
+            </a:r>
+            <a:r>
+              <a:rPr lang="en-US"/>
+              <a:t>→ </a:t>
+            </a:r>
+            <a:r>
+              <a:rPr lang="en-US" dirty="0"/>
+              <a:t>land the heart before opening the floor. Not control; communion. Household/family imagery. This reframes the whole hour from restriction to ordered love. Do NOT skip this even if tight </a:t>
+            </a:r>
+            <a:r>
+              <a:rPr lang="en-US"/>
+              <a:t>→ </a:t>
+            </a:r>
+            <a:r>
+              <a:rPr lang="en-US" dirty="0"/>
+              <a:t>it’s the pastoral resolution.
+[CLICK] Q1 </a:t>
+            </a:r>
+            <a:r>
+              <a:rPr lang="en-US"/>
+              <a:t>→ </a:t>
+            </a:r>
+            <a:r>
+              <a:rPr lang="en-US" dirty="0"/>
+              <a:t>“let her learn” reframes the passage as pro-discipleship; and culture-vs-creation grounding (last week’s tool) decides whether a text is a waypoint or a pattern.
+[CLICK] Q2 </a:t>
+            </a:r>
+            <a:r>
+              <a:rPr lang="en-US"/>
+              <a:t>→ </a:t>
+            </a:r>
+            <a:r>
+              <a:rPr lang="en-US" dirty="0"/>
+              <a:t>the humility question. Both overclaiming (making it about worth, or forbidding what Scripture permits) AND underclaiming (explaining away the plain restriction) are errors. Invite honest examples </a:t>
+            </a:r>
+            <a:r>
+              <a:rPr lang="en-US"/>
+              <a:t>→</a:t>
+            </a:r>
+            <a:r>
+              <a:rPr lang="en-US" dirty="0"/>
+              <a:t> gently, first-person, no naming absent people or churches.
 EXTRA CARE facilitating: some women present may have felt diminished by bad teaching on this; some hold egalitarian views sincerely. Protect everyone. If it gets heated, return to the text and to “brothers and sisters.” Read the ground rule aloud.</a:t>
             </a:r>
-            <a:endParaRPr lang="en-US" dirty="0"/>
           </a:p>
         </p:txBody>
       </p:sp>
@@ -1059,12 +1090,43 @@
             <a:r>
               <a:rPr lang="en-US" dirty="0"/>
               <a:t>[55:00 close, ~2 min]
-[CLICK] Next week’s reading — the finale; both flags (“obey” in the Commission; “ought to be teachers”) tie the whole course together.
-[CLICK] Preview Week 12 — the landing.
-[CLICK] Carry sentence — four beats: grounded, narrow, generous, for communion. Say it together.
-[CLICK] Close deliberately on “let a woman LEARN” — end where the passage begins, on dignity, not restriction. Dismiss warmly and unhurried; linger if people want to talk.</a:t>
-            </a:r>
-            <a:endParaRPr lang="en-US" dirty="0"/>
+[CLICK] Next week’s reading </a:t>
+            </a:r>
+            <a:r>
+              <a:rPr lang="en-US"/>
+              <a:t>→ </a:t>
+            </a:r>
+            <a:r>
+              <a:rPr lang="en-US" dirty="0"/>
+              <a:t>the finale; both flags (“obey” in the Commission; “ought to be teachers”) tie the whole course together.
+[CLICK] Preview Week 12 </a:t>
+            </a:r>
+            <a:r>
+              <a:rPr lang="en-US"/>
+              <a:t>→ </a:t>
+            </a:r>
+            <a:r>
+              <a:rPr lang="en-US" dirty="0"/>
+              <a:t>the landing.
+[CLICK] Carry sentence </a:t>
+            </a:r>
+            <a:r>
+              <a:rPr lang="en-US"/>
+              <a:t>→ </a:t>
+            </a:r>
+            <a:r>
+              <a:rPr lang="en-US" dirty="0"/>
+              <a:t>four beats: grounded, narrow, generous, for communion. Say it together.
+[CLICK] Close deliberately on “let a woman LEARN” </a:t>
+            </a:r>
+            <a:r>
+              <a:rPr lang="en-US"/>
+              <a:t>→</a:t>
+            </a:r>
+            <a:r>
+              <a:rPr lang="en-US" dirty="0"/>
+              <a:t> end where the passage begins, on dignity, not restriction. Dismiss warmly and unhurried; linger if people want to talk.</a:t>
+            </a:r>
           </a:p>
         </p:txBody>
       </p:sp>
@@ -1137,6 +1199,11 @@
 <file path=ppt/slideMasters/slideMaster1.xml><?xml version="1.0" encoding="utf-8"?>
 <p:sldMaster xmlns:a="http://schemas.openxmlformats.org/drawingml/2006/main" xmlns:r="http://schemas.openxmlformats.org/officeDocument/2006/relationships" xmlns:p="http://schemas.openxmlformats.org/presentationml/2006/main">
   <p:cSld>
+    <p:bg>
+      <p:bgRef idx="1001">
+        <a:schemeClr val="bg1"/>
+      </p:bgRef>
+    </p:bg>
     <p:spTree>
       <p:nvGrpSpPr>
         <p:cNvPr id="1" name=""/>
@@ -1449,7 +1516,7 @@
           <a:bodyPr wrap="square" lIns="0" tIns="0" rIns="0" bIns="0" rtlCol="0" anchor="t"/>
           <a:lstStyle/>
           <a:p>
-            <a:pPr algn="ctr" indent="0" marL="0">
+            <a:pPr marL="0" indent="0" algn="ctr">
               <a:buNone/>
             </a:pPr>
             <a:r>
@@ -1461,7 +1528,7 @@
                 <a:ea typeface="Arial" pitchFamily="34" charset="-122"/>
                 <a:cs typeface="Arial" pitchFamily="34" charset="-120"/>
               </a:rPr>
-              <a:t>The Obedience of Faith — Week 11  ·  Unit IV: God’s House</a:t>
+              <a:t>The Obedience of Faith - Week 11  ·  Unit IV: God’s House</a:t>
             </a:r>
             <a:endParaRPr lang="en-US" sz="1600" dirty="0"/>
           </a:p>
@@ -1488,7 +1555,7 @@
           <a:bodyPr wrap="square" lIns="0" tIns="0" rIns="0" bIns="0" rtlCol="0" anchor="t"/>
           <a:lstStyle/>
           <a:p>
-            <a:pPr algn="ctr" indent="0" marL="0">
+            <a:pPr marL="0" indent="0" algn="ctr">
               <a:buNone/>
             </a:pPr>
             <a:r>
@@ -1527,7 +1594,7 @@
           <a:bodyPr wrap="square" lIns="0" tIns="0" rIns="0" bIns="0" rtlCol="0" anchor="t"/>
           <a:lstStyle/>
           <a:p>
-            <a:pPr algn="ctr" indent="0" marL="0">
+            <a:pPr marL="0" indent="0" algn="ctr">
               <a:buNone/>
             </a:pPr>
             <a:r>
@@ -1539,7 +1606,29 @@
                 <a:ea typeface="Arial" pitchFamily="34" charset="-122"/>
                 <a:cs typeface="Arial" pitchFamily="34" charset="-120"/>
               </a:rPr>
-              <a:t>A narrow, careful question — and the full breadth of women’s ministry</a:t>
+              <a:t>A narrow, careful question </a:t>
+            </a:r>
+            <a:r>
+              <a:rPr lang="en-US" sz="1800" b="1" i="1">
+                <a:solidFill>
+                  <a:srgbClr val="1F497D"/>
+                </a:solidFill>
+                <a:latin typeface="Arial" pitchFamily="34" charset="0"/>
+                <a:ea typeface="Arial" pitchFamily="34" charset="-122"/>
+                <a:cs typeface="Arial" pitchFamily="34" charset="-120"/>
+              </a:rPr>
+              <a:t>→</a:t>
+            </a:r>
+            <a:r>
+              <a:rPr lang="en-US" sz="1800" b="1" i="1" dirty="0">
+                <a:solidFill>
+                  <a:srgbClr val="1F497D"/>
+                </a:solidFill>
+                <a:latin typeface="Arial" pitchFamily="34" charset="0"/>
+                <a:ea typeface="Arial" pitchFamily="34" charset="-122"/>
+                <a:cs typeface="Arial" pitchFamily="34" charset="-120"/>
+              </a:rPr>
+              <a:t> and the full breadth of women’s ministry</a:t>
             </a:r>
             <a:endParaRPr lang="en-US" sz="1600" dirty="0"/>
           </a:p>
@@ -1566,11 +1655,11 @@
           <a:bodyPr wrap="square" lIns="0" tIns="0" rIns="0" bIns="0" rtlCol="0" anchor="t"/>
           <a:lstStyle/>
           <a:p>
-            <a:pPr algn="ctr" indent="0" marL="0">
+            <a:pPr marL="0" indent="0" algn="ctr">
               <a:buNone/>
             </a:pPr>
             <a:r>
-              <a:rPr lang="en-US" sz="2100" i="1" dirty="0">
+              <a:rPr lang="en-US" sz="2800" i="1" dirty="0">
                 <a:solidFill>
                   <a:srgbClr val="000000"/>
                 </a:solidFill>
@@ -1580,17 +1669,14 @@
               </a:rPr>
               <a:t>“Let a woman learn in quietness with all submissiveness.”</a:t>
             </a:r>
-            <a:pPr algn="ctr" indent="0" marL="0">
+            <a:endParaRPr lang="en-US" sz="2000" dirty="0"/>
+          </a:p>
+          <a:p>
+            <a:pPr marL="0" indent="0" algn="ctr">
               <a:buNone/>
             </a:pPr>
-            <a:endParaRPr lang="en-US" sz="1600" dirty="0"/>
-          </a:p>
-          <a:p>
-            <a:pPr algn="ctr" indent="0" marL="0">
-              <a:buNone/>
-            </a:pPr>
-            <a:r>
-              <a:rPr lang="en-US" sz="1800" dirty="0">
+            <a:r>
+              <a:rPr lang="en-US" sz="2400" dirty="0">
                 <a:solidFill>
                   <a:srgbClr val="000000"/>
                 </a:solidFill>
@@ -1600,7 +1686,7 @@
               </a:rPr>
               <a:t>(1 Timothy 2:11)</a:t>
             </a:r>
-            <a:endParaRPr lang="en-US" sz="1600" dirty="0"/>
+            <a:endParaRPr lang="en-US" sz="2000" dirty="0"/>
           </a:p>
         </p:txBody>
       </p:sp>
@@ -1612,7 +1698,7 @@
         </p:nvSpPr>
         <p:spPr>
           <a:xfrm>
-            <a:off x="914400" y="4663440"/>
+            <a:off x="914400" y="4858173"/>
             <a:ext cx="7315200" cy="457200"/>
           </a:xfrm>
           <a:prstGeom prst="rect">
@@ -1625,7 +1711,7 @@
           <a:bodyPr wrap="square" lIns="0" tIns="0" rIns="0" bIns="0" rtlCol="0" anchor="t"/>
           <a:lstStyle/>
           <a:p>
-            <a:pPr algn="ctr" indent="0" marL="0">
+            <a:pPr marL="0" indent="0" algn="ctr">
               <a:buNone/>
             </a:pPr>
             <a:r>
@@ -1636,7 +1722,7 @@
                 <a:latin typeface="Arial" pitchFamily="34" charset="0"/>
                 <a:ea typeface="Arial" pitchFamily="34" charset="-122"/>
                 <a:cs typeface="Arial" pitchFamily="34" charset="-120"/>
-                <a:hlinkClick r:id="rId1" invalidUrl="" action="" tgtFrame="" tooltip="" history="1" highlightClick="0" endSnd="0">
+                <a:hlinkClick r:id="rId3">
                   <a:extLst>
                     <a:ext uri="{A12FA001-AC4F-418D-AE19-62706E023703}">
                       <ahyp:hlinkClr xmlns:ahyp="http://schemas.microsoft.com/office/drawing/2018/hyperlinkcolor" val="tx"/>
@@ -1644,7 +1730,36 @@
                   </a:extLst>
                 </a:hlinkClick>
               </a:rPr>
-              <a:t>https://tinyurl.com/TeachTheWord</a:t>
+              <a:t>https://</a:t>
+            </a:r>
+            <a:r>
+              <a:rPr lang="en-US" sz="1600" b="1" u="sng" dirty="0" err="1">
+                <a:solidFill>
+                  <a:srgbClr val="4F81BD"/>
+                </a:solidFill>
+                <a:latin typeface="Arial" pitchFamily="34" charset="0"/>
+                <a:ea typeface="Arial" pitchFamily="34" charset="-122"/>
+                <a:cs typeface="Arial" pitchFamily="34" charset="-120"/>
+                <a:hlinkClick r:id="rId3">
+                  <a:extLst>
+                    <a:ext uri="{A12FA001-AC4F-418D-AE19-62706E023703}">
+                      <ahyp:hlinkClr xmlns:ahyp="http://schemas.microsoft.com/office/drawing/2018/hyperlinkcolor" val="tx"/>
+                    </a:ext>
+                  </a:extLst>
+                </a:hlinkClick>
+              </a:rPr>
+              <a:t>TeachTheWord</a:t>
+            </a:r>
+            <a:r>
+              <a:rPr lang="en-US" sz="1600" b="1" u="sng" dirty="0" err="1">
+                <a:solidFill>
+                  <a:srgbClr val="4F81BD"/>
+                </a:solidFill>
+                <a:latin typeface="Arial" pitchFamily="34" charset="0"/>
+                <a:ea typeface="Arial" pitchFamily="34" charset="-122"/>
+                <a:cs typeface="Arial" pitchFamily="34" charset="-120"/>
+              </a:rPr>
+              <a:t>.Church</a:t>
             </a:r>
             <a:endParaRPr lang="en-US" sz="1600" dirty="0"/>
           </a:p>
@@ -1696,7 +1811,7 @@
           <a:bodyPr wrap="square" lIns="0" tIns="0" rIns="0" bIns="0" rtlCol="0" anchor="t"/>
           <a:lstStyle/>
           <a:p>
-            <a:pPr algn="l" indent="0" marL="0">
+            <a:pPr marL="0" indent="0" algn="l">
               <a:buNone/>
             </a:pPr>
             <a:r>
@@ -1735,11 +1850,11 @@
           <a:bodyPr wrap="square" lIns="0" tIns="0" rIns="0" bIns="0" rtlCol="0" anchor="t"/>
           <a:lstStyle/>
           <a:p>
-            <a:pPr algn="l" indent="0" marL="0">
+            <a:pPr marL="0" indent="0" algn="l">
               <a:buNone/>
             </a:pPr>
             <a:r>
-              <a:rPr lang="en-US" sz="1300" b="1" dirty="0">
+              <a:rPr lang="en-US" sz="2000" b="1" dirty="0">
                 <a:solidFill>
                   <a:srgbClr val="4F81BD"/>
                 </a:solidFill>
@@ -1747,9 +1862,32 @@
                 <a:ea typeface="Arial" pitchFamily="34" charset="-122"/>
                 <a:cs typeface="Arial" pitchFamily="34" charset="-120"/>
               </a:rPr>
-              <a:t>Creation → fall — before any restriction</a:t>
-            </a:r>
-            <a:endParaRPr lang="en-US" sz="1600" dirty="0"/>
+              <a:t>Creation → fall </a:t>
+            </a:r>
+            <a:r>
+              <a:rPr lang="en-US" sz="2000" b="1" dirty="0">
+                <a:solidFill>
+                  <a:srgbClr val="4F81BD"/>
+                </a:solidFill>
+                <a:latin typeface="Arial" pitchFamily="34" charset="0"/>
+                <a:ea typeface="Arial" pitchFamily="34" charset="-122"/>
+                <a:cs typeface="Arial" pitchFamily="34" charset="-120"/>
+                <a:sym typeface="Wingdings" pitchFamily="2" charset="2"/>
+              </a:rPr>
+              <a:t></a:t>
+            </a:r>
+            <a:r>
+              <a:rPr lang="en-US" sz="2000" b="1" dirty="0">
+                <a:solidFill>
+                  <a:srgbClr val="4F81BD"/>
+                </a:solidFill>
+                <a:latin typeface="Arial" pitchFamily="34" charset="0"/>
+                <a:ea typeface="Arial" pitchFamily="34" charset="-122"/>
+                <a:cs typeface="Arial" pitchFamily="34" charset="-120"/>
+              </a:rPr>
+              <a:t> before any restriction</a:t>
+            </a:r>
+            <a:endParaRPr lang="en-US" sz="2800" dirty="0"/>
           </a:p>
         </p:txBody>
       </p:sp>
@@ -1761,8 +1899,8 @@
         </p:nvSpPr>
         <p:spPr>
           <a:xfrm>
-            <a:off x="365760" y="1051560"/>
-            <a:ext cx="8412480" cy="1051560"/>
+            <a:off x="365760" y="1051559"/>
+            <a:ext cx="8412480" cy="1463039"/>
           </a:xfrm>
           <a:prstGeom prst="rect">
             <a:avLst/>
@@ -1774,11 +1912,11 @@
           <a:bodyPr wrap="square" lIns="0" tIns="0" rIns="0" bIns="0" rtlCol="0" anchor="t"/>
           <a:lstStyle/>
           <a:p>
-            <a:pPr algn="l" indent="0" marL="0">
+            <a:pPr marL="0" indent="0" algn="l">
               <a:buNone/>
             </a:pPr>
             <a:r>
-              <a:rPr lang="en-US" sz="1500" b="1" dirty="0">
+              <a:rPr lang="en-US" b="1" dirty="0">
                 <a:solidFill>
                   <a:srgbClr val="1F497D"/>
                 </a:solidFill>
@@ -1786,14 +1924,11 @@
                 <a:ea typeface="Arial" pitchFamily="34" charset="-122"/>
                 <a:cs typeface="Arial" pitchFamily="34" charset="-120"/>
               </a:rPr>
-              <a:t>Genesis 1–2: equal, and ordered.
+              <a:t>Genesis 1–2: equal and ordered.
 </a:t>
             </a:r>
-            <a:pPr algn="l" indent="0" marL="0">
-              <a:buNone/>
-            </a:pPr>
-            <a:r>
-              <a:rPr lang="en-US" sz="1400" dirty="0">
+            <a:r>
+              <a:rPr lang="en-US" dirty="0">
                 <a:solidFill>
                   <a:srgbClr val="000000"/>
                 </a:solidFill>
@@ -1801,9 +1936,55 @@
                 <a:ea typeface="Arial" pitchFamily="34" charset="-122"/>
                 <a:cs typeface="Arial" pitchFamily="34" charset="-120"/>
               </a:rPr>
-              <a:t>Man and woman equally bear God’s image and share the mandate to rule (1:27–28). And within that equality, an ordered partnership — Adam formed first, Eve from him as “a helper corresponding to him” (2:18), a strong ally. This differentiation exists BEFORE the fall — it is design, not curse.</a:t>
-            </a:r>
-            <a:endParaRPr lang="en-US" sz="1600" dirty="0"/>
+              <a:t>Man and woman equally bear God’s image and share the mandate to rule (1:27–28). And within that equality, an ordered partnership </a:t>
+            </a:r>
+            <a:r>
+              <a:rPr lang="en-US" dirty="0">
+                <a:solidFill>
+                  <a:srgbClr val="000000"/>
+                </a:solidFill>
+                <a:latin typeface="Arial" pitchFamily="34" charset="0"/>
+                <a:ea typeface="Arial" pitchFamily="34" charset="-122"/>
+                <a:cs typeface="Arial" pitchFamily="34" charset="-120"/>
+                <a:sym typeface="Wingdings" pitchFamily="2" charset="2"/>
+              </a:rPr>
+              <a:t></a:t>
+            </a:r>
+            <a:r>
+              <a:rPr lang="en-US" dirty="0">
+                <a:solidFill>
+                  <a:srgbClr val="000000"/>
+                </a:solidFill>
+                <a:latin typeface="Arial" pitchFamily="34" charset="0"/>
+                <a:ea typeface="Arial" pitchFamily="34" charset="-122"/>
+                <a:cs typeface="Arial" pitchFamily="34" charset="-120"/>
+              </a:rPr>
+              <a:t> Adam formed first, Eve from him as “a helper corresponding to him” (2:18), a strong ally. This differentiation exists BEFORE the fall </a:t>
+            </a:r>
+            <a:r>
+              <a:rPr lang="en-US" dirty="0">
+                <a:solidFill>
+                  <a:srgbClr val="000000"/>
+                </a:solidFill>
+                <a:latin typeface="Arial" pitchFamily="34" charset="0"/>
+                <a:ea typeface="Arial" pitchFamily="34" charset="-122"/>
+                <a:cs typeface="Arial" pitchFamily="34" charset="-120"/>
+                <a:sym typeface="Wingdings" pitchFamily="2" charset="2"/>
+              </a:rPr>
+              <a:t> </a:t>
+            </a:r>
+            <a:r>
+              <a:rPr lang="en-US" dirty="0">
+                <a:solidFill>
+                  <a:srgbClr val="000000"/>
+                </a:solidFill>
+                <a:latin typeface="Arial" pitchFamily="34" charset="0"/>
+                <a:ea typeface="Arial" pitchFamily="34" charset="-122"/>
+                <a:cs typeface="Arial" pitchFamily="34" charset="-120"/>
+              </a:rPr>
+              <a:t>it is design, not curse.</a:t>
+            </a:r>
+            <a:endParaRPr lang="en-US" sz="2000" dirty="0"/>
           </a:p>
         </p:txBody>
       </p:sp>
@@ -1815,8 +1996,8 @@
         </p:nvSpPr>
         <p:spPr>
           <a:xfrm>
-            <a:off x="365760" y="2240280"/>
-            <a:ext cx="8412480" cy="914400"/>
+            <a:off x="365760" y="2547185"/>
+            <a:ext cx="8412480" cy="1090960"/>
           </a:xfrm>
           <a:prstGeom prst="rect">
             <a:avLst/>
@@ -1828,11 +2009,11 @@
           <a:bodyPr wrap="square" lIns="0" tIns="0" rIns="0" bIns="0" rtlCol="0" anchor="t"/>
           <a:lstStyle/>
           <a:p>
-            <a:pPr algn="l" indent="0" marL="0">
+            <a:pPr marL="0" indent="0" algn="l">
               <a:buNone/>
             </a:pPr>
             <a:r>
-              <a:rPr lang="en-US" sz="1500" b="1" dirty="0">
+              <a:rPr lang="en-US" b="1" dirty="0">
                 <a:solidFill>
                   <a:srgbClr val="1F497D"/>
                 </a:solidFill>
@@ -1840,14 +2021,22 @@
                 <a:ea typeface="Arial" pitchFamily="34" charset="-122"/>
                 <a:cs typeface="Arial" pitchFamily="34" charset="-120"/>
               </a:rPr>
-              <a:t>Genesis 3: disorder through deception.
+              <a:t>Genesis 3: disorder through deception.</a:t>
+            </a:r>
+            <a:r>
+              <a:rPr lang="en-US" sz="1600" b="1" dirty="0">
+                <a:solidFill>
+                  <a:srgbClr val="1F497D"/>
+                </a:solidFill>
+                <a:latin typeface="Arial" pitchFamily="34" charset="0"/>
+                <a:ea typeface="Arial" pitchFamily="34" charset="-122"/>
+                <a:cs typeface="Arial" pitchFamily="34" charset="-120"/>
+              </a:rPr>
+              <a:t>
 </a:t>
             </a:r>
-            <a:pPr algn="l" indent="0" marL="0">
-              <a:buNone/>
-            </a:pPr>
-            <a:r>
-              <a:rPr lang="en-US" sz="1400" dirty="0">
+            <a:r>
+              <a:rPr lang="en-US" dirty="0">
                 <a:solidFill>
                   <a:srgbClr val="000000"/>
                 </a:solidFill>
@@ -1855,9 +2044,9 @@
                 <a:ea typeface="Arial" pitchFamily="34" charset="-122"/>
                 <a:cs typeface="Arial" pitchFamily="34" charset="-120"/>
               </a:rPr>
-              <a:t>The serpent deceives Eve; Adam fails to guard; harmony collapses into mistrust and domination. Paul appeals to this narrative — not to rank worth, but to show how deception unravels God’s order.</a:t>
-            </a:r>
-            <a:endParaRPr lang="en-US" sz="1600" dirty="0"/>
+              <a:t>The serpent deceives Eve; Adam fails to guard; harmony collapses into mistrust and domination. Paul appeals to this narrative → not to rank worth, but to show how deception unravels God’s order.</a:t>
+            </a:r>
+            <a:endParaRPr lang="en-US" dirty="0"/>
           </a:p>
         </p:txBody>
       </p:sp>
@@ -1869,8 +2058,8 @@
         </p:nvSpPr>
         <p:spPr>
           <a:xfrm>
-            <a:off x="365760" y="3246120"/>
-            <a:ext cx="8412480" cy="1280160"/>
+            <a:off x="365760" y="3670732"/>
+            <a:ext cx="8412480" cy="914401"/>
           </a:xfrm>
           <a:prstGeom prst="rect">
             <a:avLst/>
@@ -1882,11 +2071,11 @@
           <a:bodyPr wrap="square" lIns="0" tIns="0" rIns="0" bIns="0" rtlCol="0" anchor="t"/>
           <a:lstStyle/>
           <a:p>
-            <a:pPr algn="l" indent="0" marL="0">
+            <a:pPr marL="0" indent="0" algn="l">
               <a:buNone/>
             </a:pPr>
             <a:r>
-              <a:rPr lang="en-US" sz="1500" b="1" i="1" dirty="0">
+              <a:rPr lang="en-US" b="1" i="1" dirty="0">
                 <a:solidFill>
                   <a:srgbClr val="000000"/>
                 </a:solidFill>
@@ -1896,11 +2085,8 @@
               </a:rPr>
               <a:t>“For Adam was formed first and then Eve. And Adam was not deceived, but the woman, because she was fully deceived, fell into transgression.” </a:t>
             </a:r>
-            <a:pPr algn="l" indent="0" marL="0">
-              <a:buNone/>
-            </a:pPr>
-            <a:r>
-              <a:rPr lang="en-US" sz="1400" b="1" dirty="0">
+            <a:r>
+              <a:rPr lang="en-US" b="1" dirty="0">
                 <a:solidFill>
                   <a:srgbClr val="000000"/>
                 </a:solidFill>
@@ -1910,7 +2096,7 @@
               </a:rPr>
               <a:t>(1 Timothy 2:13–14)</a:t>
             </a:r>
-            <a:endParaRPr lang="en-US" sz="1600" dirty="0"/>
+            <a:endParaRPr lang="en-US" sz="2000" dirty="0"/>
           </a:p>
         </p:txBody>
       </p:sp>
@@ -1922,8 +2108,8 @@
         </p:nvSpPr>
         <p:spPr>
           <a:xfrm>
-            <a:off x="365760" y="4617720"/>
-            <a:ext cx="8412480" cy="1508760"/>
+            <a:off x="365760" y="4617719"/>
+            <a:ext cx="8412480" cy="2003213"/>
           </a:xfrm>
           <a:prstGeom prst="rect">
             <a:avLst/>
@@ -1935,11 +2121,11 @@
           <a:bodyPr wrap="square" lIns="0" tIns="0" rIns="0" bIns="0" rtlCol="0" anchor="t"/>
           <a:lstStyle/>
           <a:p>
-            <a:pPr algn="l" indent="0" marL="0">
+            <a:pPr marL="0" indent="0" algn="l">
               <a:buNone/>
             </a:pPr>
             <a:r>
-              <a:rPr lang="en-US" sz="1400" b="1" dirty="0">
+              <a:rPr lang="en-US" b="1" dirty="0">
                 <a:solidFill>
                   <a:srgbClr val="B0413E"/>
                 </a:solidFill>
@@ -1947,14 +2133,11 @@
                 <a:ea typeface="Arial" pitchFamily="34" charset="-122"/>
                 <a:cs typeface="Arial" pitchFamily="34" charset="-120"/>
               </a:rPr>
-              <a:t>Read v.14 with care — note what it does NOT say:
+              <a:t>Read v.14 with care → note what it does NOT say:
 </a:t>
             </a:r>
-            <a:pPr algn="l" indent="0" marL="0">
-              <a:buNone/>
-            </a:pPr>
-            <a:r>
-              <a:rPr lang="en-US" sz="1350" dirty="0">
+            <a:r>
+              <a:rPr lang="en-US" sz="1600" dirty="0">
                 <a:solidFill>
                   <a:srgbClr val="000000"/>
                 </a:solidFill>
@@ -1962,29 +2145,12 @@
                 <a:ea typeface="Arial" pitchFamily="34" charset="-122"/>
                 <a:cs typeface="Arial" pitchFamily="34" charset="-120"/>
               </a:rPr>
-              <a:t>•  It describes what happened in the GARDEN — not a general claim that women are more gullible.
+              <a:t>•  It describes what happened in the GARDEN → not a general claim that women are more gullible.
+•  Scripture assigns Adam the PRIMARY responsibility: “sin entered the world through one man” (Rom 5:12); “in Adam all die” (1 Cor 15:22). Adam sinned knowingly → the graver failure.
 </a:t>
             </a:r>
-            <a:pPr algn="l" indent="0" marL="0">
-              <a:buNone/>
-            </a:pPr>
-            <a:r>
-              <a:rPr lang="en-US" sz="1350" dirty="0">
-                <a:solidFill>
-                  <a:srgbClr val="000000"/>
-                </a:solidFill>
-                <a:latin typeface="Arial" pitchFamily="34" charset="0"/>
-                <a:ea typeface="Arial" pitchFamily="34" charset="-122"/>
-                <a:cs typeface="Arial" pitchFamily="34" charset="-120"/>
-              </a:rPr>
-              <a:t>•  Scripture assigns Adam the PRIMARY responsibility: “sin entered the world through one man” (Rom 5:12); “in Adam all die” (1 Cor 15:22). Adam sinned knowingly — the graver failure.
-</a:t>
-            </a:r>
-            <a:pPr algn="l" indent="0" marL="0">
-              <a:buNone/>
-            </a:pPr>
-            <a:r>
-              <a:rPr lang="en-US" sz="1350" i="1" dirty="0">
+            <a:r>
+              <a:rPr lang="en-US" sz="1600" i="1" dirty="0">
                 <a:solidFill>
                   <a:srgbClr val="1F497D"/>
                 </a:solidFill>
@@ -1994,7 +2160,7 @@
               </a:rPr>
               <a:t>Any reading that makes v.14 mean “women are inferior” has misread Paul and contradicted the rest of Scripture.</a:t>
             </a:r>
-            <a:endParaRPr lang="en-US" sz="1600" dirty="0"/>
+            <a:endParaRPr lang="en-US" sz="2000" dirty="0"/>
           </a:p>
         </p:txBody>
       </p:sp>
@@ -2012,26 +2178,26 @@
               <p:cTn id="2" dur="indefinite" nodeType="mainSeq">
                 <p:childTnLst>
                   <p:par>
-                    <p:cTn id="7" fill="hold">
+                    <p:cTn id="3" fill="hold">
                       <p:stCondLst>
                         <p:cond delay="indefinite"/>
                       </p:stCondLst>
                       <p:childTnLst>
                         <p:par>
-                          <p:cTn id="8" fill="hold">
+                          <p:cTn id="4" fill="hold">
                             <p:stCondLst>
                               <p:cond delay="0"/>
                             </p:stCondLst>
                             <p:childTnLst>
                               <p:par>
-                                <p:cTn id="3" presetID="42" presetClass="entr" presetSubtype="0" fill="hold" grpId="0" nodeType="clickEffect">
+                                <p:cTn id="5" presetID="42" presetClass="entr" presetSubtype="0" fill="hold" nodeType="clickEffect">
                                   <p:stCondLst>
                                     <p:cond delay="0"/>
                                   </p:stCondLst>
                                   <p:childTnLst>
                                     <p:set>
                                       <p:cBhvr>
-                                        <p:cTn id="4" dur="1" fill="hold">
+                                        <p:cTn id="6" dur="1" fill="hold">
                                           <p:stCondLst>
                                             <p:cond delay="0"/>
                                           </p:stCondLst>
@@ -2049,7 +2215,7 @@
                                     </p:set>
                                     <p:animEffect transition="in" filter="fade">
                                       <p:cBhvr>
-                                        <p:cTn id="5" dur="1000"/>
+                                        <p:cTn id="7" dur="1000"/>
                                         <p:tgtEl>
                                           <p:spTgt spid="4"/>
                                         </p:tgtEl>
@@ -2057,7 +2223,7 @@
                                     </p:animEffect>
                                     <p:anim calcmode="lin" valueType="num">
                                       <p:cBhvr>
-                                        <p:cTn id="6" dur="1000" fill="hold"/>
+                                        <p:cTn id="8" dur="1000" fill="hold"/>
                                         <p:tgtEl>
                                           <p:spTgt spid="4"/>
                                         </p:tgtEl>
@@ -2088,26 +2254,26 @@
                     </p:cTn>
                   </p:par>
                   <p:par>
-                    <p:cTn id="13" fill="hold">
+                    <p:cTn id="9" fill="hold">
                       <p:stCondLst>
                         <p:cond delay="indefinite"/>
                       </p:stCondLst>
                       <p:childTnLst>
                         <p:par>
-                          <p:cTn id="14" fill="hold">
+                          <p:cTn id="10" fill="hold">
                             <p:stCondLst>
                               <p:cond delay="0"/>
                             </p:stCondLst>
                             <p:childTnLst>
                               <p:par>
-                                <p:cTn id="9" presetID="42" presetClass="entr" presetSubtype="0" fill="hold" grpId="0" nodeType="clickEffect">
+                                <p:cTn id="11" presetID="42" presetClass="entr" presetSubtype="0" fill="hold" nodeType="clickEffect">
                                   <p:stCondLst>
                                     <p:cond delay="0"/>
                                   </p:stCondLst>
                                   <p:childTnLst>
                                     <p:set>
                                       <p:cBhvr>
-                                        <p:cTn id="10" dur="1" fill="hold">
+                                        <p:cTn id="12" dur="1" fill="hold">
                                           <p:stCondLst>
                                             <p:cond delay="0"/>
                                           </p:stCondLst>
@@ -2125,7 +2291,7 @@
                                     </p:set>
                                     <p:animEffect transition="in" filter="fade">
                                       <p:cBhvr>
-                                        <p:cTn id="11" dur="1000"/>
+                                        <p:cTn id="13" dur="1000"/>
                                         <p:tgtEl>
                                           <p:spTgt spid="5"/>
                                         </p:tgtEl>
@@ -2133,7 +2299,7 @@
                                     </p:animEffect>
                                     <p:anim calcmode="lin" valueType="num">
                                       <p:cBhvr>
-                                        <p:cTn id="12" dur="1000" fill="hold"/>
+                                        <p:cTn id="14" dur="1000" fill="hold"/>
                                         <p:tgtEl>
                                           <p:spTgt spid="5"/>
                                         </p:tgtEl>
@@ -2164,26 +2330,26 @@
                     </p:cTn>
                   </p:par>
                   <p:par>
-                    <p:cTn id="19" fill="hold">
+                    <p:cTn id="15" fill="hold">
                       <p:stCondLst>
                         <p:cond delay="indefinite"/>
                       </p:stCondLst>
                       <p:childTnLst>
                         <p:par>
-                          <p:cTn id="20" fill="hold">
+                          <p:cTn id="16" fill="hold">
                             <p:stCondLst>
                               <p:cond delay="0"/>
                             </p:stCondLst>
                             <p:childTnLst>
                               <p:par>
-                                <p:cTn id="15" presetID="42" presetClass="entr" presetSubtype="0" fill="hold" grpId="0" nodeType="clickEffect">
+                                <p:cTn id="17" presetID="42" presetClass="entr" presetSubtype="0" fill="hold" nodeType="clickEffect">
                                   <p:stCondLst>
                                     <p:cond delay="0"/>
                                   </p:stCondLst>
                                   <p:childTnLst>
                                     <p:set>
                                       <p:cBhvr>
-                                        <p:cTn id="16" dur="1" fill="hold">
+                                        <p:cTn id="18" dur="1" fill="hold">
                                           <p:stCondLst>
                                             <p:cond delay="0"/>
                                           </p:stCondLst>
@@ -2201,7 +2367,7 @@
                                     </p:set>
                                     <p:animEffect transition="in" filter="fade">
                                       <p:cBhvr>
-                                        <p:cTn id="17" dur="1000"/>
+                                        <p:cTn id="19" dur="1000"/>
                                         <p:tgtEl>
                                           <p:spTgt spid="6"/>
                                         </p:tgtEl>
@@ -2209,7 +2375,7 @@
                                     </p:animEffect>
                                     <p:anim calcmode="lin" valueType="num">
                                       <p:cBhvr>
-                                        <p:cTn id="18" dur="1000" fill="hold"/>
+                                        <p:cTn id="20" dur="1000" fill="hold"/>
                                         <p:tgtEl>
                                           <p:spTgt spid="6"/>
                                         </p:tgtEl>
@@ -2240,26 +2406,26 @@
                     </p:cTn>
                   </p:par>
                   <p:par>
-                    <p:cTn id="25" fill="hold">
+                    <p:cTn id="21" fill="hold">
                       <p:stCondLst>
                         <p:cond delay="indefinite"/>
                       </p:stCondLst>
                       <p:childTnLst>
                         <p:par>
-                          <p:cTn id="26" fill="hold">
+                          <p:cTn id="22" fill="hold">
                             <p:stCondLst>
                               <p:cond delay="0"/>
                             </p:stCondLst>
                             <p:childTnLst>
                               <p:par>
-                                <p:cTn id="21" presetID="42" presetClass="entr" presetSubtype="0" fill="hold" grpId="0" nodeType="clickEffect">
+                                <p:cTn id="23" presetID="42" presetClass="entr" presetSubtype="0" fill="hold" nodeType="clickEffect">
                                   <p:stCondLst>
                                     <p:cond delay="0"/>
                                   </p:stCondLst>
                                   <p:childTnLst>
                                     <p:set>
                                       <p:cBhvr>
-                                        <p:cTn id="22" dur="1" fill="hold">
+                                        <p:cTn id="24" dur="1" fill="hold">
                                           <p:stCondLst>
                                             <p:cond delay="0"/>
                                           </p:stCondLst>
@@ -2277,7 +2443,7 @@
                                     </p:set>
                                     <p:animEffect transition="in" filter="fade">
                                       <p:cBhvr>
-                                        <p:cTn id="23" dur="1000"/>
+                                        <p:cTn id="25" dur="1000"/>
                                         <p:tgtEl>
                                           <p:spTgt spid="7"/>
                                         </p:tgtEl>
@@ -2285,7 +2451,7 @@
                                     </p:animEffect>
                                     <p:anim calcmode="lin" valueType="num">
                                       <p:cBhvr>
-                                        <p:cTn id="24" dur="1000" fill="hold"/>
+                                        <p:cTn id="26" dur="1000" fill="hold"/>
                                         <p:tgtEl>
                                           <p:spTgt spid="7"/>
                                         </p:tgtEl>
@@ -2378,7 +2544,7 @@
           <a:bodyPr wrap="square" lIns="0" tIns="0" rIns="0" bIns="0" rtlCol="0" anchor="t"/>
           <a:lstStyle/>
           <a:p>
-            <a:pPr algn="l" indent="0" marL="0">
+            <a:pPr marL="0" indent="0" algn="l">
               <a:buNone/>
             </a:pPr>
             <a:r>
@@ -2417,11 +2583,11 @@
           <a:bodyPr wrap="square" lIns="0" tIns="0" rIns="0" bIns="0" rtlCol="0" anchor="t"/>
           <a:lstStyle/>
           <a:p>
-            <a:pPr algn="l" indent="0" marL="0">
+            <a:pPr marL="0" indent="0" algn="l">
               <a:buNone/>
             </a:pPr>
             <a:r>
-              <a:rPr lang="en-US" sz="1300" b="1" dirty="0">
+              <a:rPr lang="en-US" sz="2000" b="1" dirty="0">
                 <a:solidFill>
                   <a:srgbClr val="4F81BD"/>
                 </a:solidFill>
@@ -2429,9 +2595,9 @@
                 <a:ea typeface="Arial" pitchFamily="34" charset="-122"/>
                 <a:cs typeface="Arial" pitchFamily="34" charset="-120"/>
               </a:rPr>
-              <a:t>1 Timothy 2:11–12 — read within the letter</a:t>
-            </a:r>
-            <a:endParaRPr lang="en-US" sz="1600" dirty="0"/>
+              <a:t>1 Timothy 2:11–12 → read within the letter</a:t>
+            </a:r>
+            <a:endParaRPr lang="en-US" sz="2800" dirty="0"/>
           </a:p>
         </p:txBody>
       </p:sp>
@@ -2443,8 +2609,8 @@
         </p:nvSpPr>
         <p:spPr>
           <a:xfrm>
-            <a:off x="365760" y="1005840"/>
-            <a:ext cx="8412480" cy="914400"/>
+            <a:off x="365760" y="1022961"/>
+            <a:ext cx="8412480" cy="1191249"/>
           </a:xfrm>
           <a:prstGeom prst="rect">
             <a:avLst/>
@@ -2456,11 +2622,11 @@
           <a:bodyPr wrap="square" lIns="0" tIns="0" rIns="0" bIns="0" rtlCol="0" anchor="t"/>
           <a:lstStyle/>
           <a:p>
-            <a:pPr algn="l" indent="0" marL="0">
+            <a:pPr marL="0" indent="0" algn="l">
               <a:buNone/>
             </a:pPr>
             <a:r>
-              <a:rPr lang="en-US" sz="1450" b="1" dirty="0">
+              <a:rPr lang="en-US" sz="2000" b="1" dirty="0">
                 <a:solidFill>
                   <a:srgbClr val="1F497D"/>
                 </a:solidFill>
@@ -2471,11 +2637,8 @@
               <a:t>It opens with a command that was radical in its world:
 </a:t>
             </a:r>
-            <a:pPr algn="l" indent="0" marL="0">
-              <a:buNone/>
-            </a:pPr>
-            <a:r>
-              <a:rPr lang="en-US" sz="1500" b="1" i="1" dirty="0">
+            <a:r>
+              <a:rPr lang="en-US" sz="2000" b="1" i="1" dirty="0">
                 <a:solidFill>
                   <a:srgbClr val="000000"/>
                 </a:solidFill>
@@ -2485,11 +2648,8 @@
               </a:rPr>
               <a:t>“Let a woman learn in quietness with all submissiveness.” </a:t>
             </a:r>
-            <a:pPr algn="l" indent="0" marL="0">
-              <a:buNone/>
-            </a:pPr>
-            <a:r>
-              <a:rPr lang="en-US" sz="1400" b="1" dirty="0">
+            <a:r>
+              <a:rPr lang="en-US" sz="2000" b="1" dirty="0">
                 <a:solidFill>
                   <a:srgbClr val="000000"/>
                 </a:solidFill>
@@ -2499,11 +2659,8 @@
               </a:rPr>
               <a:t>(1 Tim 2:11)</a:t>
             </a:r>
-            <a:pPr algn="l" indent="0" marL="0">
-              <a:buNone/>
-            </a:pPr>
-            <a:r>
-              <a:rPr lang="en-US" sz="1350" dirty="0">
+            <a:r>
+              <a:rPr lang="en-US" dirty="0">
                 <a:solidFill>
                   <a:srgbClr val="000000"/>
                 </a:solidFill>
@@ -2511,9 +2668,9 @@
                 <a:ea typeface="Arial" pitchFamily="34" charset="-122"/>
                 <a:cs typeface="Arial" pitchFamily="34" charset="-120"/>
               </a:rPr>
-              <a:t>  In a culture that often excluded women from serious instruction, Paul says: let her LEARN.</a:t>
-            </a:r>
-            <a:endParaRPr lang="en-US" sz="1600" dirty="0"/>
+              <a:t>  In a culture that often-excluded women from serious instruction, Paul says: let her LEARN.</a:t>
+            </a:r>
+            <a:endParaRPr lang="en-US" sz="2400" dirty="0"/>
           </a:p>
         </p:txBody>
       </p:sp>
@@ -2525,7 +2682,7 @@
         </p:nvSpPr>
         <p:spPr>
           <a:xfrm>
-            <a:off x="365760" y="2057400"/>
+            <a:off x="365760" y="2313528"/>
             <a:ext cx="8412480" cy="960120"/>
           </a:xfrm>
           <a:prstGeom prst="rect">
@@ -2538,11 +2695,11 @@
           <a:bodyPr wrap="square" lIns="0" tIns="0" rIns="0" bIns="0" rtlCol="0" anchor="t"/>
           <a:lstStyle/>
           <a:p>
-            <a:pPr algn="l" indent="0" marL="0">
+            <a:pPr marL="0" indent="0" algn="l">
               <a:buNone/>
             </a:pPr>
             <a:r>
-              <a:rPr lang="en-US" sz="1500" b="1" i="1" dirty="0">
+              <a:rPr lang="en-US" b="1" i="1" dirty="0">
                 <a:solidFill>
                   <a:srgbClr val="000000"/>
                 </a:solidFill>
@@ -2552,11 +2709,25 @@
               </a:rPr>
               <a:t>“But I do not allow a woman to teach or exercise authority over a man. She must remain quiet.” </a:t>
             </a:r>
-            <a:pPr algn="l" indent="0" marL="0">
+            <a:r>
+              <a:rPr lang="en-US" b="1" dirty="0">
+                <a:solidFill>
+                  <a:srgbClr val="000000"/>
+                </a:solidFill>
+                <a:latin typeface="Arial" pitchFamily="34" charset="0"/>
+                <a:ea typeface="Arial" pitchFamily="34" charset="-122"/>
+                <a:cs typeface="Arial" pitchFamily="34" charset="-120"/>
+              </a:rPr>
+              <a:t>(1 Tim 2:12)</a:t>
+            </a:r>
+            <a:endParaRPr lang="en-US" sz="2000" dirty="0"/>
+          </a:p>
+          <a:p>
+            <a:pPr marL="0" indent="0" algn="l">
               <a:buNone/>
             </a:pPr>
             <a:r>
-              <a:rPr lang="en-US" sz="1400" b="1" dirty="0">
+              <a:rPr lang="en-US" sz="1600" dirty="0">
                 <a:solidFill>
                   <a:srgbClr val="000000"/>
                 </a:solidFill>
@@ -2564,29 +2735,9 @@
                 <a:ea typeface="Arial" pitchFamily="34" charset="-122"/>
                 <a:cs typeface="Arial" pitchFamily="34" charset="-120"/>
               </a:rPr>
-              <a:t>(1 Tim 2:12)</a:t>
-            </a:r>
-            <a:pPr algn="l" indent="0" marL="0">
-              <a:buNone/>
-            </a:pPr>
-            <a:endParaRPr lang="en-US" sz="1600" dirty="0"/>
-          </a:p>
-          <a:p>
-            <a:pPr algn="l" indent="0" marL="0">
-              <a:buNone/>
-            </a:pPr>
-            <a:r>
-              <a:rPr lang="en-US" sz="1300" dirty="0">
-                <a:solidFill>
-                  <a:srgbClr val="000000"/>
-                </a:solidFill>
-                <a:latin typeface="Arial" pitchFamily="34" charset="0"/>
-                <a:ea typeface="Arial" pitchFamily="34" charset="-122"/>
-                <a:cs typeface="Arial" pitchFamily="34" charset="-120"/>
-              </a:rPr>
-              <a:t>“Quietness” (hesychia) = a settled, non-disruptive posture (same word as 2:2, “peaceful life”) — not absolute silence.</a:t>
-            </a:r>
-            <a:endParaRPr lang="en-US" sz="1600" dirty="0"/>
+              <a:t>“Quietness” (hesychia) = a settled, non-disruptive posture (same word as 2:2, “peaceful life”) → not absolute silence.</a:t>
+            </a:r>
+            <a:endParaRPr lang="en-US" sz="2000" dirty="0"/>
           </a:p>
         </p:txBody>
       </p:sp>
@@ -2598,8 +2749,8 @@
         </p:nvSpPr>
         <p:spPr>
           <a:xfrm>
-            <a:off x="365760" y="3108960"/>
-            <a:ext cx="8412480" cy="1417320"/>
+            <a:off x="365760" y="3429000"/>
+            <a:ext cx="8412480" cy="1531134"/>
           </a:xfrm>
           <a:prstGeom prst="rect">
             <a:avLst/>
@@ -2611,11 +2762,11 @@
           <a:bodyPr wrap="square" lIns="0" tIns="0" rIns="0" bIns="0" rtlCol="0" anchor="t"/>
           <a:lstStyle/>
           <a:p>
-            <a:pPr algn="l" indent="0" marL="0">
+            <a:pPr marL="0" indent="0" algn="l">
               <a:buNone/>
             </a:pPr>
             <a:r>
-              <a:rPr lang="en-US" sz="1350" b="1" dirty="0">
+              <a:rPr lang="en-US" sz="1600" b="1" dirty="0">
                 <a:solidFill>
                   <a:srgbClr val="1F497D"/>
                 </a:solidFill>
@@ -2623,14 +2774,11 @@
                 <a:ea typeface="Arial" pitchFamily="34" charset="-122"/>
                 <a:cs typeface="Arial" pitchFamily="34" charset="-120"/>
               </a:rPr>
-              <a:t>What kind of “teaching”? Read it inside the letter — teaching = authoritative doctrinal governance:
+              <a:t>What kind of “teaching”? Read it inside the letter → teaching = authoritative doctrinal governance:
 </a:t>
             </a:r>
-            <a:pPr algn="l" indent="0" marL="0">
-              <a:buNone/>
-            </a:pPr>
-            <a:r>
-              <a:rPr lang="en-US" sz="1300" dirty="0">
+            <a:r>
+              <a:rPr lang="en-US" sz="1600" dirty="0">
                 <a:solidFill>
                   <a:srgbClr val="000000"/>
                 </a:solidFill>
@@ -2639,28 +2787,11 @@
                 <a:cs typeface="Arial" pitchFamily="34" charset="-120"/>
               </a:rPr>
               <a:t>•  1:3 stop false teaching  •  4:11 “command and teach these things”  •  6:2–3 sound doctrine
+•  And 3:2 → the very next paragraph → lists “able to teach” as an OVERSEER qualification.
 </a:t>
             </a:r>
-            <a:pPr algn="l" indent="0" marL="0">
-              <a:buNone/>
-            </a:pPr>
-            <a:r>
-              <a:rPr lang="en-US" sz="1300" dirty="0">
-                <a:solidFill>
-                  <a:srgbClr val="000000"/>
-                </a:solidFill>
-                <a:latin typeface="Arial" pitchFamily="34" charset="0"/>
-                <a:ea typeface="Arial" pitchFamily="34" charset="-122"/>
-                <a:cs typeface="Arial" pitchFamily="34" charset="-120"/>
-              </a:rPr>
-              <a:t>•  And 3:2 — the very next paragraph — lists “able to teach” as an OVERSEER qualification.
-</a:t>
-            </a:r>
-            <a:pPr algn="l" indent="0" marL="0">
-              <a:buNone/>
-            </a:pPr>
-            <a:r>
-              <a:rPr lang="en-US" sz="1300" i="1" dirty="0">
+            <a:r>
+              <a:rPr lang="en-US" sz="1600" i="1" dirty="0">
                 <a:solidFill>
                   <a:srgbClr val="1F497D"/>
                 </a:solidFill>
@@ -2668,9 +2799,9 @@
                 <a:ea typeface="Arial" pitchFamily="34" charset="-122"/>
                 <a:cs typeface="Arial" pitchFamily="34" charset="-120"/>
               </a:rPr>
-              <a:t>So the restriction concerns the governing teaching/authority role over the assembly, tied to the elder office — not every word a woman might speak.</a:t>
-            </a:r>
-            <a:endParaRPr lang="en-US" sz="1600" dirty="0"/>
+              <a:t>So, the restriction concerns the governing teaching/authority role over the assembly, tied to the elder office → not every word a woman might speak.</a:t>
+            </a:r>
+            <a:endParaRPr lang="en-US" sz="2000" dirty="0"/>
           </a:p>
         </p:txBody>
       </p:sp>
@@ -2682,8 +2813,8 @@
         </p:nvSpPr>
         <p:spPr>
           <a:xfrm>
-            <a:off x="365760" y="4663440"/>
-            <a:ext cx="8412480" cy="1463040"/>
+            <a:off x="365760" y="4971221"/>
+            <a:ext cx="8412480" cy="1717905"/>
           </a:xfrm>
           <a:prstGeom prst="rect">
             <a:avLst/>
@@ -2695,11 +2826,11 @@
           <a:bodyPr wrap="square" lIns="0" tIns="0" rIns="0" bIns="0" rtlCol="0" anchor="t"/>
           <a:lstStyle/>
           <a:p>
-            <a:pPr algn="l" indent="0" marL="0">
+            <a:pPr marL="0" indent="0" algn="l">
               <a:buNone/>
             </a:pPr>
             <a:r>
-              <a:rPr lang="en-US" sz="1350" b="1" dirty="0">
+              <a:rPr lang="en-US" b="1" dirty="0">
                 <a:solidFill>
                   <a:srgbClr val="1F497D"/>
                 </a:solidFill>
@@ -2707,14 +2838,11 @@
                 <a:ea typeface="Arial" pitchFamily="34" charset="-122"/>
                 <a:cs typeface="Arial" pitchFamily="34" charset="-120"/>
               </a:rPr>
-              <a:t>Why not just “an Ephesus problem”? Because Paul grounds it in Genesis, not local culture — and he KNEW how to give local reasons:
+              <a:t>Why not just “an Ephesus problem”? Because Paul grounds it in Genesis, not local culture → and he KNEW how to give local reasons:
 </a:t>
             </a:r>
-            <a:pPr algn="l" indent="0" marL="0">
-              <a:buNone/>
-            </a:pPr>
-            <a:r>
-              <a:rPr lang="en-US" sz="1300" dirty="0">
+            <a:r>
+              <a:rPr lang="en-US" dirty="0">
                 <a:solidFill>
                   <a:srgbClr val="000000"/>
                 </a:solidFill>
@@ -2722,9 +2850,9 @@
                 <a:ea typeface="Arial" pitchFamily="34" charset="-122"/>
                 <a:cs typeface="Arial" pitchFamily="34" charset="-120"/>
               </a:rPr>
-              <a:t>Three chapters later he gives one — “so the adversary has no occasion for slander” (1 Tim 5:14). He had that tool available in 2:13 and reached past Ephesus to the garden instead. That choice is the strongest internal signal the reason is not merely cultural.</a:t>
-            </a:r>
-            <a:endParaRPr lang="en-US" sz="1600" dirty="0"/>
+              <a:t>Three chapters later he gives one → “so the adversary has no occasion for slander” (1 Tim 5:14). He had that tool available in 2:13 and reached past Ephesus to the garden instead. That choice is the strongest internal signal the reason is not merely cultural.</a:t>
+            </a:r>
+            <a:endParaRPr lang="en-US" sz="2400" dirty="0"/>
           </a:p>
         </p:txBody>
       </p:sp>
@@ -2742,26 +2870,26 @@
               <p:cTn id="2" dur="indefinite" nodeType="mainSeq">
                 <p:childTnLst>
                   <p:par>
-                    <p:cTn id="7" fill="hold">
+                    <p:cTn id="3" fill="hold">
                       <p:stCondLst>
                         <p:cond delay="indefinite"/>
                       </p:stCondLst>
                       <p:childTnLst>
                         <p:par>
-                          <p:cTn id="8" fill="hold">
+                          <p:cTn id="4" fill="hold">
                             <p:stCondLst>
                               <p:cond delay="0"/>
                             </p:stCondLst>
                             <p:childTnLst>
                               <p:par>
-                                <p:cTn id="3" presetID="42" presetClass="entr" presetSubtype="0" fill="hold" grpId="0" nodeType="clickEffect">
+                                <p:cTn id="5" presetID="42" presetClass="entr" presetSubtype="0" fill="hold" nodeType="clickEffect">
                                   <p:stCondLst>
                                     <p:cond delay="0"/>
                                   </p:stCondLst>
                                   <p:childTnLst>
                                     <p:set>
                                       <p:cBhvr>
-                                        <p:cTn id="4" dur="1" fill="hold">
+                                        <p:cTn id="6" dur="1" fill="hold">
                                           <p:stCondLst>
                                             <p:cond delay="0"/>
                                           </p:stCondLst>
@@ -2779,7 +2907,7 @@
                                     </p:set>
                                     <p:animEffect transition="in" filter="fade">
                                       <p:cBhvr>
-                                        <p:cTn id="5" dur="1000"/>
+                                        <p:cTn id="7" dur="1000"/>
                                         <p:tgtEl>
                                           <p:spTgt spid="4"/>
                                         </p:tgtEl>
@@ -2787,7 +2915,7 @@
                                     </p:animEffect>
                                     <p:anim calcmode="lin" valueType="num">
                                       <p:cBhvr>
-                                        <p:cTn id="6" dur="1000" fill="hold"/>
+                                        <p:cTn id="8" dur="1000" fill="hold"/>
                                         <p:tgtEl>
                                           <p:spTgt spid="4"/>
                                         </p:tgtEl>
@@ -2818,26 +2946,26 @@
                     </p:cTn>
                   </p:par>
                   <p:par>
-                    <p:cTn id="13" fill="hold">
+                    <p:cTn id="9" fill="hold">
                       <p:stCondLst>
                         <p:cond delay="indefinite"/>
                       </p:stCondLst>
                       <p:childTnLst>
                         <p:par>
-                          <p:cTn id="14" fill="hold">
+                          <p:cTn id="10" fill="hold">
                             <p:stCondLst>
                               <p:cond delay="0"/>
                             </p:stCondLst>
                             <p:childTnLst>
                               <p:par>
-                                <p:cTn id="9" presetID="42" presetClass="entr" presetSubtype="0" fill="hold" grpId="0" nodeType="clickEffect">
+                                <p:cTn id="11" presetID="42" presetClass="entr" presetSubtype="0" fill="hold" nodeType="clickEffect">
                                   <p:stCondLst>
                                     <p:cond delay="0"/>
                                   </p:stCondLst>
                                   <p:childTnLst>
                                     <p:set>
                                       <p:cBhvr>
-                                        <p:cTn id="10" dur="1" fill="hold">
+                                        <p:cTn id="12" dur="1" fill="hold">
                                           <p:stCondLst>
                                             <p:cond delay="0"/>
                                           </p:stCondLst>
@@ -2855,7 +2983,7 @@
                                     </p:set>
                                     <p:animEffect transition="in" filter="fade">
                                       <p:cBhvr>
-                                        <p:cTn id="11" dur="1000"/>
+                                        <p:cTn id="13" dur="1000"/>
                                         <p:tgtEl>
                                           <p:spTgt spid="5"/>
                                         </p:tgtEl>
@@ -2863,7 +2991,7 @@
                                     </p:animEffect>
                                     <p:anim calcmode="lin" valueType="num">
                                       <p:cBhvr>
-                                        <p:cTn id="12" dur="1000" fill="hold"/>
+                                        <p:cTn id="14" dur="1000" fill="hold"/>
                                         <p:tgtEl>
                                           <p:spTgt spid="5"/>
                                         </p:tgtEl>
@@ -2894,26 +3022,26 @@
                     </p:cTn>
                   </p:par>
                   <p:par>
-                    <p:cTn id="19" fill="hold">
+                    <p:cTn id="15" fill="hold">
                       <p:stCondLst>
                         <p:cond delay="indefinite"/>
                       </p:stCondLst>
                       <p:childTnLst>
                         <p:par>
-                          <p:cTn id="20" fill="hold">
+                          <p:cTn id="16" fill="hold">
                             <p:stCondLst>
                               <p:cond delay="0"/>
                             </p:stCondLst>
                             <p:childTnLst>
                               <p:par>
-                                <p:cTn id="15" presetID="42" presetClass="entr" presetSubtype="0" fill="hold" grpId="0" nodeType="clickEffect">
+                                <p:cTn id="17" presetID="42" presetClass="entr" presetSubtype="0" fill="hold" nodeType="clickEffect">
                                   <p:stCondLst>
                                     <p:cond delay="0"/>
                                   </p:stCondLst>
                                   <p:childTnLst>
                                     <p:set>
                                       <p:cBhvr>
-                                        <p:cTn id="16" dur="1" fill="hold">
+                                        <p:cTn id="18" dur="1" fill="hold">
                                           <p:stCondLst>
                                             <p:cond delay="0"/>
                                           </p:stCondLst>
@@ -2931,7 +3059,7 @@
                                     </p:set>
                                     <p:animEffect transition="in" filter="fade">
                                       <p:cBhvr>
-                                        <p:cTn id="17" dur="1000"/>
+                                        <p:cTn id="19" dur="1000"/>
                                         <p:tgtEl>
                                           <p:spTgt spid="6"/>
                                         </p:tgtEl>
@@ -2939,7 +3067,7 @@
                                     </p:animEffect>
                                     <p:anim calcmode="lin" valueType="num">
                                       <p:cBhvr>
-                                        <p:cTn id="18" dur="1000" fill="hold"/>
+                                        <p:cTn id="20" dur="1000" fill="hold"/>
                                         <p:tgtEl>
                                           <p:spTgt spid="6"/>
                                         </p:tgtEl>
@@ -2970,26 +3098,26 @@
                     </p:cTn>
                   </p:par>
                   <p:par>
-                    <p:cTn id="25" fill="hold">
+                    <p:cTn id="21" fill="hold">
                       <p:stCondLst>
                         <p:cond delay="indefinite"/>
                       </p:stCondLst>
                       <p:childTnLst>
                         <p:par>
-                          <p:cTn id="26" fill="hold">
+                          <p:cTn id="22" fill="hold">
                             <p:stCondLst>
                               <p:cond delay="0"/>
                             </p:stCondLst>
                             <p:childTnLst>
                               <p:par>
-                                <p:cTn id="21" presetID="42" presetClass="entr" presetSubtype="0" fill="hold" grpId="0" nodeType="clickEffect">
+                                <p:cTn id="23" presetID="42" presetClass="entr" presetSubtype="0" fill="hold" nodeType="clickEffect">
                                   <p:stCondLst>
                                     <p:cond delay="0"/>
                                   </p:stCondLst>
                                   <p:childTnLst>
                                     <p:set>
                                       <p:cBhvr>
-                                        <p:cTn id="22" dur="1" fill="hold">
+                                        <p:cTn id="24" dur="1" fill="hold">
                                           <p:stCondLst>
                                             <p:cond delay="0"/>
                                           </p:stCondLst>
@@ -3007,7 +3135,7 @@
                                     </p:set>
                                     <p:animEffect transition="in" filter="fade">
                                       <p:cBhvr>
-                                        <p:cTn id="23" dur="1000"/>
+                                        <p:cTn id="25" dur="1000"/>
                                         <p:tgtEl>
                                           <p:spTgt spid="7"/>
                                         </p:tgtEl>
@@ -3015,7 +3143,7 @@
                                     </p:animEffect>
                                     <p:anim calcmode="lin" valueType="num">
                                       <p:cBhvr>
-                                        <p:cTn id="24" dur="1000" fill="hold"/>
+                                        <p:cTn id="26" dur="1000" fill="hold"/>
                                         <p:tgtEl>
                                           <p:spTgt spid="7"/>
                                         </p:tgtEl>
@@ -3108,7 +3236,7 @@
           <a:bodyPr wrap="square" lIns="0" tIns="0" rIns="0" bIns="0" rtlCol="0" anchor="t"/>
           <a:lstStyle/>
           <a:p>
-            <a:pPr algn="l" indent="0" marL="0">
+            <a:pPr marL="0" indent="0" algn="l">
               <a:buNone/>
             </a:pPr>
             <a:r>
@@ -3147,11 +3275,11 @@
           <a:bodyPr wrap="square" lIns="0" tIns="0" rIns="0" bIns="0" rtlCol="0" anchor="t"/>
           <a:lstStyle/>
           <a:p>
-            <a:pPr algn="l" indent="0" marL="0">
+            <a:pPr marL="0" indent="0" algn="l">
               <a:buNone/>
             </a:pPr>
             <a:r>
-              <a:rPr lang="en-US" sz="1300" b="1" dirty="0">
+              <a:rPr lang="en-US" sz="2000" b="1" dirty="0">
                 <a:solidFill>
                   <a:srgbClr val="4F81BD"/>
                 </a:solidFill>
@@ -3161,7 +3289,7 @@
               </a:rPr>
               <a:t>Stated as positively as Scripture states it</a:t>
             </a:r>
-            <a:endParaRPr lang="en-US" sz="1600" dirty="0"/>
+            <a:endParaRPr lang="en-US" sz="2800" dirty="0"/>
           </a:p>
         </p:txBody>
       </p:sp>
@@ -3173,7 +3301,7 @@
         </p:nvSpPr>
         <p:spPr>
           <a:xfrm>
-            <a:off x="365760" y="1234440"/>
+            <a:off x="365760" y="1335531"/>
             <a:ext cx="2606040" cy="731520"/>
           </a:xfrm>
           <a:prstGeom prst="roundRect">
@@ -3193,6 +3321,13 @@
             <a:prstDash val="solid"/>
           </a:ln>
         </p:spPr>
+        <p:txBody>
+          <a:bodyPr/>
+          <a:lstStyle/>
+          <a:p>
+            <a:endParaRPr lang="en-US" sz="2400"/>
+          </a:p>
+        </p:txBody>
       </p:sp>
       <p:sp>
         <p:nvSpPr>
@@ -3202,7 +3337,7 @@
         </p:nvSpPr>
         <p:spPr>
           <a:xfrm>
-            <a:off x="457200" y="1307592"/>
+            <a:off x="457200" y="1408683"/>
             <a:ext cx="2468880" cy="603504"/>
           </a:xfrm>
           <a:prstGeom prst="rect">
@@ -3215,11 +3350,11 @@
           <a:bodyPr wrap="square" lIns="0" tIns="0" rIns="0" bIns="0" rtlCol="0" anchor="ctr"/>
           <a:lstStyle/>
           <a:p>
-            <a:pPr algn="ctr" indent="0" marL="0">
+            <a:pPr marL="0" indent="0" algn="ctr">
               <a:buNone/>
             </a:pPr>
             <a:r>
-              <a:rPr lang="en-US" sz="1350" b="1" dirty="0">
+              <a:rPr lang="en-US" sz="1600" b="1" dirty="0">
                 <a:solidFill>
                   <a:srgbClr val="FFFFFF"/>
                 </a:solidFill>
@@ -3229,7 +3364,7 @@
               </a:rPr>
               <a:t>Pray &amp; prophesy</a:t>
             </a:r>
-            <a:endParaRPr lang="en-US" sz="1600" dirty="0"/>
+            <a:endParaRPr lang="en-US" sz="2000" dirty="0"/>
           </a:p>
         </p:txBody>
       </p:sp>
@@ -3241,7 +3376,7 @@
         </p:nvSpPr>
         <p:spPr>
           <a:xfrm>
-            <a:off x="3108960" y="1271016"/>
+            <a:off x="3108960" y="1372107"/>
             <a:ext cx="5669280" cy="749808"/>
           </a:xfrm>
           <a:prstGeom prst="rect">
@@ -3254,11 +3389,11 @@
           <a:bodyPr wrap="square" lIns="0" tIns="0" rIns="0" bIns="0" rtlCol="0" anchor="ctr"/>
           <a:lstStyle/>
           <a:p>
-            <a:pPr algn="l" indent="0" marL="0">
+            <a:pPr marL="0" indent="0" algn="l">
               <a:buNone/>
             </a:pPr>
             <a:r>
-              <a:rPr lang="en-US" sz="1250" dirty="0">
+              <a:rPr lang="en-US" sz="1600" dirty="0">
                 <a:solidFill>
                   <a:srgbClr val="000000"/>
                 </a:solidFill>
@@ -3266,9 +3401,31 @@
                 <a:ea typeface="Arial" pitchFamily="34" charset="-122"/>
                 <a:cs typeface="Arial" pitchFamily="34" charset="-120"/>
               </a:rPr>
-              <a:t>1 Cor 11:5 — women do both in the gathered church. Paul regulates HOW, not WHETHER.</a:t>
-            </a:r>
-            <a:endParaRPr lang="en-US" sz="1600" dirty="0"/>
+              <a:t>1 Cor 11:5 </a:t>
+            </a:r>
+            <a:r>
+              <a:rPr lang="en-US" sz="1600">
+                <a:solidFill>
+                  <a:srgbClr val="000000"/>
+                </a:solidFill>
+                <a:latin typeface="Arial" pitchFamily="34" charset="0"/>
+                <a:ea typeface="Arial" pitchFamily="34" charset="-122"/>
+                <a:cs typeface="Arial" pitchFamily="34" charset="-120"/>
+              </a:rPr>
+              <a:t>→</a:t>
+            </a:r>
+            <a:r>
+              <a:rPr lang="en-US" sz="1600" dirty="0">
+                <a:solidFill>
+                  <a:srgbClr val="000000"/>
+                </a:solidFill>
+                <a:latin typeface="Arial" pitchFamily="34" charset="0"/>
+                <a:ea typeface="Arial" pitchFamily="34" charset="-122"/>
+                <a:cs typeface="Arial" pitchFamily="34" charset="-120"/>
+              </a:rPr>
+              <a:t> women do both in the gathered church. Paul regulates HOW, not WHETHER.</a:t>
+            </a:r>
+            <a:endParaRPr lang="en-US" sz="2000" dirty="0"/>
           </a:p>
         </p:txBody>
       </p:sp>
@@ -3280,7 +3437,7 @@
         </p:nvSpPr>
         <p:spPr>
           <a:xfrm>
-            <a:off x="365760" y="2075688"/>
+            <a:off x="365760" y="2176779"/>
             <a:ext cx="2606040" cy="731520"/>
           </a:xfrm>
           <a:prstGeom prst="roundRect">
@@ -3300,6 +3457,13 @@
             <a:prstDash val="solid"/>
           </a:ln>
         </p:spPr>
+        <p:txBody>
+          <a:bodyPr/>
+          <a:lstStyle/>
+          <a:p>
+            <a:endParaRPr lang="en-US" sz="2400"/>
+          </a:p>
+        </p:txBody>
       </p:sp>
       <p:sp>
         <p:nvSpPr>
@@ -3309,7 +3473,7 @@
         </p:nvSpPr>
         <p:spPr>
           <a:xfrm>
-            <a:off x="457200" y="2148840"/>
+            <a:off x="457200" y="2249931"/>
             <a:ext cx="2468880" cy="603504"/>
           </a:xfrm>
           <a:prstGeom prst="rect">
@@ -3322,11 +3486,11 @@
           <a:bodyPr wrap="square" lIns="0" tIns="0" rIns="0" bIns="0" rtlCol="0" anchor="ctr"/>
           <a:lstStyle/>
           <a:p>
-            <a:pPr algn="ctr" indent="0" marL="0">
+            <a:pPr marL="0" indent="0" algn="ctr">
               <a:buNone/>
             </a:pPr>
             <a:r>
-              <a:rPr lang="en-US" sz="1350" b="1" dirty="0">
+              <a:rPr lang="en-US" sz="1600" b="1" dirty="0">
                 <a:solidFill>
                   <a:srgbClr val="FFFFFF"/>
                 </a:solidFill>
@@ -3336,7 +3500,7 @@
               </a:rPr>
               <a:t>Labor in the gospel</a:t>
             </a:r>
-            <a:endParaRPr lang="en-US" sz="1600" dirty="0"/>
+            <a:endParaRPr lang="en-US" sz="2000" dirty="0"/>
           </a:p>
         </p:txBody>
       </p:sp>
@@ -3348,7 +3512,7 @@
         </p:nvSpPr>
         <p:spPr>
           <a:xfrm>
-            <a:off x="3108960" y="2112264"/>
+            <a:off x="3108960" y="2213355"/>
             <a:ext cx="5669280" cy="749808"/>
           </a:xfrm>
           <a:prstGeom prst="rect">
@@ -3361,11 +3525,11 @@
           <a:bodyPr wrap="square" lIns="0" tIns="0" rIns="0" bIns="0" rtlCol="0" anchor="ctr"/>
           <a:lstStyle/>
           <a:p>
-            <a:pPr algn="l" indent="0" marL="0">
+            <a:pPr marL="0" indent="0" algn="l">
               <a:buNone/>
             </a:pPr>
             <a:r>
-              <a:rPr lang="en-US" sz="1250" dirty="0">
+              <a:rPr lang="en-US" sz="1600" dirty="0">
                 <a:solidFill>
                   <a:srgbClr val="000000"/>
                 </a:solidFill>
@@ -3373,9 +3537,31 @@
                 <a:ea typeface="Arial" pitchFamily="34" charset="-122"/>
                 <a:cs typeface="Arial" pitchFamily="34" charset="-120"/>
               </a:rPr>
-              <a:t>Phil 4:2–3 (Euodia, Syntyche); Rom 16 — many women coworkers Paul honors by name.</a:t>
-            </a:r>
-            <a:endParaRPr lang="en-US" sz="1600" dirty="0"/>
+              <a:t>Phil 4:2–3 (Euodia, Syntyche); Rom 16 </a:t>
+            </a:r>
+            <a:r>
+              <a:rPr lang="en-US" sz="1600">
+                <a:solidFill>
+                  <a:srgbClr val="000000"/>
+                </a:solidFill>
+                <a:latin typeface="Arial" pitchFamily="34" charset="0"/>
+                <a:ea typeface="Arial" pitchFamily="34" charset="-122"/>
+                <a:cs typeface="Arial" pitchFamily="34" charset="-120"/>
+              </a:rPr>
+              <a:t>→</a:t>
+            </a:r>
+            <a:r>
+              <a:rPr lang="en-US" sz="1600" dirty="0">
+                <a:solidFill>
+                  <a:srgbClr val="000000"/>
+                </a:solidFill>
+                <a:latin typeface="Arial" pitchFamily="34" charset="0"/>
+                <a:ea typeface="Arial" pitchFamily="34" charset="-122"/>
+                <a:cs typeface="Arial" pitchFamily="34" charset="-120"/>
+              </a:rPr>
+              <a:t> many women coworkers Paul honors by name.</a:t>
+            </a:r>
+            <a:endParaRPr lang="en-US" sz="2000" dirty="0"/>
           </a:p>
         </p:txBody>
       </p:sp>
@@ -3387,7 +3573,7 @@
         </p:nvSpPr>
         <p:spPr>
           <a:xfrm>
-            <a:off x="365760" y="2916936"/>
+            <a:off x="365760" y="3018027"/>
             <a:ext cx="2606040" cy="731520"/>
           </a:xfrm>
           <a:prstGeom prst="roundRect">
@@ -3407,6 +3593,13 @@
             <a:prstDash val="solid"/>
           </a:ln>
         </p:spPr>
+        <p:txBody>
+          <a:bodyPr/>
+          <a:lstStyle/>
+          <a:p>
+            <a:endParaRPr lang="en-US" sz="2400"/>
+          </a:p>
+        </p:txBody>
       </p:sp>
       <p:sp>
         <p:nvSpPr>
@@ -3416,7 +3609,7 @@
         </p:nvSpPr>
         <p:spPr>
           <a:xfrm>
-            <a:off x="457200" y="2990088"/>
+            <a:off x="457200" y="3091179"/>
             <a:ext cx="2468880" cy="603504"/>
           </a:xfrm>
           <a:prstGeom prst="rect">
@@ -3429,11 +3622,11 @@
           <a:bodyPr wrap="square" lIns="0" tIns="0" rIns="0" bIns="0" rtlCol="0" anchor="ctr"/>
           <a:lstStyle/>
           <a:p>
-            <a:pPr algn="ctr" indent="0" marL="0">
+            <a:pPr marL="0" indent="0" algn="ctr">
               <a:buNone/>
             </a:pPr>
             <a:r>
-              <a:rPr lang="en-US" sz="1350" b="1" dirty="0">
+              <a:rPr lang="en-US" sz="1600" b="1" dirty="0">
                 <a:solidFill>
                   <a:srgbClr val="FFFFFF"/>
                 </a:solidFill>
@@ -3443,7 +3636,7 @@
               </a:rPr>
               <a:t>Serve as deacon</a:t>
             </a:r>
-            <a:endParaRPr lang="en-US" sz="1600" dirty="0"/>
+            <a:endParaRPr lang="en-US" sz="2000" dirty="0"/>
           </a:p>
         </p:txBody>
       </p:sp>
@@ -3455,7 +3648,7 @@
         </p:nvSpPr>
         <p:spPr>
           <a:xfrm>
-            <a:off x="3108960" y="2953512"/>
+            <a:off x="3108960" y="3054603"/>
             <a:ext cx="5669280" cy="749808"/>
           </a:xfrm>
           <a:prstGeom prst="rect">
@@ -3468,11 +3661,11 @@
           <a:bodyPr wrap="square" lIns="0" tIns="0" rIns="0" bIns="0" rtlCol="0" anchor="ctr"/>
           <a:lstStyle/>
           <a:p>
-            <a:pPr algn="l" indent="0" marL="0">
+            <a:pPr marL="0" indent="0" algn="l">
               <a:buNone/>
             </a:pPr>
             <a:r>
-              <a:rPr lang="en-US" sz="1250" dirty="0">
+              <a:rPr lang="en-US" sz="1600" dirty="0">
                 <a:solidFill>
                   <a:srgbClr val="000000"/>
                 </a:solidFill>
@@ -3480,9 +3673,31 @@
                 <a:ea typeface="Arial" pitchFamily="34" charset="-122"/>
                 <a:cs typeface="Arial" pitchFamily="34" charset="-120"/>
               </a:rPr>
-              <a:t>Phoebe, “a diakonos of the church at Cenchrea” (Rom 16:1) — commended, entrusted.</a:t>
-            </a:r>
-            <a:endParaRPr lang="en-US" sz="1600" dirty="0"/>
+              <a:t>Phoebe, “a diakonos of the church at Cenchrea” (Rom 16:1) </a:t>
+            </a:r>
+            <a:r>
+              <a:rPr lang="en-US" sz="1600">
+                <a:solidFill>
+                  <a:srgbClr val="000000"/>
+                </a:solidFill>
+                <a:latin typeface="Arial" pitchFamily="34" charset="0"/>
+                <a:ea typeface="Arial" pitchFamily="34" charset="-122"/>
+                <a:cs typeface="Arial" pitchFamily="34" charset="-120"/>
+              </a:rPr>
+              <a:t>→</a:t>
+            </a:r>
+            <a:r>
+              <a:rPr lang="en-US" sz="1600" dirty="0">
+                <a:solidFill>
+                  <a:srgbClr val="000000"/>
+                </a:solidFill>
+                <a:latin typeface="Arial" pitchFamily="34" charset="0"/>
+                <a:ea typeface="Arial" pitchFamily="34" charset="-122"/>
+                <a:cs typeface="Arial" pitchFamily="34" charset="-120"/>
+              </a:rPr>
+              <a:t> commended, entrusted.</a:t>
+            </a:r>
+            <a:endParaRPr lang="en-US" sz="2000" dirty="0"/>
           </a:p>
         </p:txBody>
       </p:sp>
@@ -3494,7 +3709,7 @@
         </p:nvSpPr>
         <p:spPr>
           <a:xfrm>
-            <a:off x="365760" y="3758184"/>
+            <a:off x="365760" y="3859275"/>
             <a:ext cx="2606040" cy="731520"/>
           </a:xfrm>
           <a:prstGeom prst="roundRect">
@@ -3514,6 +3729,13 @@
             <a:prstDash val="solid"/>
           </a:ln>
         </p:spPr>
+        <p:txBody>
+          <a:bodyPr/>
+          <a:lstStyle/>
+          <a:p>
+            <a:endParaRPr lang="en-US" sz="2400"/>
+          </a:p>
+        </p:txBody>
       </p:sp>
       <p:sp>
         <p:nvSpPr>
@@ -3523,7 +3745,7 @@
         </p:nvSpPr>
         <p:spPr>
           <a:xfrm>
-            <a:off x="457200" y="3831336"/>
+            <a:off x="457200" y="3932427"/>
             <a:ext cx="2468880" cy="603504"/>
           </a:xfrm>
           <a:prstGeom prst="rect">
@@ -3536,11 +3758,11 @@
           <a:bodyPr wrap="square" lIns="0" tIns="0" rIns="0" bIns="0" rtlCol="0" anchor="ctr"/>
           <a:lstStyle/>
           <a:p>
-            <a:pPr algn="ctr" indent="0" marL="0">
+            <a:pPr marL="0" indent="0" algn="ctr">
               <a:buNone/>
             </a:pPr>
             <a:r>
-              <a:rPr lang="en-US" sz="1350" b="1" dirty="0">
+              <a:rPr lang="en-US" sz="1600" b="1" dirty="0">
                 <a:solidFill>
                   <a:srgbClr val="FFFFFF"/>
                 </a:solidFill>
@@ -3550,7 +3772,7 @@
               </a:rPr>
               <a:t>Teach in fitting settings</a:t>
             </a:r>
-            <a:endParaRPr lang="en-US" sz="1600" dirty="0"/>
+            <a:endParaRPr lang="en-US" sz="2000" dirty="0"/>
           </a:p>
         </p:txBody>
       </p:sp>
@@ -3562,7 +3784,7 @@
         </p:nvSpPr>
         <p:spPr>
           <a:xfrm>
-            <a:off x="3108960" y="3794760"/>
+            <a:off x="3108960" y="3895851"/>
             <a:ext cx="5669280" cy="749808"/>
           </a:xfrm>
           <a:prstGeom prst="rect">
@@ -3575,11 +3797,11 @@
           <a:bodyPr wrap="square" lIns="0" tIns="0" rIns="0" bIns="0" rtlCol="0" anchor="ctr"/>
           <a:lstStyle/>
           <a:p>
-            <a:pPr algn="l" indent="0" marL="0">
+            <a:pPr marL="0" indent="0" algn="l">
               <a:buNone/>
             </a:pPr>
             <a:r>
-              <a:rPr lang="en-US" sz="1250" dirty="0">
+              <a:rPr lang="en-US" sz="1600" dirty="0">
                 <a:solidFill>
                   <a:srgbClr val="000000"/>
                 </a:solidFill>
@@ -3589,7 +3811,7 @@
               </a:rPr>
               <a:t>Titus 2:3–5 older women teach younger; Priscilla (with Aquila) instructs Apollos (Acts 18:26).</a:t>
             </a:r>
-            <a:endParaRPr lang="en-US" sz="1600" dirty="0"/>
+            <a:endParaRPr lang="en-US" sz="2000" dirty="0"/>
           </a:p>
         </p:txBody>
       </p:sp>
@@ -3601,8 +3823,8 @@
         </p:nvSpPr>
         <p:spPr>
           <a:xfrm>
-            <a:off x="365760" y="4709160"/>
-            <a:ext cx="8412480" cy="1417320"/>
+            <a:off x="365760" y="4958755"/>
+            <a:ext cx="8412480" cy="1590379"/>
           </a:xfrm>
           <a:prstGeom prst="rect">
             <a:avLst/>
@@ -3614,11 +3836,11 @@
           <a:bodyPr wrap="square" lIns="0" tIns="0" rIns="0" bIns="0" rtlCol="0" anchor="t"/>
           <a:lstStyle/>
           <a:p>
-            <a:pPr algn="l" indent="0" marL="0">
+            <a:pPr marL="0" indent="0" algn="l">
               <a:buNone/>
             </a:pPr>
             <a:r>
-              <a:rPr lang="en-US" sz="1350" b="1" dirty="0">
+              <a:rPr lang="en-US" b="1" dirty="0">
                 <a:solidFill>
                   <a:srgbClr val="1F497D"/>
                 </a:solidFill>
@@ -3629,11 +3851,8 @@
               <a:t>Holding 1 Cor 11:5 and 14:34 together (they are not a contradiction):
 </a:t>
             </a:r>
-            <a:pPr algn="l" indent="0" marL="0">
-              <a:buNone/>
-            </a:pPr>
-            <a:r>
-              <a:rPr lang="en-US" sz="1250" dirty="0">
+            <a:r>
+              <a:rPr lang="en-US" dirty="0">
                 <a:solidFill>
                   <a:srgbClr val="000000"/>
                 </a:solidFill>
@@ -3641,13 +3860,10 @@
                 <a:ea typeface="Arial" pitchFamily="34" charset="-122"/>
                 <a:cs typeface="Arial" pitchFamily="34" charset="-120"/>
               </a:rPr>
-              <a:t>Prophecy and authoritative teaching are different functions. 14:29 — “the others should weigh/evaluate” what prophets say. A woman may prophesy (11:5); the restriction touches the authoritative WEIGHING of doctrine that governs the assembly, not Spirit-prompted speech. </a:t>
-            </a:r>
-            <a:pPr algn="l" indent="0" marL="0">
-              <a:buNone/>
-            </a:pPr>
-            <a:r>
-              <a:rPr lang="en-US" sz="1250" b="1" dirty="0">
+              <a:t>Prophecy and authoritative teaching are different functions. 14:29 → “the others should weigh/evaluate” what prophets say. A woman may prophesy (11:5); the restriction touches the authoritative WEIGHING of doctrine that governs the assembly, not Spirit-prompted speech. </a:t>
+            </a:r>
+            <a:r>
+              <a:rPr lang="en-US" b="1" dirty="0">
                 <a:solidFill>
                   <a:srgbClr val="1F497D"/>
                 </a:solidFill>
@@ -3655,9 +3871,9 @@
                 <a:ea typeface="Arial" pitchFamily="34" charset="-122"/>
                 <a:cs typeface="Arial" pitchFamily="34" charset="-120"/>
               </a:rPr>
-              <a:t>Both texts stand — neither is explained away.</a:t>
-            </a:r>
-            <a:endParaRPr lang="en-US" sz="1600" dirty="0"/>
+              <a:t>Both texts stand → neither is explained away.</a:t>
+            </a:r>
+            <a:endParaRPr lang="en-US" sz="2400" dirty="0"/>
           </a:p>
         </p:txBody>
       </p:sp>
@@ -3675,26 +3891,26 @@
               <p:cTn id="2" dur="indefinite" nodeType="mainSeq">
                 <p:childTnLst>
                   <p:par>
-                    <p:cTn id="15" fill="hold">
+                    <p:cTn id="3" fill="hold">
                       <p:stCondLst>
                         <p:cond delay="indefinite"/>
                       </p:stCondLst>
                       <p:childTnLst>
                         <p:par>
-                          <p:cTn id="16" fill="hold">
+                          <p:cTn id="4" fill="hold">
                             <p:stCondLst>
                               <p:cond delay="0"/>
                             </p:stCondLst>
                             <p:childTnLst>
                               <p:par>
-                                <p:cTn id="3" presetID="42" presetClass="entr" presetSubtype="0" fill="hold" grpId="0" nodeType="clickEffect">
+                                <p:cTn id="5" presetID="42" presetClass="entr" presetSubtype="0" fill="hold" nodeType="clickEffect">
                                   <p:stCondLst>
                                     <p:cond delay="0"/>
                                   </p:stCondLst>
                                   <p:childTnLst>
                                     <p:set>
                                       <p:cBhvr>
-                                        <p:cTn id="4" dur="1" fill="hold">
+                                        <p:cTn id="6" dur="1" fill="hold">
                                           <p:stCondLst>
                                             <p:cond delay="0"/>
                                           </p:stCondLst>
@@ -3712,7 +3928,7 @@
                                     </p:set>
                                     <p:animEffect transition="in" filter="fade">
                                       <p:cBhvr>
-                                        <p:cTn id="5" dur="1000"/>
+                                        <p:cTn id="7" dur="1000"/>
                                         <p:tgtEl>
                                           <p:spTgt spid="4"/>
                                         </p:tgtEl>
@@ -3720,7 +3936,7 @@
                                     </p:animEffect>
                                     <p:anim calcmode="lin" valueType="num">
                                       <p:cBhvr>
-                                        <p:cTn id="6" dur="1000" fill="hold"/>
+                                        <p:cTn id="8" dur="1000" fill="hold"/>
                                         <p:tgtEl>
                                           <p:spTgt spid="4"/>
                                         </p:tgtEl>
@@ -3745,14 +3961,14 @@
                                 </p:cTn>
                               </p:par>
                               <p:par>
-                                <p:cTn id="7" presetID="42" presetClass="entr" presetSubtype="0" fill="hold" grpId="0" nodeType="withEffect">
+                                <p:cTn id="9" presetID="42" presetClass="entr" presetSubtype="0" fill="hold" nodeType="withEffect">
                                   <p:stCondLst>
                                     <p:cond delay="0"/>
                                   </p:stCondLst>
                                   <p:childTnLst>
                                     <p:set>
                                       <p:cBhvr>
-                                        <p:cTn id="8" dur="1" fill="hold">
+                                        <p:cTn id="10" dur="1" fill="hold">
                                           <p:stCondLst>
                                             <p:cond delay="0"/>
                                           </p:stCondLst>
@@ -3770,7 +3986,7 @@
                                     </p:set>
                                     <p:animEffect transition="in" filter="fade">
                                       <p:cBhvr>
-                                        <p:cTn id="9" dur="1000"/>
+                                        <p:cTn id="11" dur="1000"/>
                                         <p:tgtEl>
                                           <p:spTgt spid="5"/>
                                         </p:tgtEl>
@@ -3778,7 +3994,7 @@
                                     </p:animEffect>
                                     <p:anim calcmode="lin" valueType="num">
                                       <p:cBhvr>
-                                        <p:cTn id="10" dur="1000" fill="hold"/>
+                                        <p:cTn id="12" dur="1000" fill="hold"/>
                                         <p:tgtEl>
                                           <p:spTgt spid="5"/>
                                         </p:tgtEl>
@@ -3803,14 +4019,14 @@
                                 </p:cTn>
                               </p:par>
                               <p:par>
-                                <p:cTn id="11" presetID="42" presetClass="entr" presetSubtype="0" fill="hold" grpId="0" nodeType="withEffect">
+                                <p:cTn id="13" presetID="42" presetClass="entr" presetSubtype="0" fill="hold" nodeType="withEffect">
                                   <p:stCondLst>
                                     <p:cond delay="0"/>
                                   </p:stCondLst>
                                   <p:childTnLst>
                                     <p:set>
                                       <p:cBhvr>
-                                        <p:cTn id="12" dur="1" fill="hold">
+                                        <p:cTn id="14" dur="1" fill="hold">
                                           <p:stCondLst>
                                             <p:cond delay="0"/>
                                           </p:stCondLst>
@@ -3828,7 +4044,7 @@
                                     </p:set>
                                     <p:animEffect transition="in" filter="fade">
                                       <p:cBhvr>
-                                        <p:cTn id="13" dur="1000"/>
+                                        <p:cTn id="15" dur="1000"/>
                                         <p:tgtEl>
                                           <p:spTgt spid="6"/>
                                         </p:tgtEl>
@@ -3836,7 +4052,7 @@
                                     </p:animEffect>
                                     <p:anim calcmode="lin" valueType="num">
                                       <p:cBhvr>
-                                        <p:cTn id="14" dur="1000" fill="hold"/>
+                                        <p:cTn id="16" dur="1000" fill="hold"/>
                                         <p:tgtEl>
                                           <p:spTgt spid="6"/>
                                         </p:tgtEl>
@@ -3867,26 +4083,26 @@
                     </p:cTn>
                   </p:par>
                   <p:par>
-                    <p:cTn id="29" fill="hold">
+                    <p:cTn id="17" fill="hold">
                       <p:stCondLst>
                         <p:cond delay="indefinite"/>
                       </p:stCondLst>
                       <p:childTnLst>
                         <p:par>
-                          <p:cTn id="30" fill="hold">
+                          <p:cTn id="18" fill="hold">
                             <p:stCondLst>
                               <p:cond delay="0"/>
                             </p:stCondLst>
                             <p:childTnLst>
                               <p:par>
-                                <p:cTn id="17" presetID="42" presetClass="entr" presetSubtype="0" fill="hold" grpId="0" nodeType="clickEffect">
+                                <p:cTn id="19" presetID="42" presetClass="entr" presetSubtype="0" fill="hold" nodeType="clickEffect">
                                   <p:stCondLst>
                                     <p:cond delay="0"/>
                                   </p:stCondLst>
                                   <p:childTnLst>
                                     <p:set>
                                       <p:cBhvr>
-                                        <p:cTn id="18" dur="1" fill="hold">
+                                        <p:cTn id="20" dur="1" fill="hold">
                                           <p:stCondLst>
                                             <p:cond delay="0"/>
                                           </p:stCondLst>
@@ -3904,7 +4120,7 @@
                                     </p:set>
                                     <p:animEffect transition="in" filter="fade">
                                       <p:cBhvr>
-                                        <p:cTn id="19" dur="1000"/>
+                                        <p:cTn id="21" dur="1000"/>
                                         <p:tgtEl>
                                           <p:spTgt spid="7"/>
                                         </p:tgtEl>
@@ -3912,7 +4128,7 @@
                                     </p:animEffect>
                                     <p:anim calcmode="lin" valueType="num">
                                       <p:cBhvr>
-                                        <p:cTn id="20" dur="1000" fill="hold"/>
+                                        <p:cTn id="22" dur="1000" fill="hold"/>
                                         <p:tgtEl>
                                           <p:spTgt spid="7"/>
                                         </p:tgtEl>
@@ -3937,14 +4153,14 @@
                                 </p:cTn>
                               </p:par>
                               <p:par>
-                                <p:cTn id="21" presetID="42" presetClass="entr" presetSubtype="0" fill="hold" grpId="0" nodeType="withEffect">
+                                <p:cTn id="23" presetID="42" presetClass="entr" presetSubtype="0" fill="hold" nodeType="withEffect">
                                   <p:stCondLst>
                                     <p:cond delay="0"/>
                                   </p:stCondLst>
                                   <p:childTnLst>
                                     <p:set>
                                       <p:cBhvr>
-                                        <p:cTn id="22" dur="1" fill="hold">
+                                        <p:cTn id="24" dur="1" fill="hold">
                                           <p:stCondLst>
                                             <p:cond delay="0"/>
                                           </p:stCondLst>
@@ -3962,7 +4178,7 @@
                                     </p:set>
                                     <p:animEffect transition="in" filter="fade">
                                       <p:cBhvr>
-                                        <p:cTn id="23" dur="1000"/>
+                                        <p:cTn id="25" dur="1000"/>
                                         <p:tgtEl>
                                           <p:spTgt spid="8"/>
                                         </p:tgtEl>
@@ -3970,7 +4186,7 @@
                                     </p:animEffect>
                                     <p:anim calcmode="lin" valueType="num">
                                       <p:cBhvr>
-                                        <p:cTn id="24" dur="1000" fill="hold"/>
+                                        <p:cTn id="26" dur="1000" fill="hold"/>
                                         <p:tgtEl>
                                           <p:spTgt spid="8"/>
                                         </p:tgtEl>
@@ -3995,14 +4211,14 @@
                                 </p:cTn>
                               </p:par>
                               <p:par>
-                                <p:cTn id="25" presetID="42" presetClass="entr" presetSubtype="0" fill="hold" grpId="0" nodeType="withEffect">
+                                <p:cTn id="27" presetID="42" presetClass="entr" presetSubtype="0" fill="hold" nodeType="withEffect">
                                   <p:stCondLst>
                                     <p:cond delay="0"/>
                                   </p:stCondLst>
                                   <p:childTnLst>
                                     <p:set>
                                       <p:cBhvr>
-                                        <p:cTn id="26" dur="1" fill="hold">
+                                        <p:cTn id="28" dur="1" fill="hold">
                                           <p:stCondLst>
                                             <p:cond delay="0"/>
                                           </p:stCondLst>
@@ -4020,7 +4236,7 @@
                                     </p:set>
                                     <p:animEffect transition="in" filter="fade">
                                       <p:cBhvr>
-                                        <p:cTn id="27" dur="1000"/>
+                                        <p:cTn id="29" dur="1000"/>
                                         <p:tgtEl>
                                           <p:spTgt spid="9"/>
                                         </p:tgtEl>
@@ -4028,7 +4244,7 @@
                                     </p:animEffect>
                                     <p:anim calcmode="lin" valueType="num">
                                       <p:cBhvr>
-                                        <p:cTn id="28" dur="1000" fill="hold"/>
+                                        <p:cTn id="30" dur="1000" fill="hold"/>
                                         <p:tgtEl>
                                           <p:spTgt spid="9"/>
                                         </p:tgtEl>
@@ -4059,26 +4275,26 @@
                     </p:cTn>
                   </p:par>
                   <p:par>
-                    <p:cTn id="43" fill="hold">
+                    <p:cTn id="31" fill="hold">
                       <p:stCondLst>
                         <p:cond delay="indefinite"/>
                       </p:stCondLst>
                       <p:childTnLst>
                         <p:par>
-                          <p:cTn id="44" fill="hold">
+                          <p:cTn id="32" fill="hold">
                             <p:stCondLst>
                               <p:cond delay="0"/>
                             </p:stCondLst>
                             <p:childTnLst>
                               <p:par>
-                                <p:cTn id="31" presetID="42" presetClass="entr" presetSubtype="0" fill="hold" grpId="0" nodeType="clickEffect">
+                                <p:cTn id="33" presetID="42" presetClass="entr" presetSubtype="0" fill="hold" nodeType="clickEffect">
                                   <p:stCondLst>
                                     <p:cond delay="0"/>
                                   </p:stCondLst>
                                   <p:childTnLst>
                                     <p:set>
                                       <p:cBhvr>
-                                        <p:cTn id="32" dur="1" fill="hold">
+                                        <p:cTn id="34" dur="1" fill="hold">
                                           <p:stCondLst>
                                             <p:cond delay="0"/>
                                           </p:stCondLst>
@@ -4096,7 +4312,7 @@
                                     </p:set>
                                     <p:animEffect transition="in" filter="fade">
                                       <p:cBhvr>
-                                        <p:cTn id="33" dur="1000"/>
+                                        <p:cTn id="35" dur="1000"/>
                                         <p:tgtEl>
                                           <p:spTgt spid="10"/>
                                         </p:tgtEl>
@@ -4104,7 +4320,7 @@
                                     </p:animEffect>
                                     <p:anim calcmode="lin" valueType="num">
                                       <p:cBhvr>
-                                        <p:cTn id="34" dur="1000" fill="hold"/>
+                                        <p:cTn id="36" dur="1000" fill="hold"/>
                                         <p:tgtEl>
                                           <p:spTgt spid="10"/>
                                         </p:tgtEl>
@@ -4129,14 +4345,14 @@
                                 </p:cTn>
                               </p:par>
                               <p:par>
-                                <p:cTn id="35" presetID="42" presetClass="entr" presetSubtype="0" fill="hold" grpId="0" nodeType="withEffect">
+                                <p:cTn id="37" presetID="42" presetClass="entr" presetSubtype="0" fill="hold" nodeType="withEffect">
                                   <p:stCondLst>
                                     <p:cond delay="0"/>
                                   </p:stCondLst>
                                   <p:childTnLst>
                                     <p:set>
                                       <p:cBhvr>
-                                        <p:cTn id="36" dur="1" fill="hold">
+                                        <p:cTn id="38" dur="1" fill="hold">
                                           <p:stCondLst>
                                             <p:cond delay="0"/>
                                           </p:stCondLst>
@@ -4154,7 +4370,7 @@
                                     </p:set>
                                     <p:animEffect transition="in" filter="fade">
                                       <p:cBhvr>
-                                        <p:cTn id="37" dur="1000"/>
+                                        <p:cTn id="39" dur="1000"/>
                                         <p:tgtEl>
                                           <p:spTgt spid="11"/>
                                         </p:tgtEl>
@@ -4162,7 +4378,7 @@
                                     </p:animEffect>
                                     <p:anim calcmode="lin" valueType="num">
                                       <p:cBhvr>
-                                        <p:cTn id="38" dur="1000" fill="hold"/>
+                                        <p:cTn id="40" dur="1000" fill="hold"/>
                                         <p:tgtEl>
                                           <p:spTgt spid="11"/>
                                         </p:tgtEl>
@@ -4187,14 +4403,14 @@
                                 </p:cTn>
                               </p:par>
                               <p:par>
-                                <p:cTn id="39" presetID="42" presetClass="entr" presetSubtype="0" fill="hold" grpId="0" nodeType="withEffect">
+                                <p:cTn id="41" presetID="42" presetClass="entr" presetSubtype="0" fill="hold" nodeType="withEffect">
                                   <p:stCondLst>
                                     <p:cond delay="0"/>
                                   </p:stCondLst>
                                   <p:childTnLst>
                                     <p:set>
                                       <p:cBhvr>
-                                        <p:cTn id="40" dur="1" fill="hold">
+                                        <p:cTn id="42" dur="1" fill="hold">
                                           <p:stCondLst>
                                             <p:cond delay="0"/>
                                           </p:stCondLst>
@@ -4212,7 +4428,7 @@
                                     </p:set>
                                     <p:animEffect transition="in" filter="fade">
                                       <p:cBhvr>
-                                        <p:cTn id="41" dur="1000"/>
+                                        <p:cTn id="43" dur="1000"/>
                                         <p:tgtEl>
                                           <p:spTgt spid="12"/>
                                         </p:tgtEl>
@@ -4220,7 +4436,7 @@
                                     </p:animEffect>
                                     <p:anim calcmode="lin" valueType="num">
                                       <p:cBhvr>
-                                        <p:cTn id="42" dur="1000" fill="hold"/>
+                                        <p:cTn id="44" dur="1000" fill="hold"/>
                                         <p:tgtEl>
                                           <p:spTgt spid="12"/>
                                         </p:tgtEl>
@@ -4251,26 +4467,26 @@
                     </p:cTn>
                   </p:par>
                   <p:par>
-                    <p:cTn id="57" fill="hold">
+                    <p:cTn id="45" fill="hold">
                       <p:stCondLst>
                         <p:cond delay="indefinite"/>
                       </p:stCondLst>
                       <p:childTnLst>
                         <p:par>
-                          <p:cTn id="58" fill="hold">
+                          <p:cTn id="46" fill="hold">
                             <p:stCondLst>
                               <p:cond delay="0"/>
                             </p:stCondLst>
                             <p:childTnLst>
                               <p:par>
-                                <p:cTn id="45" presetID="42" presetClass="entr" presetSubtype="0" fill="hold" grpId="0" nodeType="clickEffect">
+                                <p:cTn id="47" presetID="42" presetClass="entr" presetSubtype="0" fill="hold" nodeType="clickEffect">
                                   <p:stCondLst>
                                     <p:cond delay="0"/>
                                   </p:stCondLst>
                                   <p:childTnLst>
                                     <p:set>
                                       <p:cBhvr>
-                                        <p:cTn id="46" dur="1" fill="hold">
+                                        <p:cTn id="48" dur="1" fill="hold">
                                           <p:stCondLst>
                                             <p:cond delay="0"/>
                                           </p:stCondLst>
@@ -4288,7 +4504,7 @@
                                     </p:set>
                                     <p:animEffect transition="in" filter="fade">
                                       <p:cBhvr>
-                                        <p:cTn id="47" dur="1000"/>
+                                        <p:cTn id="49" dur="1000"/>
                                         <p:tgtEl>
                                           <p:spTgt spid="13"/>
                                         </p:tgtEl>
@@ -4296,7 +4512,7 @@
                                     </p:animEffect>
                                     <p:anim calcmode="lin" valueType="num">
                                       <p:cBhvr>
-                                        <p:cTn id="48" dur="1000" fill="hold"/>
+                                        <p:cTn id="50" dur="1000" fill="hold"/>
                                         <p:tgtEl>
                                           <p:spTgt spid="13"/>
                                         </p:tgtEl>
@@ -4321,14 +4537,14 @@
                                 </p:cTn>
                               </p:par>
                               <p:par>
-                                <p:cTn id="49" presetID="42" presetClass="entr" presetSubtype="0" fill="hold" grpId="0" nodeType="withEffect">
+                                <p:cTn id="51" presetID="42" presetClass="entr" presetSubtype="0" fill="hold" nodeType="withEffect">
                                   <p:stCondLst>
                                     <p:cond delay="0"/>
                                   </p:stCondLst>
                                   <p:childTnLst>
                                     <p:set>
                                       <p:cBhvr>
-                                        <p:cTn id="50" dur="1" fill="hold">
+                                        <p:cTn id="52" dur="1" fill="hold">
                                           <p:stCondLst>
                                             <p:cond delay="0"/>
                                           </p:stCondLst>
@@ -4346,7 +4562,7 @@
                                     </p:set>
                                     <p:animEffect transition="in" filter="fade">
                                       <p:cBhvr>
-                                        <p:cTn id="51" dur="1000"/>
+                                        <p:cTn id="53" dur="1000"/>
                                         <p:tgtEl>
                                           <p:spTgt spid="14"/>
                                         </p:tgtEl>
@@ -4354,7 +4570,7 @@
                                     </p:animEffect>
                                     <p:anim calcmode="lin" valueType="num">
                                       <p:cBhvr>
-                                        <p:cTn id="52" dur="1000" fill="hold"/>
+                                        <p:cTn id="54" dur="1000" fill="hold"/>
                                         <p:tgtEl>
                                           <p:spTgt spid="14"/>
                                         </p:tgtEl>
@@ -4379,14 +4595,14 @@
                                 </p:cTn>
                               </p:par>
                               <p:par>
-                                <p:cTn id="53" presetID="42" presetClass="entr" presetSubtype="0" fill="hold" grpId="0" nodeType="withEffect">
+                                <p:cTn id="55" presetID="42" presetClass="entr" presetSubtype="0" fill="hold" nodeType="withEffect">
                                   <p:stCondLst>
                                     <p:cond delay="0"/>
                                   </p:stCondLst>
                                   <p:childTnLst>
                                     <p:set>
                                       <p:cBhvr>
-                                        <p:cTn id="54" dur="1" fill="hold">
+                                        <p:cTn id="56" dur="1" fill="hold">
                                           <p:stCondLst>
                                             <p:cond delay="0"/>
                                           </p:stCondLst>
@@ -4404,7 +4620,7 @@
                                     </p:set>
                                     <p:animEffect transition="in" filter="fade">
                                       <p:cBhvr>
-                                        <p:cTn id="55" dur="1000"/>
+                                        <p:cTn id="57" dur="1000"/>
                                         <p:tgtEl>
                                           <p:spTgt spid="15"/>
                                         </p:tgtEl>
@@ -4412,7 +4628,7 @@
                                     </p:animEffect>
                                     <p:anim calcmode="lin" valueType="num">
                                       <p:cBhvr>
-                                        <p:cTn id="56" dur="1000" fill="hold"/>
+                                        <p:cTn id="58" dur="1000" fill="hold"/>
                                         <p:tgtEl>
                                           <p:spTgt spid="15"/>
                                         </p:tgtEl>
@@ -4443,26 +4659,26 @@
                     </p:cTn>
                   </p:par>
                   <p:par>
-                    <p:cTn id="63" fill="hold">
+                    <p:cTn id="59" fill="hold">
                       <p:stCondLst>
                         <p:cond delay="indefinite"/>
                       </p:stCondLst>
                       <p:childTnLst>
                         <p:par>
-                          <p:cTn id="64" fill="hold">
+                          <p:cTn id="60" fill="hold">
                             <p:stCondLst>
                               <p:cond delay="0"/>
                             </p:stCondLst>
                             <p:childTnLst>
                               <p:par>
-                                <p:cTn id="59" presetID="42" presetClass="entr" presetSubtype="0" fill="hold" grpId="0" nodeType="clickEffect">
+                                <p:cTn id="61" presetID="42" presetClass="entr" presetSubtype="0" fill="hold" nodeType="clickEffect">
                                   <p:stCondLst>
                                     <p:cond delay="0"/>
                                   </p:stCondLst>
                                   <p:childTnLst>
                                     <p:set>
                                       <p:cBhvr>
-                                        <p:cTn id="60" dur="1" fill="hold">
+                                        <p:cTn id="62" dur="1" fill="hold">
                                           <p:stCondLst>
                                             <p:cond delay="0"/>
                                           </p:stCondLst>
@@ -4480,7 +4696,7 @@
                                     </p:set>
                                     <p:animEffect transition="in" filter="fade">
                                       <p:cBhvr>
-                                        <p:cTn id="61" dur="1000"/>
+                                        <p:cTn id="63" dur="1000"/>
                                         <p:tgtEl>
                                           <p:spTgt spid="16"/>
                                         </p:tgtEl>
@@ -4488,7 +4704,7 @@
                                     </p:animEffect>
                                     <p:anim calcmode="lin" valueType="num">
                                       <p:cBhvr>
-                                        <p:cTn id="62" dur="1000" fill="hold"/>
+                                        <p:cTn id="64" dur="1000" fill="hold"/>
                                         <p:tgtEl>
                                           <p:spTgt spid="16"/>
                                         </p:tgtEl>
@@ -4581,7 +4797,7 @@
           <a:bodyPr wrap="square" lIns="0" tIns="0" rIns="0" bIns="0" rtlCol="0" anchor="t"/>
           <a:lstStyle/>
           <a:p>
-            <a:pPr algn="l" indent="0" marL="0">
+            <a:pPr marL="0" indent="0" algn="l">
               <a:buNone/>
             </a:pPr>
             <a:r>
@@ -4620,11 +4836,11 @@
           <a:bodyPr wrap="square" lIns="0" tIns="0" rIns="0" bIns="0" rtlCol="0" anchor="t"/>
           <a:lstStyle/>
           <a:p>
-            <a:pPr algn="l" indent="0" marL="0">
+            <a:pPr marL="0" indent="0" algn="l">
               <a:buNone/>
             </a:pPr>
             <a:r>
-              <a:rPr lang="en-US" sz="1300" b="1" dirty="0">
+              <a:rPr lang="en-US" sz="2000" b="1" dirty="0">
                 <a:solidFill>
                   <a:srgbClr val="4F81BD"/>
                 </a:solidFill>
@@ -4634,7 +4850,7 @@
               </a:rPr>
               <a:t>An honest ranking of the ground</a:t>
             </a:r>
-            <a:endParaRPr lang="en-US" sz="1600" dirty="0"/>
+            <a:endParaRPr lang="en-US" sz="2800" dirty="0"/>
           </a:p>
         </p:txBody>
       </p:sp>
@@ -4646,7 +4862,7 @@
         </p:nvSpPr>
         <p:spPr>
           <a:xfrm>
-            <a:off x="365760" y="1371600"/>
+            <a:off x="365760" y="1069848"/>
             <a:ext cx="3337560" cy="365760"/>
           </a:xfrm>
           <a:prstGeom prst="rect">
@@ -4657,6 +4873,13 @@
           </a:solidFill>
           <a:ln/>
         </p:spPr>
+        <p:txBody>
+          <a:bodyPr/>
+          <a:lstStyle/>
+          <a:p>
+            <a:endParaRPr lang="en-US" sz="3200"/>
+          </a:p>
+        </p:txBody>
       </p:sp>
       <p:sp>
         <p:nvSpPr>
@@ -4666,7 +4889,7 @@
         </p:nvSpPr>
         <p:spPr>
           <a:xfrm>
-            <a:off x="438912" y="1417320"/>
+            <a:off x="438912" y="1115568"/>
             <a:ext cx="3227832" cy="274320"/>
           </a:xfrm>
           <a:prstGeom prst="rect">
@@ -4679,11 +4902,11 @@
           <a:bodyPr wrap="square" lIns="0" tIns="0" rIns="0" bIns="0" rtlCol="0" anchor="ctr"/>
           <a:lstStyle/>
           <a:p>
-            <a:pPr algn="l" indent="0" marL="0">
+            <a:pPr marL="0" indent="0" algn="l">
               <a:buNone/>
             </a:pPr>
             <a:r>
-              <a:rPr lang="en-US" sz="1150" b="1" dirty="0">
+              <a:rPr lang="en-US" b="1" dirty="0">
                 <a:solidFill>
                   <a:srgbClr val="FFFFFF"/>
                 </a:solidFill>
@@ -4693,7 +4916,7 @@
               </a:rPr>
               <a:t>The claim</a:t>
             </a:r>
-            <a:endParaRPr lang="en-US" sz="1600" dirty="0"/>
+            <a:endParaRPr lang="en-US" sz="2800" dirty="0"/>
           </a:p>
         </p:txBody>
       </p:sp>
@@ -4705,7 +4928,7 @@
         </p:nvSpPr>
         <p:spPr>
           <a:xfrm>
-            <a:off x="3703320" y="1371600"/>
+            <a:off x="3703320" y="1069848"/>
             <a:ext cx="3383280" cy="365760"/>
           </a:xfrm>
           <a:prstGeom prst="rect">
@@ -4716,6 +4939,13 @@
           </a:solidFill>
           <a:ln/>
         </p:spPr>
+        <p:txBody>
+          <a:bodyPr/>
+          <a:lstStyle/>
+          <a:p>
+            <a:endParaRPr lang="en-US" sz="3200"/>
+          </a:p>
+        </p:txBody>
       </p:sp>
       <p:sp>
         <p:nvSpPr>
@@ -4725,7 +4955,7 @@
         </p:nvSpPr>
         <p:spPr>
           <a:xfrm>
-            <a:off x="3776472" y="1417320"/>
+            <a:off x="3776472" y="1115568"/>
             <a:ext cx="3273552" cy="274320"/>
           </a:xfrm>
           <a:prstGeom prst="rect">
@@ -4738,11 +4968,11 @@
           <a:bodyPr wrap="square" lIns="0" tIns="0" rIns="0" bIns="0" rtlCol="0" anchor="ctr"/>
           <a:lstStyle/>
           <a:p>
-            <a:pPr algn="l" indent="0" marL="0">
+            <a:pPr marL="0" indent="0" algn="l">
               <a:buNone/>
             </a:pPr>
             <a:r>
-              <a:rPr lang="en-US" sz="1150" b="1" dirty="0">
+              <a:rPr lang="en-US" b="1" dirty="0">
                 <a:solidFill>
                   <a:srgbClr val="FFFFFF"/>
                 </a:solidFill>
@@ -4752,7 +4982,7 @@
               </a:rPr>
               <a:t>Rests on</a:t>
             </a:r>
-            <a:endParaRPr lang="en-US" sz="1600" dirty="0"/>
+            <a:endParaRPr lang="en-US" sz="2800" dirty="0"/>
           </a:p>
         </p:txBody>
       </p:sp>
@@ -4764,7 +4994,7 @@
         </p:nvSpPr>
         <p:spPr>
           <a:xfrm>
-            <a:off x="7086600" y="1371600"/>
+            <a:off x="7086600" y="1069848"/>
             <a:ext cx="1691640" cy="365760"/>
           </a:xfrm>
           <a:prstGeom prst="rect">
@@ -4775,6 +5005,13 @@
           </a:solidFill>
           <a:ln/>
         </p:spPr>
+        <p:txBody>
+          <a:bodyPr/>
+          <a:lstStyle/>
+          <a:p>
+            <a:endParaRPr lang="en-US" sz="3200"/>
+          </a:p>
+        </p:txBody>
       </p:sp>
       <p:sp>
         <p:nvSpPr>
@@ -4784,7 +5021,7 @@
         </p:nvSpPr>
         <p:spPr>
           <a:xfrm>
-            <a:off x="7159752" y="1417320"/>
+            <a:off x="7159752" y="1115568"/>
             <a:ext cx="1581912" cy="274320"/>
           </a:xfrm>
           <a:prstGeom prst="rect">
@@ -4797,11 +5034,11 @@
           <a:bodyPr wrap="square" lIns="0" tIns="0" rIns="0" bIns="0" rtlCol="0" anchor="ctr"/>
           <a:lstStyle/>
           <a:p>
-            <a:pPr algn="l" indent="0" marL="0">
+            <a:pPr marL="0" indent="0" algn="l">
               <a:buNone/>
             </a:pPr>
             <a:r>
-              <a:rPr lang="en-US" sz="1150" b="1" dirty="0">
+              <a:rPr lang="en-US" b="1" dirty="0">
                 <a:solidFill>
                   <a:srgbClr val="FFFFFF"/>
                 </a:solidFill>
@@ -4811,7 +5048,7 @@
               </a:rPr>
               <a:t>Strength</a:t>
             </a:r>
-            <a:endParaRPr lang="en-US" sz="1600" dirty="0"/>
+            <a:endParaRPr lang="en-US" sz="2800" dirty="0"/>
           </a:p>
         </p:txBody>
       </p:sp>
@@ -4823,7 +5060,7 @@
         </p:nvSpPr>
         <p:spPr>
           <a:xfrm>
-            <a:off x="365760" y="1737360"/>
+            <a:off x="365760" y="1435608"/>
             <a:ext cx="3337560" cy="713232"/>
           </a:xfrm>
           <a:prstGeom prst="rect">
@@ -4839,6 +5076,13 @@
             <a:prstDash val="solid"/>
           </a:ln>
         </p:spPr>
+        <p:txBody>
+          <a:bodyPr/>
+          <a:lstStyle/>
+          <a:p>
+            <a:endParaRPr lang="en-US" sz="3200"/>
+          </a:p>
+        </p:txBody>
       </p:sp>
       <p:sp>
         <p:nvSpPr>
@@ -4848,7 +5092,7 @@
         </p:nvSpPr>
         <p:spPr>
           <a:xfrm>
-            <a:off x="438912" y="1773936"/>
+            <a:off x="438912" y="1472184"/>
             <a:ext cx="3209544" cy="658368"/>
           </a:xfrm>
           <a:prstGeom prst="rect">
@@ -4861,11 +5105,11 @@
           <a:bodyPr wrap="square" lIns="0" tIns="0" rIns="0" bIns="0" rtlCol="0" anchor="ctr"/>
           <a:lstStyle/>
           <a:p>
-            <a:pPr algn="l" indent="0" marL="0">
+            <a:pPr marL="0" indent="0" algn="l">
               <a:buNone/>
             </a:pPr>
             <a:r>
-              <a:rPr lang="en-US" sz="1100" b="1" dirty="0">
+              <a:rPr lang="en-US" b="1" dirty="0">
                 <a:solidFill>
                   <a:srgbClr val="1F497D"/>
                 </a:solidFill>
@@ -4875,7 +5119,7 @@
               </a:rPr>
               <a:t>Elder / overseer office = male</a:t>
             </a:r>
-            <a:endParaRPr lang="en-US" sz="1600" dirty="0"/>
+            <a:endParaRPr lang="en-US" sz="2800" dirty="0"/>
           </a:p>
         </p:txBody>
       </p:sp>
@@ -4887,7 +5131,7 @@
         </p:nvSpPr>
         <p:spPr>
           <a:xfrm>
-            <a:off x="3703320" y="1737360"/>
+            <a:off x="3703320" y="1435608"/>
             <a:ext cx="3383280" cy="713232"/>
           </a:xfrm>
           <a:prstGeom prst="rect">
@@ -4903,6 +5147,13 @@
             <a:prstDash val="solid"/>
           </a:ln>
         </p:spPr>
+        <p:txBody>
+          <a:bodyPr/>
+          <a:lstStyle/>
+          <a:p>
+            <a:endParaRPr lang="en-US" sz="3200"/>
+          </a:p>
+        </p:txBody>
       </p:sp>
       <p:sp>
         <p:nvSpPr>
@@ -4912,7 +5163,7 @@
         </p:nvSpPr>
         <p:spPr>
           <a:xfrm>
-            <a:off x="3776472" y="1773936"/>
+            <a:off x="3776472" y="1472184"/>
             <a:ext cx="3255264" cy="658368"/>
           </a:xfrm>
           <a:prstGeom prst="rect">
@@ -4925,11 +5176,11 @@
           <a:bodyPr wrap="square" lIns="0" tIns="0" rIns="0" bIns="0" rtlCol="0" anchor="ctr"/>
           <a:lstStyle/>
           <a:p>
-            <a:pPr algn="l" indent="0" marL="0">
+            <a:pPr marL="0" indent="0" algn="l">
               <a:buNone/>
             </a:pPr>
             <a:r>
-              <a:rPr lang="en-US" sz="1050" dirty="0">
+              <a:rPr lang="en-US" sz="1600" dirty="0">
                 <a:solidFill>
                   <a:srgbClr val="000000"/>
                 </a:solidFill>
@@ -4939,7 +5190,7 @@
               </a:rPr>
               <a:t>1 Tim 3:2; Titus 1:6 (explicit male qualifications)</a:t>
             </a:r>
-            <a:endParaRPr lang="en-US" sz="1600" dirty="0"/>
+            <a:endParaRPr lang="en-US" sz="2800" dirty="0"/>
           </a:p>
         </p:txBody>
       </p:sp>
@@ -4951,7 +5202,7 @@
         </p:nvSpPr>
         <p:spPr>
           <a:xfrm>
-            <a:off x="7086600" y="1737360"/>
+            <a:off x="7086600" y="1435608"/>
             <a:ext cx="1691640" cy="713232"/>
           </a:xfrm>
           <a:prstGeom prst="rect">
@@ -4967,6 +5218,13 @@
             <a:prstDash val="solid"/>
           </a:ln>
         </p:spPr>
+        <p:txBody>
+          <a:bodyPr/>
+          <a:lstStyle/>
+          <a:p>
+            <a:endParaRPr lang="en-US" sz="3200"/>
+          </a:p>
+        </p:txBody>
       </p:sp>
       <p:sp>
         <p:nvSpPr>
@@ -4976,7 +5234,7 @@
         </p:nvSpPr>
         <p:spPr>
           <a:xfrm>
-            <a:off x="7159752" y="1773936"/>
+            <a:off x="7159752" y="1472184"/>
             <a:ext cx="1563624" cy="658368"/>
           </a:xfrm>
           <a:prstGeom prst="rect">
@@ -4989,11 +5247,11 @@
           <a:bodyPr wrap="square" lIns="0" tIns="0" rIns="0" bIns="0" rtlCol="0" anchor="ctr"/>
           <a:lstStyle/>
           <a:p>
-            <a:pPr algn="l" indent="0" marL="0">
+            <a:pPr marL="0" indent="0" algn="l">
               <a:buNone/>
             </a:pPr>
             <a:r>
-              <a:rPr lang="en-US" sz="1100" b="1" dirty="0">
+              <a:rPr lang="en-US" b="1" dirty="0">
                 <a:solidFill>
                   <a:srgbClr val="4E7B4E"/>
                 </a:solidFill>
@@ -5003,7 +5261,7 @@
               </a:rPr>
               <a:t>Strongest</a:t>
             </a:r>
-            <a:endParaRPr lang="en-US" sz="1600" dirty="0"/>
+            <a:endParaRPr lang="en-US" sz="2800" dirty="0"/>
           </a:p>
         </p:txBody>
       </p:sp>
@@ -5015,7 +5273,7 @@
         </p:nvSpPr>
         <p:spPr>
           <a:xfrm>
-            <a:off x="365760" y="2450592"/>
+            <a:off x="365760" y="2148840"/>
             <a:ext cx="3337560" cy="713232"/>
           </a:xfrm>
           <a:prstGeom prst="rect">
@@ -5031,6 +5289,13 @@
             <a:prstDash val="solid"/>
           </a:ln>
         </p:spPr>
+        <p:txBody>
+          <a:bodyPr/>
+          <a:lstStyle/>
+          <a:p>
+            <a:endParaRPr lang="en-US" sz="3200"/>
+          </a:p>
+        </p:txBody>
       </p:sp>
       <p:sp>
         <p:nvSpPr>
@@ -5040,7 +5305,7 @@
         </p:nvSpPr>
         <p:spPr>
           <a:xfrm>
-            <a:off x="438912" y="2487168"/>
+            <a:off x="438912" y="2185416"/>
             <a:ext cx="3209544" cy="658368"/>
           </a:xfrm>
           <a:prstGeom prst="rect">
@@ -5053,11 +5318,11 @@
           <a:bodyPr wrap="square" lIns="0" tIns="0" rIns="0" bIns="0" rtlCol="0" anchor="ctr"/>
           <a:lstStyle/>
           <a:p>
-            <a:pPr algn="l" indent="0" marL="0">
+            <a:pPr marL="0" indent="0" algn="l">
               <a:buNone/>
             </a:pPr>
             <a:r>
-              <a:rPr lang="en-US" sz="1100" b="1" dirty="0">
+              <a:rPr lang="en-US" b="1" dirty="0">
                 <a:solidFill>
                   <a:srgbClr val="1F497D"/>
                 </a:solidFill>
@@ -5067,7 +5332,7 @@
               </a:rPr>
               <a:t>No governing doctrinal teaching over men</a:t>
             </a:r>
-            <a:endParaRPr lang="en-US" sz="1600" dirty="0"/>
+            <a:endParaRPr lang="en-US" sz="2800" dirty="0"/>
           </a:p>
         </p:txBody>
       </p:sp>
@@ -5079,7 +5344,7 @@
         </p:nvSpPr>
         <p:spPr>
           <a:xfrm>
-            <a:off x="3703320" y="2450592"/>
+            <a:off x="3703320" y="2148840"/>
             <a:ext cx="3383280" cy="713232"/>
           </a:xfrm>
           <a:prstGeom prst="rect">
@@ -5095,6 +5360,13 @@
             <a:prstDash val="solid"/>
           </a:ln>
         </p:spPr>
+        <p:txBody>
+          <a:bodyPr/>
+          <a:lstStyle/>
+          <a:p>
+            <a:endParaRPr lang="en-US" sz="3200"/>
+          </a:p>
+        </p:txBody>
       </p:sp>
       <p:sp>
         <p:nvSpPr>
@@ -5104,7 +5376,7 @@
         </p:nvSpPr>
         <p:spPr>
           <a:xfrm>
-            <a:off x="3776472" y="2487168"/>
+            <a:off x="3776472" y="2185416"/>
             <a:ext cx="3255264" cy="658368"/>
           </a:xfrm>
           <a:prstGeom prst="rect">
@@ -5117,11 +5389,11 @@
           <a:bodyPr wrap="square" lIns="0" tIns="0" rIns="0" bIns="0" rtlCol="0" anchor="ctr"/>
           <a:lstStyle/>
           <a:p>
-            <a:pPr algn="l" indent="0" marL="0">
+            <a:pPr marL="0" indent="0" algn="l">
               <a:buNone/>
             </a:pPr>
             <a:r>
-              <a:rPr lang="en-US" sz="1050" dirty="0">
+              <a:rPr lang="en-US" sz="1600" dirty="0">
                 <a:solidFill>
                   <a:srgbClr val="000000"/>
                 </a:solidFill>
@@ -5131,7 +5403,7 @@
               </a:rPr>
               <a:t>1 Tim 2:12 + creation reason (v.13)</a:t>
             </a:r>
-            <a:endParaRPr lang="en-US" sz="1600" dirty="0"/>
+            <a:endParaRPr lang="en-US" sz="2800" dirty="0"/>
           </a:p>
         </p:txBody>
       </p:sp>
@@ -5143,7 +5415,7 @@
         </p:nvSpPr>
         <p:spPr>
           <a:xfrm>
-            <a:off x="7086600" y="2450592"/>
+            <a:off x="7086600" y="2148840"/>
             <a:ext cx="1691640" cy="713232"/>
           </a:xfrm>
           <a:prstGeom prst="rect">
@@ -5159,6 +5431,13 @@
             <a:prstDash val="solid"/>
           </a:ln>
         </p:spPr>
+        <p:txBody>
+          <a:bodyPr/>
+          <a:lstStyle/>
+          <a:p>
+            <a:endParaRPr lang="en-US" sz="3200"/>
+          </a:p>
+        </p:txBody>
       </p:sp>
       <p:sp>
         <p:nvSpPr>
@@ -5168,7 +5447,7 @@
         </p:nvSpPr>
         <p:spPr>
           <a:xfrm>
-            <a:off x="7159752" y="2487168"/>
+            <a:off x="7159752" y="2185416"/>
             <a:ext cx="1563624" cy="658368"/>
           </a:xfrm>
           <a:prstGeom prst="rect">
@@ -5181,11 +5460,11 @@
           <a:bodyPr wrap="square" lIns="0" tIns="0" rIns="0" bIns="0" rtlCol="0" anchor="ctr"/>
           <a:lstStyle/>
           <a:p>
-            <a:pPr algn="l" indent="0" marL="0">
+            <a:pPr marL="0" indent="0" algn="l">
               <a:buNone/>
             </a:pPr>
             <a:r>
-              <a:rPr lang="en-US" sz="1100" b="1" dirty="0">
+              <a:rPr lang="en-US" b="1" dirty="0">
                 <a:solidFill>
                   <a:srgbClr val="4E7B4E"/>
                 </a:solidFill>
@@ -5195,7 +5474,7 @@
               </a:rPr>
               <a:t>Strong</a:t>
             </a:r>
-            <a:endParaRPr lang="en-US" sz="1600" dirty="0"/>
+            <a:endParaRPr lang="en-US" sz="2800" dirty="0"/>
           </a:p>
         </p:txBody>
       </p:sp>
@@ -5207,7 +5486,7 @@
         </p:nvSpPr>
         <p:spPr>
           <a:xfrm>
-            <a:off x="365760" y="3163824"/>
+            <a:off x="365760" y="2862072"/>
             <a:ext cx="3337560" cy="713232"/>
           </a:xfrm>
           <a:prstGeom prst="rect">
@@ -5223,6 +5502,13 @@
             <a:prstDash val="solid"/>
           </a:ln>
         </p:spPr>
+        <p:txBody>
+          <a:bodyPr/>
+          <a:lstStyle/>
+          <a:p>
+            <a:endParaRPr lang="en-US" sz="3200"/>
+          </a:p>
+        </p:txBody>
       </p:sp>
       <p:sp>
         <p:nvSpPr>
@@ -5232,7 +5518,7 @@
         </p:nvSpPr>
         <p:spPr>
           <a:xfrm>
-            <a:off x="438912" y="3200400"/>
+            <a:off x="438912" y="2898648"/>
             <a:ext cx="3209544" cy="658368"/>
           </a:xfrm>
           <a:prstGeom prst="rect">
@@ -5245,11 +5531,11 @@
           <a:bodyPr wrap="square" lIns="0" tIns="0" rIns="0" bIns="0" rtlCol="0" anchor="ctr"/>
           <a:lstStyle/>
           <a:p>
-            <a:pPr algn="l" indent="0" marL="0">
+            <a:pPr marL="0" indent="0" algn="l">
               <a:buNone/>
             </a:pPr>
             <a:r>
-              <a:rPr lang="en-US" sz="1100" b="1" dirty="0">
+              <a:rPr lang="en-US" b="1" dirty="0">
                 <a:solidFill>
                   <a:srgbClr val="1F497D"/>
                 </a:solidFill>
@@ -5259,7 +5545,7 @@
               </a:rPr>
               <a:t>No authoritative weighing of prophecy</a:t>
             </a:r>
-            <a:endParaRPr lang="en-US" sz="1600" dirty="0"/>
+            <a:endParaRPr lang="en-US" sz="2800" dirty="0"/>
           </a:p>
         </p:txBody>
       </p:sp>
@@ -5271,7 +5557,7 @@
         </p:nvSpPr>
         <p:spPr>
           <a:xfrm>
-            <a:off x="3703320" y="3163824"/>
+            <a:off x="3703320" y="2862072"/>
             <a:ext cx="3383280" cy="713232"/>
           </a:xfrm>
           <a:prstGeom prst="rect">
@@ -5287,6 +5573,13 @@
             <a:prstDash val="solid"/>
           </a:ln>
         </p:spPr>
+        <p:txBody>
+          <a:bodyPr/>
+          <a:lstStyle/>
+          <a:p>
+            <a:endParaRPr lang="en-US" sz="3200"/>
+          </a:p>
+        </p:txBody>
       </p:sp>
       <p:sp>
         <p:nvSpPr>
@@ -5296,7 +5589,7 @@
         </p:nvSpPr>
         <p:spPr>
           <a:xfrm>
-            <a:off x="3776472" y="3200400"/>
+            <a:off x="3776472" y="2898648"/>
             <a:ext cx="3255264" cy="658368"/>
           </a:xfrm>
           <a:prstGeom prst="rect">
@@ -5309,11 +5602,11 @@
           <a:bodyPr wrap="square" lIns="0" tIns="0" rIns="0" bIns="0" rtlCol="0" anchor="ctr"/>
           <a:lstStyle/>
           <a:p>
-            <a:pPr algn="l" indent="0" marL="0">
+            <a:pPr marL="0" indent="0" algn="l">
               <a:buNone/>
             </a:pPr>
             <a:r>
-              <a:rPr lang="en-US" sz="1050" dirty="0">
+              <a:rPr lang="en-US" sz="1600" dirty="0">
                 <a:solidFill>
                   <a:srgbClr val="000000"/>
                 </a:solidFill>
@@ -5323,7 +5616,7 @@
               </a:rPr>
               <a:t>1 Cor 14:29–35 in context</a:t>
             </a:r>
-            <a:endParaRPr lang="en-US" sz="1600" dirty="0"/>
+            <a:endParaRPr lang="en-US" sz="2800" dirty="0"/>
           </a:p>
         </p:txBody>
       </p:sp>
@@ -5335,7 +5628,7 @@
         </p:nvSpPr>
         <p:spPr>
           <a:xfrm>
-            <a:off x="7086600" y="3163824"/>
+            <a:off x="7086600" y="2862072"/>
             <a:ext cx="1691640" cy="713232"/>
           </a:xfrm>
           <a:prstGeom prst="rect">
@@ -5351,6 +5644,13 @@
             <a:prstDash val="solid"/>
           </a:ln>
         </p:spPr>
+        <p:txBody>
+          <a:bodyPr/>
+          <a:lstStyle/>
+          <a:p>
+            <a:endParaRPr lang="en-US" sz="3200"/>
+          </a:p>
+        </p:txBody>
       </p:sp>
       <p:sp>
         <p:nvSpPr>
@@ -5360,7 +5660,7 @@
         </p:nvSpPr>
         <p:spPr>
           <a:xfrm>
-            <a:off x="7159752" y="3200400"/>
+            <a:off x="7159752" y="2898648"/>
             <a:ext cx="1563624" cy="658368"/>
           </a:xfrm>
           <a:prstGeom prst="rect">
@@ -5373,11 +5673,11 @@
           <a:bodyPr wrap="square" lIns="0" tIns="0" rIns="0" bIns="0" rtlCol="0" anchor="ctr"/>
           <a:lstStyle/>
           <a:p>
-            <a:pPr algn="l" indent="0" marL="0">
+            <a:pPr marL="0" indent="0" algn="l">
               <a:buNone/>
             </a:pPr>
             <a:r>
-              <a:rPr lang="en-US" sz="1100" b="1" dirty="0">
+              <a:rPr lang="en-US" b="1" dirty="0">
                 <a:solidFill>
                   <a:srgbClr val="C9A227"/>
                 </a:solidFill>
@@ -5387,7 +5687,7 @@
               </a:rPr>
               <a:t>Moderate</a:t>
             </a:r>
-            <a:endParaRPr lang="en-US" sz="1600" dirty="0"/>
+            <a:endParaRPr lang="en-US" sz="2800" dirty="0"/>
           </a:p>
         </p:txBody>
       </p:sp>
@@ -5399,7 +5699,7 @@
         </p:nvSpPr>
         <p:spPr>
           <a:xfrm>
-            <a:off x="365760" y="3877056"/>
+            <a:off x="365760" y="3575304"/>
             <a:ext cx="3337560" cy="713232"/>
           </a:xfrm>
           <a:prstGeom prst="rect">
@@ -5415,6 +5715,13 @@
             <a:prstDash val="solid"/>
           </a:ln>
         </p:spPr>
+        <p:txBody>
+          <a:bodyPr/>
+          <a:lstStyle/>
+          <a:p>
+            <a:endParaRPr lang="en-US" sz="3200"/>
+          </a:p>
+        </p:txBody>
       </p:sp>
       <p:sp>
         <p:nvSpPr>
@@ -5424,7 +5731,7 @@
         </p:nvSpPr>
         <p:spPr>
           <a:xfrm>
-            <a:off x="438912" y="3913632"/>
+            <a:off x="438912" y="3611880"/>
             <a:ext cx="3209544" cy="658368"/>
           </a:xfrm>
           <a:prstGeom prst="rect">
@@ -5437,11 +5744,11 @@
           <a:bodyPr wrap="square" lIns="0" tIns="0" rIns="0" bIns="0" rtlCol="0" anchor="ctr"/>
           <a:lstStyle/>
           <a:p>
-            <a:pPr algn="l" indent="0" marL="0">
+            <a:pPr marL="0" indent="0" algn="l">
               <a:buNone/>
             </a:pPr>
             <a:r>
-              <a:rPr lang="en-US" sz="1100" b="1" dirty="0">
+              <a:rPr lang="en-US" b="1" dirty="0">
                 <a:solidFill>
                   <a:srgbClr val="1F497D"/>
                 </a:solidFill>
@@ -5451,7 +5758,7 @@
               </a:rPr>
               <a:t>Women not baptizing / not presiding</a:t>
             </a:r>
-            <a:endParaRPr lang="en-US" sz="1600" dirty="0"/>
+            <a:endParaRPr lang="en-US" sz="2800" dirty="0"/>
           </a:p>
         </p:txBody>
       </p:sp>
@@ -5463,7 +5770,7 @@
         </p:nvSpPr>
         <p:spPr>
           <a:xfrm>
-            <a:off x="3703320" y="3877056"/>
+            <a:off x="3703320" y="3575304"/>
             <a:ext cx="3383280" cy="713232"/>
           </a:xfrm>
           <a:prstGeom prst="rect">
@@ -5479,6 +5786,13 @@
             <a:prstDash val="solid"/>
           </a:ln>
         </p:spPr>
+        <p:txBody>
+          <a:bodyPr/>
+          <a:lstStyle/>
+          <a:p>
+            <a:endParaRPr lang="en-US" sz="3200"/>
+          </a:p>
+        </p:txBody>
       </p:sp>
       <p:sp>
         <p:nvSpPr>
@@ -5488,7 +5802,7 @@
         </p:nvSpPr>
         <p:spPr>
           <a:xfrm>
-            <a:off x="3776472" y="3913632"/>
+            <a:off x="3776472" y="3611880"/>
             <a:ext cx="3255264" cy="658368"/>
           </a:xfrm>
           <a:prstGeom prst="rect">
@@ -5501,11 +5815,11 @@
           <a:bodyPr wrap="square" lIns="0" tIns="0" rIns="0" bIns="0" rtlCol="0" anchor="ctr"/>
           <a:lstStyle/>
           <a:p>
-            <a:pPr algn="l" indent="0" marL="0">
+            <a:pPr marL="0" indent="0" algn="l">
               <a:buNone/>
             </a:pPr>
             <a:r>
-              <a:rPr lang="en-US" sz="1050" dirty="0">
+              <a:rPr lang="en-US" sz="1600" dirty="0">
                 <a:solidFill>
                   <a:srgbClr val="000000"/>
                 </a:solidFill>
@@ -5513,9 +5827,31 @@
                 <a:ea typeface="Arial" pitchFamily="34" charset="-122"/>
                 <a:cs typeface="Arial" pitchFamily="34" charset="-120"/>
               </a:rPr>
-              <a:t>Early-church practice — NOT a NT command</a:t>
-            </a:r>
-            <a:endParaRPr lang="en-US" sz="1600" dirty="0"/>
+              <a:t>Early-church practice </a:t>
+            </a:r>
+            <a:r>
+              <a:rPr lang="en-US" sz="1600">
+                <a:solidFill>
+                  <a:srgbClr val="000000"/>
+                </a:solidFill>
+                <a:latin typeface="Arial" pitchFamily="34" charset="0"/>
+                <a:ea typeface="Arial" pitchFamily="34" charset="-122"/>
+                <a:cs typeface="Arial" pitchFamily="34" charset="-120"/>
+              </a:rPr>
+              <a:t>→</a:t>
+            </a:r>
+            <a:r>
+              <a:rPr lang="en-US" sz="1600" dirty="0">
+                <a:solidFill>
+                  <a:srgbClr val="000000"/>
+                </a:solidFill>
+                <a:latin typeface="Arial" pitchFamily="34" charset="0"/>
+                <a:ea typeface="Arial" pitchFamily="34" charset="-122"/>
+                <a:cs typeface="Arial" pitchFamily="34" charset="-120"/>
+              </a:rPr>
+              <a:t> NOT a NT command</a:t>
+            </a:r>
+            <a:endParaRPr lang="en-US" sz="2800" dirty="0"/>
           </a:p>
         </p:txBody>
       </p:sp>
@@ -5527,7 +5863,7 @@
         </p:nvSpPr>
         <p:spPr>
           <a:xfrm>
-            <a:off x="7086600" y="3877056"/>
+            <a:off x="7086600" y="3575304"/>
             <a:ext cx="1691640" cy="713232"/>
           </a:xfrm>
           <a:prstGeom prst="rect">
@@ -5543,6 +5879,13 @@
             <a:prstDash val="solid"/>
           </a:ln>
         </p:spPr>
+        <p:txBody>
+          <a:bodyPr/>
+          <a:lstStyle/>
+          <a:p>
+            <a:endParaRPr lang="en-US" sz="3200"/>
+          </a:p>
+        </p:txBody>
       </p:sp>
       <p:sp>
         <p:nvSpPr>
@@ -5552,7 +5895,7 @@
         </p:nvSpPr>
         <p:spPr>
           <a:xfrm>
-            <a:off x="7159752" y="3913632"/>
+            <a:off x="7159752" y="3611880"/>
             <a:ext cx="1563624" cy="658368"/>
           </a:xfrm>
           <a:prstGeom prst="rect">
@@ -5565,11 +5908,11 @@
           <a:bodyPr wrap="square" lIns="0" tIns="0" rIns="0" bIns="0" rtlCol="0" anchor="ctr"/>
           <a:lstStyle/>
           <a:p>
-            <a:pPr algn="l" indent="0" marL="0">
+            <a:pPr marL="0" indent="0" algn="l">
               <a:buNone/>
             </a:pPr>
             <a:r>
-              <a:rPr lang="en-US" sz="1100" b="1" dirty="0">
+              <a:rPr lang="en-US" b="1" dirty="0">
                 <a:solidFill>
                   <a:srgbClr val="B0413E"/>
                 </a:solidFill>
@@ -5577,9 +5920,9 @@
                 <a:ea typeface="Arial" pitchFamily="34" charset="-122"/>
                 <a:cs typeface="Arial" pitchFamily="34" charset="-120"/>
               </a:rPr>
-              <a:t>Weak (say so!)</a:t>
-            </a:r>
-            <a:endParaRPr lang="en-US" sz="1600" dirty="0"/>
+              <a:t>Weak</a:t>
+            </a:r>
+            <a:endParaRPr lang="en-US" sz="2800" dirty="0"/>
           </a:p>
         </p:txBody>
       </p:sp>
@@ -5591,8 +5934,8 @@
         </p:nvSpPr>
         <p:spPr>
           <a:xfrm>
-            <a:off x="365760" y="4480560"/>
-            <a:ext cx="8412480" cy="822960"/>
+            <a:off x="365760" y="4562856"/>
+            <a:ext cx="8412480" cy="713232"/>
           </a:xfrm>
           <a:prstGeom prst="rect">
             <a:avLst/>
@@ -5604,11 +5947,11 @@
           <a:bodyPr wrap="square" lIns="0" tIns="0" rIns="0" bIns="0" rtlCol="0" anchor="t"/>
           <a:lstStyle/>
           <a:p>
-            <a:pPr algn="l" indent="0" marL="0">
+            <a:pPr marL="0" indent="0" algn="l">
               <a:buNone/>
             </a:pPr>
             <a:r>
-              <a:rPr lang="en-US" sz="1400" b="1" dirty="0">
+              <a:rPr lang="en-US" sz="2000" b="1" dirty="0">
                 <a:solidFill>
                   <a:srgbClr val="1F497D"/>
                 </a:solidFill>
@@ -5618,11 +5961,8 @@
               </a:rPr>
               <a:t>Intellectual honesty: </a:t>
             </a:r>
-            <a:pPr algn="l" indent="0" marL="0">
-              <a:buNone/>
-            </a:pPr>
-            <a:r>
-              <a:rPr lang="en-US" sz="1350" dirty="0">
+            <a:r>
+              <a:rPr lang="en-US" dirty="0">
                 <a:solidFill>
                   <a:srgbClr val="000000"/>
                 </a:solidFill>
@@ -5632,7 +5972,7 @@
               </a:rPr>
               <a:t>hold the top rows firmly; hold the bottom row loosely, and SAY which is which. Overclaiming a weak point discredits the strong ones.</a:t>
             </a:r>
-            <a:endParaRPr lang="en-US" sz="1600" dirty="0"/>
+            <a:endParaRPr lang="en-US" sz="2400" dirty="0"/>
           </a:p>
         </p:txBody>
       </p:sp>
@@ -5644,8 +5984,8 @@
         </p:nvSpPr>
         <p:spPr>
           <a:xfrm>
-            <a:off x="365760" y="5394960"/>
-            <a:ext cx="8412480" cy="822960"/>
+            <a:off x="365760" y="5552440"/>
+            <a:ext cx="8412480" cy="980440"/>
           </a:xfrm>
           <a:prstGeom prst="rect">
             <a:avLst/>
@@ -5657,11 +5997,11 @@
           <a:bodyPr wrap="square" lIns="0" tIns="0" rIns="0" bIns="0" rtlCol="0" anchor="t"/>
           <a:lstStyle/>
           <a:p>
-            <a:pPr algn="l" indent="0" marL="0">
+            <a:pPr marL="0" indent="0" algn="l">
               <a:buNone/>
             </a:pPr>
             <a:r>
-              <a:rPr lang="en-US" sz="1350" b="1" dirty="0">
+              <a:rPr lang="en-US" sz="2000" b="1" dirty="0">
                 <a:solidFill>
                   <a:srgbClr val="1F497D"/>
                 </a:solidFill>
@@ -5669,13 +6009,10 @@
                 <a:ea typeface="Arial" pitchFamily="34" charset="-122"/>
                 <a:cs typeface="Arial" pitchFamily="34" charset="-120"/>
               </a:rPr>
-              <a:t>Equality of being, difference of function — and the anchor is the Trinity: </a:t>
-            </a:r>
-            <a:pPr algn="l" indent="0" marL="0">
-              <a:buNone/>
-            </a:pPr>
-            <a:r>
-              <a:rPr lang="en-US" sz="1350" b="1" i="1" dirty="0">
+              <a:t>Equality of being, difference of function → and the anchor is the Trinity: </a:t>
+            </a:r>
+            <a:r>
+              <a:rPr lang="en-US" sz="2000" b="1" i="1" dirty="0">
                 <a:solidFill>
                   <a:srgbClr val="000000"/>
                 </a:solidFill>
@@ -5685,11 +6022,8 @@
               </a:rPr>
               <a:t>“the head of Christ is God” </a:t>
             </a:r>
-            <a:pPr algn="l" indent="0" marL="0">
-              <a:buNone/>
-            </a:pPr>
-            <a:r>
-              <a:rPr lang="en-US" sz="1250" b="1" dirty="0">
+            <a:r>
+              <a:rPr lang="en-US" sz="2000" b="1" dirty="0">
                 <a:solidFill>
                   <a:srgbClr val="000000"/>
                 </a:solidFill>
@@ -5699,11 +6033,8 @@
               </a:rPr>
               <a:t>(1 Cor 11:3)</a:t>
             </a:r>
-            <a:pPr algn="l" indent="0" marL="0">
-              <a:buNone/>
-            </a:pPr>
-            <a:r>
-              <a:rPr lang="en-US" sz="1250" dirty="0">
+            <a:r>
+              <a:rPr lang="en-US" sz="2000" dirty="0">
                 <a:solidFill>
                   <a:srgbClr val="000000"/>
                 </a:solidFill>
@@ -5713,7 +6044,7 @@
               </a:rPr>
               <a:t>  The Son is fully God, and joyfully ordered to the Father. Order does not imply lesser worth.</a:t>
             </a:r>
-            <a:endParaRPr lang="en-US" sz="1600" dirty="0"/>
+            <a:endParaRPr lang="en-US" sz="2800" dirty="0"/>
           </a:p>
         </p:txBody>
       </p:sp>
@@ -5731,26 +6062,26 @@
               <p:cTn id="2" dur="indefinite" nodeType="mainSeq">
                 <p:childTnLst>
                   <p:par>
-                    <p:cTn id="7" fill="hold">
+                    <p:cTn id="3" fill="hold">
                       <p:stCondLst>
                         <p:cond delay="indefinite"/>
                       </p:stCondLst>
                       <p:childTnLst>
                         <p:par>
-                          <p:cTn id="8" fill="hold">
+                          <p:cTn id="4" fill="hold">
                             <p:stCondLst>
                               <p:cond delay="0"/>
                             </p:stCondLst>
                             <p:childTnLst>
                               <p:par>
-                                <p:cTn id="3" presetID="42" presetClass="entr" presetSubtype="0" fill="hold" grpId="0" nodeType="clickEffect">
+                                <p:cTn id="5" presetID="42" presetClass="entr" presetSubtype="0" fill="hold" nodeType="clickEffect">
                                   <p:stCondLst>
                                     <p:cond delay="0"/>
                                   </p:stCondLst>
                                   <p:childTnLst>
                                     <p:set>
                                       <p:cBhvr>
-                                        <p:cTn id="4" dur="1" fill="hold">
+                                        <p:cTn id="6" dur="1" fill="hold">
                                           <p:stCondLst>
                                             <p:cond delay="0"/>
                                           </p:stCondLst>
@@ -5768,7 +6099,7 @@
                                     </p:set>
                                     <p:animEffect transition="in" filter="fade">
                                       <p:cBhvr>
-                                        <p:cTn id="5" dur="1000"/>
+                                        <p:cTn id="7" dur="1000"/>
                                         <p:tgtEl>
                                           <p:spTgt spid="34"/>
                                         </p:tgtEl>
@@ -5776,7 +6107,7 @@
                                     </p:animEffect>
                                     <p:anim calcmode="lin" valueType="num">
                                       <p:cBhvr>
-                                        <p:cTn id="6" dur="1000" fill="hold"/>
+                                        <p:cTn id="8" dur="1000" fill="hold"/>
                                         <p:tgtEl>
                                           <p:spTgt spid="34"/>
                                         </p:tgtEl>
@@ -5807,26 +6138,26 @@
                     </p:cTn>
                   </p:par>
                   <p:par>
-                    <p:cTn id="13" fill="hold">
+                    <p:cTn id="9" fill="hold">
                       <p:stCondLst>
                         <p:cond delay="indefinite"/>
                       </p:stCondLst>
                       <p:childTnLst>
                         <p:par>
-                          <p:cTn id="14" fill="hold">
+                          <p:cTn id="10" fill="hold">
                             <p:stCondLst>
                               <p:cond delay="0"/>
                             </p:stCondLst>
                             <p:childTnLst>
                               <p:par>
-                                <p:cTn id="9" presetID="42" presetClass="entr" presetSubtype="0" fill="hold" grpId="0" nodeType="clickEffect">
+                                <p:cTn id="11" presetID="42" presetClass="entr" presetSubtype="0" fill="hold" nodeType="clickEffect">
                                   <p:stCondLst>
                                     <p:cond delay="0"/>
                                   </p:stCondLst>
                                   <p:childTnLst>
                                     <p:set>
                                       <p:cBhvr>
-                                        <p:cTn id="10" dur="1" fill="hold">
+                                        <p:cTn id="12" dur="1" fill="hold">
                                           <p:stCondLst>
                                             <p:cond delay="0"/>
                                           </p:stCondLst>
@@ -5844,7 +6175,7 @@
                                     </p:set>
                                     <p:animEffect transition="in" filter="fade">
                                       <p:cBhvr>
-                                        <p:cTn id="11" dur="1000"/>
+                                        <p:cTn id="13" dur="1000"/>
                                         <p:tgtEl>
                                           <p:spTgt spid="35"/>
                                         </p:tgtEl>
@@ -5852,7 +6183,7 @@
                                     </p:animEffect>
                                     <p:anim calcmode="lin" valueType="num">
                                       <p:cBhvr>
-                                        <p:cTn id="12" dur="1000" fill="hold"/>
+                                        <p:cTn id="14" dur="1000" fill="hold"/>
                                         <p:tgtEl>
                                           <p:spTgt spid="35"/>
                                         </p:tgtEl>
@@ -5945,7 +6276,7 @@
           <a:bodyPr wrap="square" lIns="0" tIns="0" rIns="0" bIns="0" rtlCol="0" anchor="t"/>
           <a:lstStyle/>
           <a:p>
-            <a:pPr algn="l" indent="0" marL="0">
+            <a:pPr marL="0" indent="0" algn="l">
               <a:buNone/>
             </a:pPr>
             <a:r>
@@ -5971,7 +6302,7 @@
         </p:nvSpPr>
         <p:spPr>
           <a:xfrm>
-            <a:off x="228600" y="566928"/>
+            <a:off x="228600" y="521208"/>
             <a:ext cx="8686800" cy="320040"/>
           </a:xfrm>
           <a:prstGeom prst="rect">
@@ -5984,11 +6315,11 @@
           <a:bodyPr wrap="square" lIns="0" tIns="0" rIns="0" bIns="0" rtlCol="0" anchor="t"/>
           <a:lstStyle/>
           <a:p>
-            <a:pPr algn="l" indent="0" marL="0">
+            <a:pPr marL="0" indent="0" algn="l">
               <a:buNone/>
             </a:pPr>
             <a:r>
-              <a:rPr lang="en-US" sz="1300" b="1" dirty="0">
+              <a:rPr lang="en-US" sz="2000" b="1" dirty="0">
                 <a:solidFill>
                   <a:srgbClr val="4F81BD"/>
                 </a:solidFill>
@@ -5996,9 +6327,9 @@
                 <a:ea typeface="Arial" pitchFamily="34" charset="-122"/>
                 <a:cs typeface="Arial" pitchFamily="34" charset="-120"/>
               </a:rPr>
-              <a:t>And discussion — the week’s practice</a:t>
-            </a:r>
-            <a:endParaRPr lang="en-US" sz="1600" dirty="0"/>
+              <a:t>And discussion → the week’s practice</a:t>
+            </a:r>
+            <a:endParaRPr lang="en-US" sz="2800" dirty="0"/>
           </a:p>
         </p:txBody>
       </p:sp>
@@ -6023,11 +6354,11 @@
           <a:bodyPr wrap="square" lIns="0" tIns="0" rIns="0" bIns="0" rtlCol="0" anchor="t"/>
           <a:lstStyle/>
           <a:p>
-            <a:pPr algn="l" indent="0" marL="0">
+            <a:pPr marL="0" indent="0" algn="l">
               <a:buNone/>
             </a:pPr>
             <a:r>
-              <a:rPr lang="en-US" sz="1500" b="1" dirty="0">
+              <a:rPr lang="en-US" b="1" dirty="0">
                 <a:solidFill>
                   <a:srgbClr val="1F497D"/>
                 </a:solidFill>
@@ -6037,11 +6368,8 @@
               </a:rPr>
               <a:t>The goal is not power or restriction for its own sake. </a:t>
             </a:r>
-            <a:pPr algn="l" indent="0" marL="0">
-              <a:buNone/>
-            </a:pPr>
-            <a:r>
-              <a:rPr lang="en-US" sz="1400" dirty="0">
+            <a:r>
+              <a:rPr lang="en-US" dirty="0">
                 <a:solidFill>
                   <a:srgbClr val="000000"/>
                 </a:solidFill>
@@ -6049,9 +6377,9 @@
                 <a:ea typeface="Arial" pitchFamily="34" charset="-122"/>
                 <a:cs typeface="Arial" pitchFamily="34" charset="-120"/>
               </a:rPr>
-              <a:t>The church is God’s HOUSEHOLD (1 Tim 3:15) — a family, a body, a bride. Ordered love, not corporate hierarchy; every member vital. The assembly rehearses restored creation: differentiated roles serving one communion under Christ.</a:t>
-            </a:r>
-            <a:endParaRPr lang="en-US" sz="1600" dirty="0"/>
+              <a:t>The church is God’s HOUSEHOLD (1 Tim 3:15) → a family, a body, a bride. Ordered love, not corporate hierarchy; every member vital. The assembly rehearses restored creation: differentiated roles serving one communion under Christ.</a:t>
+            </a:r>
+            <a:endParaRPr lang="en-US" sz="2000" dirty="0"/>
           </a:p>
         </p:txBody>
       </p:sp>
@@ -6076,11 +6404,11 @@
           <a:bodyPr wrap="square" lIns="0" tIns="0" rIns="0" bIns="0" rtlCol="0" anchor="t"/>
           <a:lstStyle/>
           <a:p>
-            <a:pPr algn="l" indent="0" marL="0">
+            <a:pPr marL="0" indent="0" algn="l">
               <a:buNone/>
             </a:pPr>
             <a:r>
-              <a:rPr lang="en-US" sz="1800" b="1" dirty="0">
+              <a:rPr lang="en-US" sz="2000" b="1" dirty="0">
                 <a:solidFill>
                   <a:srgbClr val="1F497D"/>
                 </a:solidFill>
@@ -6090,11 +6418,8 @@
               </a:rPr>
               <a:t>1.  </a:t>
             </a:r>
-            <a:pPr algn="l" indent="0" marL="0">
-              <a:buNone/>
-            </a:pPr>
-            <a:r>
-              <a:rPr lang="en-US" sz="1600" dirty="0">
+            <a:r>
+              <a:rPr lang="en-US" dirty="0">
                 <a:solidFill>
                   <a:srgbClr val="000000"/>
                 </a:solidFill>
@@ -6102,9 +6427,9 @@
                 <a:ea typeface="Arial" pitchFamily="34" charset="-122"/>
                 <a:cs typeface="Arial" pitchFamily="34" charset="-120"/>
               </a:rPr>
-              <a:t>How does “let a woman LEARN” reframe the whole passage? And: why does grounding matter — what’s the difference between a rule from culture and a pattern from creation?</a:t>
-            </a:r>
-            <a:endParaRPr lang="en-US" sz="1600" dirty="0"/>
+              <a:t>How does “let a woman LEARN” reframe the whole passage? And: why does grounding matter → what’s the difference between a rule from culture and a pattern from creation?</a:t>
+            </a:r>
+            <a:endParaRPr lang="en-US" dirty="0"/>
           </a:p>
         </p:txBody>
       </p:sp>
@@ -6129,11 +6454,11 @@
           <a:bodyPr wrap="square" lIns="0" tIns="0" rIns="0" bIns="0" rtlCol="0" anchor="t"/>
           <a:lstStyle/>
           <a:p>
-            <a:pPr algn="l" indent="0" marL="0">
+            <a:pPr marL="0" indent="0" algn="l">
               <a:buNone/>
             </a:pPr>
             <a:r>
-              <a:rPr lang="en-US" sz="1800" b="1" dirty="0">
+              <a:rPr lang="en-US" sz="2000" b="1" dirty="0">
                 <a:solidFill>
                   <a:srgbClr val="1F497D"/>
                 </a:solidFill>
@@ -6143,11 +6468,8 @@
               </a:rPr>
               <a:t>2.  </a:t>
             </a:r>
-            <a:pPr algn="l" indent="0" marL="0">
-              <a:buNone/>
-            </a:pPr>
-            <a:r>
-              <a:rPr lang="en-US" sz="1600" dirty="0">
+            <a:r>
+              <a:rPr lang="en-US" dirty="0">
                 <a:solidFill>
                   <a:srgbClr val="000000"/>
                 </a:solidFill>
@@ -6155,9 +6477,9 @@
                 <a:ea typeface="Arial" pitchFamily="34" charset="-122"/>
                 <a:cs typeface="Arial" pitchFamily="34" charset="-120"/>
               </a:rPr>
-              <a:t>Where must WE be careful to claim only what the text claims — not more, not less? Where have you seen this handled badly in either direction?</a:t>
-            </a:r>
-            <a:endParaRPr lang="en-US" sz="1600" dirty="0"/>
+              <a:t>Where must WE be careful to claim only what the text claims → not more, not less? Where have you seen this handled badly in either direction?</a:t>
+            </a:r>
+            <a:endParaRPr lang="en-US" dirty="0"/>
           </a:p>
         </p:txBody>
       </p:sp>
@@ -6169,7 +6491,7 @@
         </p:nvSpPr>
         <p:spPr>
           <a:xfrm>
-            <a:off x="365760" y="4892040"/>
+            <a:off x="365760" y="5102352"/>
             <a:ext cx="8412480" cy="1234440"/>
           </a:xfrm>
           <a:prstGeom prst="rect">
@@ -6182,11 +6504,11 @@
           <a:bodyPr wrap="square" lIns="0" tIns="0" rIns="0" bIns="0" rtlCol="0" anchor="t"/>
           <a:lstStyle/>
           <a:p>
-            <a:pPr algn="l" indent="0" marL="0">
+            <a:pPr marL="0" indent="0" algn="l">
               <a:buNone/>
             </a:pPr>
             <a:r>
-              <a:rPr lang="en-US" sz="1400" b="1" dirty="0">
+              <a:rPr lang="en-US" b="1" dirty="0">
                 <a:solidFill>
                   <a:srgbClr val="B0413E"/>
                 </a:solidFill>
@@ -6194,13 +6516,10 @@
                 <a:ea typeface="Arial" pitchFamily="34" charset="-122"/>
                 <a:cs typeface="Arial" pitchFamily="34" charset="-120"/>
               </a:rPr>
-              <a:t>Ground rule, stated with extra care today: </a:t>
-            </a:r>
-            <a:pPr algn="l" indent="0" marL="0">
-              <a:buNone/>
-            </a:pPr>
-            <a:r>
-              <a:rPr lang="en-US" sz="1350" i="1" dirty="0">
+              <a:t>Ground rule: </a:t>
+            </a:r>
+            <a:r>
+              <a:rPr lang="en-US" sz="1600" i="1" dirty="0">
                 <a:solidFill>
                   <a:srgbClr val="000000"/>
                 </a:solidFill>
@@ -6210,7 +6529,7 @@
               </a:rPr>
               <a:t>this is a room of brothers and sisters, not opponents. Reason from the text. Assume the best of each other. No one “wins.” If we leave more careful with Scripture and gentler with each other, the lesson worked.</a:t>
             </a:r>
-            <a:endParaRPr lang="en-US" sz="1600" dirty="0"/>
+            <a:endParaRPr lang="en-US" sz="2000" dirty="0"/>
           </a:p>
         </p:txBody>
       </p:sp>
@@ -6228,26 +6547,26 @@
               <p:cTn id="2" dur="indefinite" nodeType="mainSeq">
                 <p:childTnLst>
                   <p:par>
-                    <p:cTn id="7" fill="hold">
+                    <p:cTn id="3" fill="hold">
                       <p:stCondLst>
                         <p:cond delay="indefinite"/>
                       </p:stCondLst>
                       <p:childTnLst>
                         <p:par>
-                          <p:cTn id="8" fill="hold">
+                          <p:cTn id="4" fill="hold">
                             <p:stCondLst>
                               <p:cond delay="0"/>
                             </p:stCondLst>
                             <p:childTnLst>
                               <p:par>
-                                <p:cTn id="3" presetID="42" presetClass="entr" presetSubtype="0" fill="hold" grpId="0" nodeType="clickEffect">
+                                <p:cTn id="5" presetID="42" presetClass="entr" presetSubtype="0" fill="hold" nodeType="clickEffect">
                                   <p:stCondLst>
                                     <p:cond delay="0"/>
                                   </p:stCondLst>
                                   <p:childTnLst>
                                     <p:set>
                                       <p:cBhvr>
-                                        <p:cTn id="4" dur="1" fill="hold">
+                                        <p:cTn id="6" dur="1" fill="hold">
                                           <p:stCondLst>
                                             <p:cond delay="0"/>
                                           </p:stCondLst>
@@ -6265,7 +6584,7 @@
                                     </p:set>
                                     <p:animEffect transition="in" filter="fade">
                                       <p:cBhvr>
-                                        <p:cTn id="5" dur="1000"/>
+                                        <p:cTn id="7" dur="1000"/>
                                         <p:tgtEl>
                                           <p:spTgt spid="4"/>
                                         </p:tgtEl>
@@ -6273,7 +6592,7 @@
                                     </p:animEffect>
                                     <p:anim calcmode="lin" valueType="num">
                                       <p:cBhvr>
-                                        <p:cTn id="6" dur="1000" fill="hold"/>
+                                        <p:cTn id="8" dur="1000" fill="hold"/>
                                         <p:tgtEl>
                                           <p:spTgt spid="4"/>
                                         </p:tgtEl>
@@ -6304,26 +6623,26 @@
                     </p:cTn>
                   </p:par>
                   <p:par>
-                    <p:cTn id="13" fill="hold">
+                    <p:cTn id="9" fill="hold">
                       <p:stCondLst>
                         <p:cond delay="indefinite"/>
                       </p:stCondLst>
                       <p:childTnLst>
                         <p:par>
-                          <p:cTn id="14" fill="hold">
+                          <p:cTn id="10" fill="hold">
                             <p:stCondLst>
                               <p:cond delay="0"/>
                             </p:stCondLst>
                             <p:childTnLst>
                               <p:par>
-                                <p:cTn id="9" presetID="42" presetClass="entr" presetSubtype="0" fill="hold" grpId="0" nodeType="clickEffect">
+                                <p:cTn id="11" presetID="42" presetClass="entr" presetSubtype="0" fill="hold" nodeType="clickEffect">
                                   <p:stCondLst>
                                     <p:cond delay="0"/>
                                   </p:stCondLst>
                                   <p:childTnLst>
                                     <p:set>
                                       <p:cBhvr>
-                                        <p:cTn id="10" dur="1" fill="hold">
+                                        <p:cTn id="12" dur="1" fill="hold">
                                           <p:stCondLst>
                                             <p:cond delay="0"/>
                                           </p:stCondLst>
@@ -6341,7 +6660,7 @@
                                     </p:set>
                                     <p:animEffect transition="in" filter="fade">
                                       <p:cBhvr>
-                                        <p:cTn id="11" dur="1000"/>
+                                        <p:cTn id="13" dur="1000"/>
                                         <p:tgtEl>
                                           <p:spTgt spid="5"/>
                                         </p:tgtEl>
@@ -6349,7 +6668,7 @@
                                     </p:animEffect>
                                     <p:anim calcmode="lin" valueType="num">
                                       <p:cBhvr>
-                                        <p:cTn id="12" dur="1000" fill="hold"/>
+                                        <p:cTn id="14" dur="1000" fill="hold"/>
                                         <p:tgtEl>
                                           <p:spTgt spid="5"/>
                                         </p:tgtEl>
@@ -6380,26 +6699,26 @@
                     </p:cTn>
                   </p:par>
                   <p:par>
-                    <p:cTn id="19" fill="hold">
+                    <p:cTn id="15" fill="hold">
                       <p:stCondLst>
                         <p:cond delay="indefinite"/>
                       </p:stCondLst>
                       <p:childTnLst>
                         <p:par>
-                          <p:cTn id="20" fill="hold">
+                          <p:cTn id="16" fill="hold">
                             <p:stCondLst>
                               <p:cond delay="0"/>
                             </p:stCondLst>
                             <p:childTnLst>
                               <p:par>
-                                <p:cTn id="15" presetID="42" presetClass="entr" presetSubtype="0" fill="hold" grpId="0" nodeType="clickEffect">
+                                <p:cTn id="17" presetID="42" presetClass="entr" presetSubtype="0" fill="hold" nodeType="clickEffect">
                                   <p:stCondLst>
                                     <p:cond delay="0"/>
                                   </p:stCondLst>
                                   <p:childTnLst>
                                     <p:set>
                                       <p:cBhvr>
-                                        <p:cTn id="16" dur="1" fill="hold">
+                                        <p:cTn id="18" dur="1" fill="hold">
                                           <p:stCondLst>
                                             <p:cond delay="0"/>
                                           </p:stCondLst>
@@ -6417,7 +6736,7 @@
                                     </p:set>
                                     <p:animEffect transition="in" filter="fade">
                                       <p:cBhvr>
-                                        <p:cTn id="17" dur="1000"/>
+                                        <p:cTn id="19" dur="1000"/>
                                         <p:tgtEl>
                                           <p:spTgt spid="6"/>
                                         </p:tgtEl>
@@ -6425,7 +6744,7 @@
                                     </p:animEffect>
                                     <p:anim calcmode="lin" valueType="num">
                                       <p:cBhvr>
-                                        <p:cTn id="18" dur="1000" fill="hold"/>
+                                        <p:cTn id="20" dur="1000" fill="hold"/>
                                         <p:tgtEl>
                                           <p:spTgt spid="6"/>
                                         </p:tgtEl>
@@ -6456,26 +6775,26 @@
                     </p:cTn>
                   </p:par>
                   <p:par>
-                    <p:cTn id="25" fill="hold">
+                    <p:cTn id="21" fill="hold">
                       <p:stCondLst>
                         <p:cond delay="indefinite"/>
                       </p:stCondLst>
                       <p:childTnLst>
                         <p:par>
-                          <p:cTn id="26" fill="hold">
+                          <p:cTn id="22" fill="hold">
                             <p:stCondLst>
                               <p:cond delay="0"/>
                             </p:stCondLst>
                             <p:childTnLst>
                               <p:par>
-                                <p:cTn id="21" presetID="42" presetClass="entr" presetSubtype="0" fill="hold" grpId="0" nodeType="clickEffect">
+                                <p:cTn id="23" presetID="42" presetClass="entr" presetSubtype="0" fill="hold" nodeType="clickEffect">
                                   <p:stCondLst>
                                     <p:cond delay="0"/>
                                   </p:stCondLst>
                                   <p:childTnLst>
                                     <p:set>
                                       <p:cBhvr>
-                                        <p:cTn id="22" dur="1" fill="hold">
+                                        <p:cTn id="24" dur="1" fill="hold">
                                           <p:stCondLst>
                                             <p:cond delay="0"/>
                                           </p:stCondLst>
@@ -6493,7 +6812,7 @@
                                     </p:set>
                                     <p:animEffect transition="in" filter="fade">
                                       <p:cBhvr>
-                                        <p:cTn id="23" dur="1000"/>
+                                        <p:cTn id="25" dur="1000"/>
                                         <p:tgtEl>
                                           <p:spTgt spid="7"/>
                                         </p:tgtEl>
@@ -6501,7 +6820,7 @@
                                     </p:animEffect>
                                     <p:anim calcmode="lin" valueType="num">
                                       <p:cBhvr>
-                                        <p:cTn id="24" dur="1000" fill="hold"/>
+                                        <p:cTn id="26" dur="1000" fill="hold"/>
                                         <p:tgtEl>
                                           <p:spTgt spid="7"/>
                                         </p:tgtEl>
@@ -6594,7 +6913,7 @@
           <a:bodyPr wrap="square" lIns="0" tIns="0" rIns="0" bIns="0" rtlCol="0" anchor="t"/>
           <a:lstStyle/>
           <a:p>
-            <a:pPr algn="l" indent="0" marL="0">
+            <a:pPr marL="0" indent="0" algn="l">
               <a:buNone/>
             </a:pPr>
             <a:r>
@@ -6633,11 +6952,11 @@
           <a:bodyPr wrap="square" lIns="0" tIns="0" rIns="0" bIns="0" rtlCol="0" anchor="t"/>
           <a:lstStyle/>
           <a:p>
-            <a:pPr algn="l" indent="0" marL="0">
+            <a:pPr marL="0" indent="0" algn="l">
               <a:buNone/>
             </a:pPr>
             <a:r>
-              <a:rPr lang="en-US" sz="1300" b="1" dirty="0">
+              <a:rPr lang="en-US" sz="2000" b="1" dirty="0">
                 <a:solidFill>
                   <a:srgbClr val="4F81BD"/>
                 </a:solidFill>
@@ -6645,9 +6964,9 @@
                 <a:ea typeface="Arial" pitchFamily="34" charset="-122"/>
                 <a:cs typeface="Arial" pitchFamily="34" charset="-120"/>
               </a:rPr>
-              <a:t>For next week — the course lands</a:t>
-            </a:r>
-            <a:endParaRPr lang="en-US" sz="1600" dirty="0"/>
+              <a:t>For next week → the course lands</a:t>
+            </a:r>
+            <a:endParaRPr lang="en-US" sz="2800" dirty="0"/>
           </a:p>
         </p:txBody>
       </p:sp>
@@ -6672,11 +6991,11 @@
           <a:bodyPr wrap="square" lIns="0" tIns="0" rIns="0" bIns="0" rtlCol="0" anchor="t"/>
           <a:lstStyle/>
           <a:p>
-            <a:pPr algn="l" indent="0" marL="0">
+            <a:pPr marL="0" indent="0" algn="l">
               <a:buNone/>
             </a:pPr>
             <a:r>
-              <a:rPr lang="en-US" sz="1700" b="1" dirty="0">
+              <a:rPr lang="en-US" sz="2000" b="1" dirty="0">
                 <a:solidFill>
                   <a:srgbClr val="1F497D"/>
                 </a:solidFill>
@@ -6687,11 +7006,8 @@
               <a:t>For next week, read:
 </a:t>
             </a:r>
-            <a:pPr algn="l" indent="0" marL="0">
-              <a:buNone/>
-            </a:pPr>
-            <a:r>
-              <a:rPr lang="en-US" sz="1500" dirty="0">
+            <a:r>
+              <a:rPr lang="en-US" dirty="0">
                 <a:solidFill>
                   <a:srgbClr val="000000"/>
                 </a:solidFill>
@@ -6699,24 +7015,10 @@
                 <a:ea typeface="Arial" pitchFamily="34" charset="-122"/>
                 <a:cs typeface="Arial" pitchFamily="34" charset="-120"/>
               </a:rPr>
-              <a:t>•  Matthew 28:16–20  — the Great Commission. Find the word “obey.” Who is sent, and to do what?
-</a:t>
-            </a:r>
-            <a:pPr algn="l" indent="0" marL="0">
-              <a:buNone/>
-            </a:pPr>
-            <a:r>
-              <a:rPr lang="en-US" sz="1500" dirty="0">
-                <a:solidFill>
-                  <a:srgbClr val="000000"/>
-                </a:solidFill>
-                <a:latin typeface="Arial" pitchFamily="34" charset="0"/>
-                <a:ea typeface="Arial" pitchFamily="34" charset="-122"/>
-                <a:cs typeface="Arial" pitchFamily="34" charset="-120"/>
-              </a:rPr>
-              <a:t>•  Hebrews 5:11–6:3  — the course’s home passage. Why “ought to be teachers by this time”?</a:t>
-            </a:r>
-            <a:endParaRPr lang="en-US" sz="1600" dirty="0"/>
+              <a:t>•  Matthew 28:16–20  → the Great Commission. Find the word “obey.” Who is sent, and to do what?
+•  Hebrews 5:11–6:3  → the course’s home passage. Why “ought to be teachers by this time”?</a:t>
+            </a:r>
+            <a:endParaRPr lang="en-US" sz="2000" dirty="0"/>
           </a:p>
         </p:txBody>
       </p:sp>
@@ -6741,11 +7043,11 @@
           <a:bodyPr wrap="square" lIns="0" tIns="0" rIns="0" bIns="0" rtlCol="0" anchor="t"/>
           <a:lstStyle/>
           <a:p>
-            <a:pPr algn="l" indent="0" marL="0">
+            <a:pPr marL="0" indent="0" algn="l">
               <a:buNone/>
             </a:pPr>
             <a:r>
-              <a:rPr lang="en-US" sz="1600" b="1" dirty="0">
+              <a:rPr lang="en-US" sz="2000" b="1">
                 <a:solidFill>
                   <a:srgbClr val="000000"/>
                 </a:solidFill>
@@ -6753,13 +7055,10 @@
                 <a:ea typeface="Arial" pitchFamily="34" charset="-122"/>
                 <a:cs typeface="Arial" pitchFamily="34" charset="-120"/>
               </a:rPr>
-              <a:t>Next week (the finale): </a:t>
-            </a:r>
-            <a:pPr algn="l" indent="0" marL="0">
-              <a:buNone/>
-            </a:pPr>
-            <a:r>
-              <a:rPr lang="en-US" sz="1550" i="1" dirty="0">
+              <a:t>Next week: </a:t>
+            </a:r>
+            <a:r>
+              <a:rPr lang="en-US" i="1" dirty="0">
                 <a:solidFill>
                   <a:srgbClr val="000000"/>
                 </a:solidFill>
@@ -6767,9 +7066,9 @@
                 <a:ea typeface="Arial" pitchFamily="34" charset="-122"/>
                 <a:cs typeface="Arial" pitchFamily="34" charset="-120"/>
               </a:rPr>
-              <a:t>Households and Teachers — God’s order reaches into the home, and maturity’s destination is the commission.</a:t>
-            </a:r>
-            <a:endParaRPr lang="en-US" sz="1600" dirty="0"/>
+              <a:t>Households and Teachers → God’s order reaches into the home, and maturity’s destination is the commission.</a:t>
+            </a:r>
+            <a:endParaRPr lang="en-US" sz="2000" dirty="0"/>
           </a:p>
         </p:txBody>
       </p:sp>
@@ -6794,11 +7093,11 @@
           <a:bodyPr wrap="square" lIns="0" tIns="0" rIns="0" bIns="0" rtlCol="0" anchor="t"/>
           <a:lstStyle/>
           <a:p>
-            <a:pPr algn="l" indent="0" marL="0">
+            <a:pPr marL="0" indent="0" algn="l">
               <a:buNone/>
             </a:pPr>
             <a:r>
-              <a:rPr lang="en-US" sz="1500" b="1" dirty="0">
+              <a:rPr lang="en-US" b="1" dirty="0">
                 <a:solidFill>
                   <a:srgbClr val="000000"/>
                 </a:solidFill>
@@ -6806,14 +7105,11 @@
                 <a:ea typeface="Arial" pitchFamily="34" charset="-122"/>
                 <a:cs typeface="Arial" pitchFamily="34" charset="-120"/>
               </a:rPr>
-              <a:t>Carry this week in one sentence:
+              <a:t>This week in one sentence:
 </a:t>
             </a:r>
-            <a:pPr algn="l" indent="0" marL="0">
-              <a:buNone/>
-            </a:pPr>
-            <a:r>
-              <a:rPr lang="en-US" sz="1600" b="1" i="1" dirty="0">
+            <a:r>
+              <a:rPr lang="en-US" sz="2000" b="1" i="1" dirty="0">
                 <a:solidFill>
                   <a:srgbClr val="1F497D"/>
                 </a:solidFill>
@@ -6821,9 +7117,9 @@
                 <a:ea typeface="Arial" pitchFamily="34" charset="-122"/>
                 <a:cs typeface="Arial" pitchFamily="34" charset="-120"/>
               </a:rPr>
-              <a:t>Grounded in creation, narrow in scope, generous in breadth — order for the sake of communion.</a:t>
-            </a:r>
-            <a:endParaRPr lang="en-US" sz="1600" dirty="0"/>
+              <a:t>Grounded in creation, narrow in scope, generous in breadth → order for the sake of communion.</a:t>
+            </a:r>
+            <a:endParaRPr lang="en-US" sz="2000" dirty="0"/>
           </a:p>
         </p:txBody>
       </p:sp>
@@ -6848,11 +7144,11 @@
           <a:bodyPr wrap="square" lIns="0" tIns="0" rIns="0" bIns="0" rtlCol="0" anchor="t"/>
           <a:lstStyle/>
           <a:p>
-            <a:pPr algn="ctr" indent="0" marL="0">
+            <a:pPr marL="0" indent="0" algn="ctr">
               <a:buNone/>
             </a:pPr>
             <a:r>
-              <a:rPr lang="en-US" sz="1600" b="1" i="1" dirty="0">
+              <a:rPr lang="en-US" sz="2000" b="1" i="1" dirty="0">
                 <a:solidFill>
                   <a:srgbClr val="1F497D"/>
                 </a:solidFill>
@@ -6860,9 +7156,9 @@
                 <a:ea typeface="Arial" pitchFamily="34" charset="-122"/>
                 <a:cs typeface="Arial" pitchFamily="34" charset="-120"/>
               </a:rPr>
-              <a:t>“Let a woman learn…”  —  the passage begins by making her a disciple.  (1 Tim 2:11)</a:t>
-            </a:r>
-            <a:endParaRPr lang="en-US" sz="1600" dirty="0"/>
+              <a:t>“Let a woman learn…”  →  the passage begins by making her a disciple.  (1 Tim 2:11)</a:t>
+            </a:r>
+            <a:endParaRPr lang="en-US" sz="2000" dirty="0"/>
           </a:p>
         </p:txBody>
       </p:sp>
@@ -6887,18 +7183,18 @@
           <a:bodyPr wrap="square" lIns="0" tIns="0" rIns="0" bIns="0" rtlCol="0" anchor="t"/>
           <a:lstStyle/>
           <a:p>
-            <a:pPr algn="ctr" indent="0" marL="0">
+            <a:pPr marL="0" indent="0" algn="ctr">
               <a:buNone/>
             </a:pPr>
             <a:r>
-              <a:rPr lang="en-US" sz="1300" b="1" u="sng" dirty="0">
+              <a:rPr lang="en-US" b="1" u="sng" dirty="0">
                 <a:solidFill>
                   <a:srgbClr val="4F81BD"/>
                 </a:solidFill>
                 <a:latin typeface="Arial" pitchFamily="34" charset="0"/>
                 <a:ea typeface="Arial" pitchFamily="34" charset="-122"/>
                 <a:cs typeface="Arial" pitchFamily="34" charset="-120"/>
-                <a:hlinkClick r:id="rId1" invalidUrl="" action="" tgtFrame="" tooltip="" history="1" highlightClick="0" endSnd="0">
+                <a:hlinkClick r:id="rId3">
                   <a:extLst>
                     <a:ext uri="{A12FA001-AC4F-418D-AE19-62706E023703}">
                       <ahyp:hlinkClr xmlns:ahyp="http://schemas.microsoft.com/office/drawing/2018/hyperlinkcolor" val="tx"/>
@@ -6906,9 +7202,38 @@
                   </a:extLst>
                 </a:hlinkClick>
               </a:rPr>
-              <a:t>https://tinyurl.com/TeachTheWord</a:t>
-            </a:r>
-            <a:endParaRPr lang="en-US" sz="1600" dirty="0"/>
+              <a:t>https://</a:t>
+            </a:r>
+            <a:r>
+              <a:rPr lang="en-US" b="1" u="sng" dirty="0" err="1">
+                <a:solidFill>
+                  <a:srgbClr val="4F81BD"/>
+                </a:solidFill>
+                <a:latin typeface="Arial" pitchFamily="34" charset="0"/>
+                <a:ea typeface="Arial" pitchFamily="34" charset="-122"/>
+                <a:cs typeface="Arial" pitchFamily="34" charset="-120"/>
+                <a:hlinkClick r:id="rId3">
+                  <a:extLst>
+                    <a:ext uri="{A12FA001-AC4F-418D-AE19-62706E023703}">
+                      <ahyp:hlinkClr xmlns:ahyp="http://schemas.microsoft.com/office/drawing/2018/hyperlinkcolor" val="tx"/>
+                    </a:ext>
+                  </a:extLst>
+                </a:hlinkClick>
+              </a:rPr>
+              <a:t>TeachTheWord</a:t>
+            </a:r>
+            <a:r>
+              <a:rPr lang="en-US" b="1" u="sng" dirty="0" err="1">
+                <a:solidFill>
+                  <a:srgbClr val="4F81BD"/>
+                </a:solidFill>
+                <a:latin typeface="Arial" pitchFamily="34" charset="0"/>
+                <a:ea typeface="Arial" pitchFamily="34" charset="-122"/>
+                <a:cs typeface="Arial" pitchFamily="34" charset="-120"/>
+              </a:rPr>
+              <a:t>.Church</a:t>
+            </a:r>
+            <a:endParaRPr lang="en-US" sz="2400" dirty="0"/>
           </a:p>
         </p:txBody>
       </p:sp>
@@ -6926,26 +7251,26 @@
               <p:cTn id="2" dur="indefinite" nodeType="mainSeq">
                 <p:childTnLst>
                   <p:par>
-                    <p:cTn id="7" fill="hold">
+                    <p:cTn id="3" fill="hold">
                       <p:stCondLst>
                         <p:cond delay="indefinite"/>
                       </p:stCondLst>
                       <p:childTnLst>
                         <p:par>
-                          <p:cTn id="8" fill="hold">
+                          <p:cTn id="4" fill="hold">
                             <p:stCondLst>
                               <p:cond delay="0"/>
                             </p:stCondLst>
                             <p:childTnLst>
                               <p:par>
-                                <p:cTn id="3" presetID="42" presetClass="entr" presetSubtype="0" fill="hold" grpId="0" nodeType="clickEffect">
+                                <p:cTn id="5" presetID="42" presetClass="entr" presetSubtype="0" fill="hold" nodeType="clickEffect">
                                   <p:stCondLst>
                                     <p:cond delay="0"/>
                                   </p:stCondLst>
                                   <p:childTnLst>
                                     <p:set>
                                       <p:cBhvr>
-                                        <p:cTn id="4" dur="1" fill="hold">
+                                        <p:cTn id="6" dur="1" fill="hold">
                                           <p:stCondLst>
                                             <p:cond delay="0"/>
                                           </p:stCondLst>
@@ -6963,7 +7288,7 @@
                                     </p:set>
                                     <p:animEffect transition="in" filter="fade">
                                       <p:cBhvr>
-                                        <p:cTn id="5" dur="1000"/>
+                                        <p:cTn id="7" dur="1000"/>
                                         <p:tgtEl>
                                           <p:spTgt spid="4"/>
                                         </p:tgtEl>
@@ -6971,7 +7296,7 @@
                                     </p:animEffect>
                                     <p:anim calcmode="lin" valueType="num">
                                       <p:cBhvr>
-                                        <p:cTn id="6" dur="1000" fill="hold"/>
+                                        <p:cTn id="8" dur="1000" fill="hold"/>
                                         <p:tgtEl>
                                           <p:spTgt spid="4"/>
                                         </p:tgtEl>
@@ -7002,26 +7327,26 @@
                     </p:cTn>
                   </p:par>
                   <p:par>
-                    <p:cTn id="13" fill="hold">
+                    <p:cTn id="9" fill="hold">
                       <p:stCondLst>
                         <p:cond delay="indefinite"/>
                       </p:stCondLst>
                       <p:childTnLst>
                         <p:par>
-                          <p:cTn id="14" fill="hold">
+                          <p:cTn id="10" fill="hold">
                             <p:stCondLst>
                               <p:cond delay="0"/>
                             </p:stCondLst>
                             <p:childTnLst>
                               <p:par>
-                                <p:cTn id="9" presetID="42" presetClass="entr" presetSubtype="0" fill="hold" grpId="0" nodeType="clickEffect">
+                                <p:cTn id="11" presetID="42" presetClass="entr" presetSubtype="0" fill="hold" nodeType="clickEffect">
                                   <p:stCondLst>
                                     <p:cond delay="0"/>
                                   </p:stCondLst>
                                   <p:childTnLst>
                                     <p:set>
                                       <p:cBhvr>
-                                        <p:cTn id="10" dur="1" fill="hold">
+                                        <p:cTn id="12" dur="1" fill="hold">
                                           <p:stCondLst>
                                             <p:cond delay="0"/>
                                           </p:stCondLst>
@@ -7039,7 +7364,7 @@
                                     </p:set>
                                     <p:animEffect transition="in" filter="fade">
                                       <p:cBhvr>
-                                        <p:cTn id="11" dur="1000"/>
+                                        <p:cTn id="13" dur="1000"/>
                                         <p:tgtEl>
                                           <p:spTgt spid="5"/>
                                         </p:tgtEl>
@@ -7047,7 +7372,7 @@
                                     </p:animEffect>
                                     <p:anim calcmode="lin" valueType="num">
                                       <p:cBhvr>
-                                        <p:cTn id="12" dur="1000" fill="hold"/>
+                                        <p:cTn id="14" dur="1000" fill="hold"/>
                                         <p:tgtEl>
                                           <p:spTgt spid="5"/>
                                         </p:tgtEl>
@@ -7078,26 +7403,26 @@
                     </p:cTn>
                   </p:par>
                   <p:par>
-                    <p:cTn id="19" fill="hold">
+                    <p:cTn id="15" fill="hold">
                       <p:stCondLst>
                         <p:cond delay="indefinite"/>
                       </p:stCondLst>
                       <p:childTnLst>
                         <p:par>
-                          <p:cTn id="20" fill="hold">
+                          <p:cTn id="16" fill="hold">
                             <p:stCondLst>
                               <p:cond delay="0"/>
                             </p:stCondLst>
                             <p:childTnLst>
                               <p:par>
-                                <p:cTn id="15" presetID="42" presetClass="entr" presetSubtype="0" fill="hold" grpId="0" nodeType="clickEffect">
+                                <p:cTn id="17" presetID="42" presetClass="entr" presetSubtype="0" fill="hold" nodeType="clickEffect">
                                   <p:stCondLst>
                                     <p:cond delay="0"/>
                                   </p:stCondLst>
                                   <p:childTnLst>
                                     <p:set>
                                       <p:cBhvr>
-                                        <p:cTn id="16" dur="1" fill="hold">
+                                        <p:cTn id="18" dur="1" fill="hold">
                                           <p:stCondLst>
                                             <p:cond delay="0"/>
                                           </p:stCondLst>
@@ -7115,7 +7440,7 @@
                                     </p:set>
                                     <p:animEffect transition="in" filter="fade">
                                       <p:cBhvr>
-                                        <p:cTn id="17" dur="1000"/>
+                                        <p:cTn id="19" dur="1000"/>
                                         <p:tgtEl>
                                           <p:spTgt spid="6"/>
                                         </p:tgtEl>
@@ -7123,7 +7448,7 @@
                                     </p:animEffect>
                                     <p:anim calcmode="lin" valueType="num">
                                       <p:cBhvr>
-                                        <p:cTn id="18" dur="1000" fill="hold"/>
+                                        <p:cTn id="20" dur="1000" fill="hold"/>
                                         <p:tgtEl>
                                           <p:spTgt spid="6"/>
                                         </p:tgtEl>
@@ -7154,26 +7479,26 @@
                     </p:cTn>
                   </p:par>
                   <p:par>
-                    <p:cTn id="25" fill="hold">
+                    <p:cTn id="21" fill="hold">
                       <p:stCondLst>
                         <p:cond delay="indefinite"/>
                       </p:stCondLst>
                       <p:childTnLst>
                         <p:par>
-                          <p:cTn id="26" fill="hold">
+                          <p:cTn id="22" fill="hold">
                             <p:stCondLst>
                               <p:cond delay="0"/>
                             </p:stCondLst>
                             <p:childTnLst>
                               <p:par>
-                                <p:cTn id="21" presetID="42" presetClass="entr" presetSubtype="0" fill="hold" grpId="0" nodeType="clickEffect">
+                                <p:cTn id="23" presetID="42" presetClass="entr" presetSubtype="0" fill="hold" nodeType="clickEffect">
                                   <p:stCondLst>
                                     <p:cond delay="0"/>
                                   </p:stCondLst>
                                   <p:childTnLst>
                                     <p:set>
                                       <p:cBhvr>
-                                        <p:cTn id="22" dur="1" fill="hold">
+                                        <p:cTn id="24" dur="1" fill="hold">
                                           <p:stCondLst>
                                             <p:cond delay="0"/>
                                           </p:stCondLst>
@@ -7191,7 +7516,7 @@
                                     </p:set>
                                     <p:animEffect transition="in" filter="fade">
                                       <p:cBhvr>
-                                        <p:cTn id="23" dur="1000"/>
+                                        <p:cTn id="25" dur="1000"/>
                                         <p:tgtEl>
                                           <p:spTgt spid="7"/>
                                         </p:tgtEl>
@@ -7199,7 +7524,7 @@
                                     </p:animEffect>
                                     <p:anim calcmode="lin" valueType="num">
                                       <p:cBhvr>
-                                        <p:cTn id="24" dur="1000" fill="hold"/>
+                                        <p:cTn id="26" dur="1000" fill="hold"/>
                                         <p:tgtEl>
                                           <p:spTgt spid="7"/>
                                         </p:tgtEl>
@@ -7547,4 +7872,319 @@
     </a:ext>
   </a:extLst>
 </a:theme>
+</file>
+
+<file path=ppt/theme/theme2.xml><?xml version="1.0" encoding="utf-8"?>
+<a:theme xmlns:a="http://schemas.openxmlformats.org/drawingml/2006/main" name="Office Theme">
+  <a:themeElements>
+    <a:clrScheme name="Office">
+      <a:dk1>
+        <a:sysClr val="windowText" lastClr="000000"/>
+      </a:dk1>
+      <a:lt1>
+        <a:sysClr val="window" lastClr="FFFFFF"/>
+      </a:lt1>
+      <a:dk2>
+        <a:srgbClr val="0E2841"/>
+      </a:dk2>
+      <a:lt2>
+        <a:srgbClr val="E8E8E8"/>
+      </a:lt2>
+      <a:accent1>
+        <a:srgbClr val="156082"/>
+      </a:accent1>
+      <a:accent2>
+        <a:srgbClr val="E97132"/>
+      </a:accent2>
+      <a:accent3>
+        <a:srgbClr val="196B24"/>
+      </a:accent3>
+      <a:accent4>
+        <a:srgbClr val="0F9ED5"/>
+      </a:accent4>
+      <a:accent5>
+        <a:srgbClr val="A02B93"/>
+      </a:accent5>
+      <a:accent6>
+        <a:srgbClr val="4EA72E"/>
+      </a:accent6>
+      <a:hlink>
+        <a:srgbClr val="467886"/>
+      </a:hlink>
+      <a:folHlink>
+        <a:srgbClr val="96607D"/>
+      </a:folHlink>
+    </a:clrScheme>
+    <a:fontScheme name="Office">
+      <a:majorFont>
+        <a:latin typeface="Aptos Display" panose="02110004020202020204"/>
+        <a:ea typeface=""/>
+        <a:cs typeface=""/>
+        <a:font script="Jpan" typeface="游ゴシック Light"/>
+        <a:font script="Hang" typeface="맑은 고딕"/>
+        <a:font script="Hans" typeface="等线 Light"/>
+        <a:font script="Hant" typeface="新細明體"/>
+        <a:font script="Arab" typeface="Times New Roman"/>
+        <a:font script="Hebr" typeface="Times New Roman"/>
+        <a:font script="Thai" typeface="Angsana New"/>
+        <a:font script="Ethi" typeface="Nyala"/>
+        <a:font script="Beng" typeface="Vrinda"/>
+        <a:font script="Gujr" typeface="Shruti"/>
+        <a:font script="Khmr" typeface="MoolBoran"/>
+        <a:font script="Knda" typeface="Tunga"/>
+        <a:font script="Guru" typeface="Raavi"/>
+        <a:font script="Cans" typeface="Euphemia"/>
+        <a:font script="Cher" typeface="Plantagenet Cherokee"/>
+        <a:font script="Yiii" typeface="Microsoft Yi Baiti"/>
+        <a:font script="Tibt" typeface="Microsoft Himalaya"/>
+        <a:font script="Thaa" typeface="MV Boli"/>
+        <a:font script="Deva" typeface="Mangal"/>
+        <a:font script="Telu" typeface="Gautami"/>
+        <a:font script="Taml" typeface="Latha"/>
+        <a:font script="Syrc" typeface="Estrangelo Edessa"/>
+        <a:font script="Orya" typeface="Kalinga"/>
+        <a:font script="Mlym" typeface="Kartika"/>
+        <a:font script="Laoo" typeface="DokChampa"/>
+        <a:font script="Sinh" typeface="Iskoola Pota"/>
+        <a:font script="Mong" typeface="Mongolian Baiti"/>
+        <a:font script="Viet" typeface="Times New Roman"/>
+        <a:font script="Uigh" typeface="Microsoft Uighur"/>
+        <a:font script="Geor" typeface="Sylfaen"/>
+        <a:font script="Armn" typeface="Arial"/>
+        <a:font script="Bugi" typeface="Leelawadee UI"/>
+        <a:font script="Bopo" typeface="Microsoft JhengHei"/>
+        <a:font script="Java" typeface="Javanese Text"/>
+        <a:font script="Lisu" typeface="Segoe UI"/>
+        <a:font script="Mymr" typeface="Myanmar Text"/>
+        <a:font script="Nkoo" typeface="Ebrima"/>
+        <a:font script="Olck" typeface="Nirmala UI"/>
+        <a:font script="Osma" typeface="Ebrima"/>
+        <a:font script="Phag" typeface="Phagspa"/>
+        <a:font script="Syrn" typeface="Estrangelo Edessa"/>
+        <a:font script="Syrj" typeface="Estrangelo Edessa"/>
+        <a:font script="Syre" typeface="Estrangelo Edessa"/>
+        <a:font script="Sora" typeface="Nirmala UI"/>
+        <a:font script="Tale" typeface="Microsoft Tai Le"/>
+        <a:font script="Talu" typeface="Microsoft New Tai Lue"/>
+        <a:font script="Tfng" typeface="Ebrima"/>
+      </a:majorFont>
+      <a:minorFont>
+        <a:latin typeface="Aptos" panose="02110004020202020204"/>
+        <a:ea typeface=""/>
+        <a:cs typeface=""/>
+        <a:font script="Jpan" typeface="游ゴシック"/>
+        <a:font script="Hang" typeface="맑은 고딕"/>
+        <a:font script="Hans" typeface="等线"/>
+        <a:font script="Hant" typeface="新細明體"/>
+        <a:font script="Arab" typeface="Arial"/>
+        <a:font script="Hebr" typeface="Arial"/>
+        <a:font script="Thai" typeface="Cordia New"/>
+        <a:font script="Ethi" typeface="Nyala"/>
+        <a:font script="Beng" typeface="Vrinda"/>
+        <a:font script="Gujr" typeface="Shruti"/>
+        <a:font script="Khmr" typeface="DaunPenh"/>
+        <a:font script="Knda" typeface="Tunga"/>
+        <a:font script="Guru" typeface="Raavi"/>
+        <a:font script="Cans" typeface="Euphemia"/>
+        <a:font script="Cher" typeface="Plantagenet Cherokee"/>
+        <a:font script="Yiii" typeface="Microsoft Yi Baiti"/>
+        <a:font script="Tibt" typeface="Microsoft Himalaya"/>
+        <a:font script="Thaa" typeface="MV Boli"/>
+        <a:font script="Deva" typeface="Mangal"/>
+        <a:font script="Telu" typeface="Gautami"/>
+        <a:font script="Taml" typeface="Latha"/>
+        <a:font script="Syrc" typeface="Estrangelo Edessa"/>
+        <a:font script="Orya" typeface="Kalinga"/>
+        <a:font script="Mlym" typeface="Kartika"/>
+        <a:font script="Laoo" typeface="DokChampa"/>
+        <a:font script="Sinh" typeface="Iskoola Pota"/>
+        <a:font script="Mong" typeface="Mongolian Baiti"/>
+        <a:font script="Viet" typeface="Arial"/>
+        <a:font script="Uigh" typeface="Microsoft Uighur"/>
+        <a:font script="Geor" typeface="Sylfaen"/>
+        <a:font script="Armn" typeface="Arial"/>
+        <a:font script="Bugi" typeface="Leelawadee UI"/>
+        <a:font script="Bopo" typeface="Microsoft JhengHei"/>
+        <a:font script="Java" typeface="Javanese Text"/>
+        <a:font script="Lisu" typeface="Segoe UI"/>
+        <a:font script="Mymr" typeface="Myanmar Text"/>
+        <a:font script="Nkoo" typeface="Ebrima"/>
+        <a:font script="Olck" typeface="Nirmala UI"/>
+        <a:font script="Osma" typeface="Ebrima"/>
+        <a:font script="Phag" typeface="Phagspa"/>
+        <a:font script="Syrn" typeface="Estrangelo Edessa"/>
+        <a:font script="Syrj" typeface="Estrangelo Edessa"/>
+        <a:font script="Syre" typeface="Estrangelo Edessa"/>
+        <a:font script="Sora" typeface="Nirmala UI"/>
+        <a:font script="Tale" typeface="Microsoft Tai Le"/>
+        <a:font script="Talu" typeface="Microsoft New Tai Lue"/>
+        <a:font script="Tfng" typeface="Ebrima"/>
+      </a:minorFont>
+    </a:fontScheme>
+    <a:fmtScheme name="Office">
+      <a:fillStyleLst>
+        <a:solidFill>
+          <a:schemeClr val="phClr"/>
+        </a:solidFill>
+        <a:gradFill rotWithShape="1">
+          <a:gsLst>
+            <a:gs pos="0">
+              <a:schemeClr val="phClr">
+                <a:lumMod val="110000"/>
+                <a:satMod val="105000"/>
+                <a:tint val="67000"/>
+              </a:schemeClr>
+            </a:gs>
+            <a:gs pos="50000">
+              <a:schemeClr val="phClr">
+                <a:lumMod val="105000"/>
+                <a:satMod val="103000"/>
+                <a:tint val="73000"/>
+              </a:schemeClr>
+            </a:gs>
+            <a:gs pos="100000">
+              <a:schemeClr val="phClr">
+                <a:lumMod val="105000"/>
+                <a:satMod val="109000"/>
+                <a:tint val="81000"/>
+              </a:schemeClr>
+            </a:gs>
+          </a:gsLst>
+          <a:lin ang="5400000" scaled="0"/>
+        </a:gradFill>
+        <a:gradFill rotWithShape="1">
+          <a:gsLst>
+            <a:gs pos="0">
+              <a:schemeClr val="phClr">
+                <a:satMod val="103000"/>
+                <a:lumMod val="102000"/>
+                <a:tint val="94000"/>
+              </a:schemeClr>
+            </a:gs>
+            <a:gs pos="50000">
+              <a:schemeClr val="phClr">
+                <a:satMod val="110000"/>
+                <a:lumMod val="100000"/>
+                <a:shade val="100000"/>
+              </a:schemeClr>
+            </a:gs>
+            <a:gs pos="100000">
+              <a:schemeClr val="phClr">
+                <a:lumMod val="99000"/>
+                <a:satMod val="120000"/>
+                <a:shade val="78000"/>
+              </a:schemeClr>
+            </a:gs>
+          </a:gsLst>
+          <a:lin ang="5400000" scaled="0"/>
+        </a:gradFill>
+      </a:fillStyleLst>
+      <a:lnStyleLst>
+        <a:ln w="12700" cap="flat" cmpd="sng" algn="ctr">
+          <a:solidFill>
+            <a:schemeClr val="phClr"/>
+          </a:solidFill>
+          <a:prstDash val="solid"/>
+          <a:miter lim="800000"/>
+        </a:ln>
+        <a:ln w="19050" cap="flat" cmpd="sng" algn="ctr">
+          <a:solidFill>
+            <a:schemeClr val="phClr"/>
+          </a:solidFill>
+          <a:prstDash val="solid"/>
+          <a:miter lim="800000"/>
+        </a:ln>
+        <a:ln w="25400" cap="flat" cmpd="sng" algn="ctr">
+          <a:solidFill>
+            <a:schemeClr val="phClr"/>
+          </a:solidFill>
+          <a:prstDash val="solid"/>
+          <a:miter lim="800000"/>
+        </a:ln>
+      </a:lnStyleLst>
+      <a:effectStyleLst>
+        <a:effectStyle>
+          <a:effectLst/>
+        </a:effectStyle>
+        <a:effectStyle>
+          <a:effectLst/>
+        </a:effectStyle>
+        <a:effectStyle>
+          <a:effectLst>
+            <a:outerShdw blurRad="57150" dist="19050" dir="5400000" algn="ctr" rotWithShape="0">
+              <a:srgbClr val="000000">
+                <a:alpha val="63000"/>
+              </a:srgbClr>
+            </a:outerShdw>
+          </a:effectLst>
+        </a:effectStyle>
+      </a:effectStyleLst>
+      <a:bgFillStyleLst>
+        <a:solidFill>
+          <a:schemeClr val="phClr"/>
+        </a:solidFill>
+        <a:solidFill>
+          <a:schemeClr val="phClr">
+            <a:tint val="95000"/>
+            <a:satMod val="170000"/>
+          </a:schemeClr>
+        </a:solidFill>
+        <a:gradFill rotWithShape="1">
+          <a:gsLst>
+            <a:gs pos="0">
+              <a:schemeClr val="phClr">
+                <a:tint val="93000"/>
+                <a:satMod val="150000"/>
+                <a:shade val="98000"/>
+                <a:lumMod val="102000"/>
+              </a:schemeClr>
+            </a:gs>
+            <a:gs pos="50000">
+              <a:schemeClr val="phClr">
+                <a:tint val="98000"/>
+                <a:satMod val="130000"/>
+                <a:shade val="90000"/>
+                <a:lumMod val="103000"/>
+              </a:schemeClr>
+            </a:gs>
+            <a:gs pos="100000">
+              <a:schemeClr val="phClr">
+                <a:shade val="63000"/>
+                <a:satMod val="120000"/>
+              </a:schemeClr>
+            </a:gs>
+          </a:gsLst>
+          <a:lin ang="5400000" scaled="0"/>
+        </a:gradFill>
+      </a:bgFillStyleLst>
+    </a:fmtScheme>
+  </a:themeElements>
+  <a:objectDefaults>
+    <a:lnDef>
+      <a:spPr/>
+      <a:bodyPr/>
+      <a:lstStyle/>
+      <a:style>
+        <a:lnRef idx="2">
+          <a:schemeClr val="accent1"/>
+        </a:lnRef>
+        <a:fillRef idx="0">
+          <a:schemeClr val="accent1"/>
+        </a:fillRef>
+        <a:effectRef idx="1">
+          <a:schemeClr val="accent1"/>
+        </a:effectRef>
+        <a:fontRef idx="minor">
+          <a:schemeClr val="tx1"/>
+        </a:fontRef>
+      </a:style>
+    </a:lnDef>
+  </a:objectDefaults>
+  <a:extraClrSchemeLst/>
+  <a:extLst>
+    <a:ext uri="{05A4C25C-085E-4340-85A3-A5531E510DB2}">
+      <thm15:themeFamily xmlns:thm15="http://schemas.microsoft.com/office/thememl/2012/main" name="Office Theme" id="{2E142A2C-CD16-42D6-873A-C26D2A0506FA}" vid="{1BDDFF52-6CD6-40A5-AB3C-68EB2F1E4D0A}"/>
+    </a:ext>
+  </a:extLst>
+</a:theme>
 </file>